--- a/decks/01-model-gateway.pptx
+++ b/decks/01-model-gateway.pptx
@@ -2,18 +2,19 @@
 <file path=ppt/presentation.xml><?xml version="1.0" encoding="utf-8"?>
 <p:presentation xmlns:p="http://schemas.openxmlformats.org/presentationml/2006/main">
   <p:sldMasterIdLst>
-    <p:sldMasterId xmlns:r="http://schemas.openxmlformats.org/officeDocument/2006/relationships" id="2147483648" r:id="Rd83fc1213a0540e2"/>
+    <p:sldMasterId xmlns:r="http://schemas.openxmlformats.org/officeDocument/2006/relationships" id="2147483648" r:id="R54e34e7b368c488f"/>
   </p:sldMasterIdLst>
   <p:notesMasterIdLst>
-    <p:notesMasterId xmlns:r="http://schemas.openxmlformats.org/officeDocument/2006/relationships" r:id="R1c3ba36c2fd84ae5"/>
+    <p:notesMasterId xmlns:r="http://schemas.openxmlformats.org/officeDocument/2006/relationships" r:id="Rd6648327a55b4ea5"/>
   </p:notesMasterIdLst>
   <p:sldIdLst>
-    <p:sldId xmlns:r="http://schemas.openxmlformats.org/officeDocument/2006/relationships" id="256" r:id="R7bb525e60f544fed"/>
-    <p:sldId xmlns:r="http://schemas.openxmlformats.org/officeDocument/2006/relationships" id="257" r:id="R3158a0ec0f4d42cd"/>
-    <p:sldId xmlns:r="http://schemas.openxmlformats.org/officeDocument/2006/relationships" id="258" r:id="R80aca650182045fb"/>
-    <p:sldId xmlns:r="http://schemas.openxmlformats.org/officeDocument/2006/relationships" id="259" r:id="R61ac169da0894bff"/>
-    <p:sldId xmlns:r="http://schemas.openxmlformats.org/officeDocument/2006/relationships" id="260" r:id="Read6a753a9fa43c5"/>
-    <p:sldId xmlns:r="http://schemas.openxmlformats.org/officeDocument/2006/relationships" id="261" r:id="Rd0f2ee56f32f4aa1"/>
+    <p:sldId xmlns:r="http://schemas.openxmlformats.org/officeDocument/2006/relationships" id="256" r:id="R2f29c20f8b69456e"/>
+    <p:sldId xmlns:r="http://schemas.openxmlformats.org/officeDocument/2006/relationships" id="257" r:id="R8fd13cd03d4d4af8"/>
+    <p:sldId xmlns:r="http://schemas.openxmlformats.org/officeDocument/2006/relationships" id="258" r:id="Rb53e804ead6f4b1e"/>
+    <p:sldId xmlns:r="http://schemas.openxmlformats.org/officeDocument/2006/relationships" id="259" r:id="Rc786dfdc97184574"/>
+    <p:sldId xmlns:r="http://schemas.openxmlformats.org/officeDocument/2006/relationships" id="260" r:id="R0b2adc85bd0340a1"/>
+    <p:sldId xmlns:r="http://schemas.openxmlformats.org/officeDocument/2006/relationships" id="261" r:id="Rf0449dc3f22c43b7"/>
+    <p:sldId xmlns:r="http://schemas.openxmlformats.org/officeDocument/2006/relationships" id="262" r:id="R92251e9c5c304fff"/>
   </p:sldIdLst>
   <p:sldSz cx="15240000" cy="8572500"/>
   <p:notesSz cx="6858000" cy="9144000"/>
@@ -447,17 +448,32 @@
           <a:lstStyle xmlns:a="http://schemas.openxmlformats.org/drawingml/2006/main"/>
           <a:p xmlns:a="http://schemas.openxmlformats.org/drawingml/2006/main">
             <a:r>
-              <a:t>Timing: 1 minute.</a:t>
-            </a:r>
-          </a:p>
-          <a:p xmlns:a="http://schemas.openxmlformats.org/drawingml/2006/main">
-            <a:r>
-              <a:t>State the engineering outcome: the same lesson code must run with Ollama or OpenAI.</a:t>
-            </a:r>
-          </a:p>
-          <a:p xmlns:a="http://schemas.openxmlformats.org/drawingml/2006/main">
-            <a:r>
-              <a:t>Do not begin with provider setup details; begin with the application boundary.</a:t>
+              <a:t>State the outcome: one measured application boundary supports local Ollama and hosted OpenAI models.</a:t>
+            </a:r>
+          </a:p>
+          <a:p xmlns:a="http://schemas.openxmlformats.org/drawingml/2006/main">
+            <a:r>
+              <a:t/>
+            </a:r>
+          </a:p>
+          <a:p xmlns:a="http://schemas.openxmlformats.org/drawingml/2006/main">
+            <a:r>
+              <a:t>[Sources]</a:t>
+            </a:r>
+          </a:p>
+          <a:p xmlns:a="http://schemas.openxmlformats.org/drawingml/2006/main">
+            <a:r>
+              <a:t>- https://developers.openai.com/api/docs/models</a:t>
+            </a:r>
+          </a:p>
+          <a:p xmlns:a="http://schemas.openxmlformats.org/drawingml/2006/main">
+            <a:r>
+              <a:t>- https://docs.ollama.com/api</a:t>
+            </a:r>
+          </a:p>
+          <a:p xmlns:a="http://schemas.openxmlformats.org/drawingml/2006/main">
+            <a:r>
+              <a:t>[/Sources]</a:t>
             </a:r>
           </a:p>
         </p:txBody>
@@ -527,17 +543,7 @@
           <a:lstStyle xmlns:a="http://schemas.openxmlformats.org/drawingml/2006/main"/>
           <a:p xmlns:a="http://schemas.openxmlformats.org/drawingml/2006/main">
             <a:r>
-              <a:t>Timing: 2 minutes.</a:t>
-            </a:r>
-          </a:p>
-          <a:p xmlns:a="http://schemas.openxmlformats.org/drawingml/2006/main">
-            <a:r>
-              <a:t>Walk left to right. Settings choose an adapter; the notebook calls one internal method.</a:t>
-            </a:r>
-          </a:p>
-          <a:p xmlns:a="http://schemas.openxmlformats.org/drawingml/2006/main">
-            <a:r>
-              <a:t>Point out that the normalised metadata becomes the tracing boundary in later lessons.</a:t>
+              <a:t>Walk left to right. Configuration selects the provider adapter; application code consumes one normalized response record.</a:t>
             </a:r>
           </a:p>
           <a:p xmlns:a="http://schemas.openxmlformats.org/drawingml/2006/main">
@@ -552,7 +558,12 @@
           </a:p>
           <a:p xmlns:a="http://schemas.openxmlformats.org/drawingml/2006/main">
             <a:r>
-              <a:t>- https://developers.openai.com/api/docs/models/all</a:t>
+              <a:t>- https://developers.openai.com/api/docs/models</a:t>
+            </a:r>
+          </a:p>
+          <a:p xmlns:a="http://schemas.openxmlformats.org/drawingml/2006/main">
+            <a:r>
+              <a:t>- https://docs.ollama.com/api</a:t>
             </a:r>
           </a:p>
           <a:p xmlns:a="http://schemas.openxmlformats.org/drawingml/2006/main">
@@ -627,17 +638,27 @@
           <a:lstStyle xmlns:a="http://schemas.openxmlformats.org/drawingml/2006/main"/>
           <a:p xmlns:a="http://schemas.openxmlformats.org/drawingml/2006/main">
             <a:r>
-              <a:t>Timing: 90 seconds.</a:t>
-            </a:r>
-          </a:p>
-          <a:p xmlns:a="http://schemas.openxmlformats.org/drawingml/2006/main">
-            <a:r>
-              <a:t>Contrast an ordered message list with one opaque concatenated string.</a:t>
-            </a:r>
-          </a:p>
-          <a:p xmlns:a="http://schemas.openxmlformats.org/drawingml/2006/main">
-            <a:r>
-              <a:t>Keep tool messages and conversation state for later lessons.</a:t>
+              <a:t>Separate stable system instructions from the current question and evidence. These roles remain inspectable and versionable.</a:t>
+            </a:r>
+          </a:p>
+          <a:p xmlns:a="http://schemas.openxmlformats.org/drawingml/2006/main">
+            <a:r>
+              <a:t/>
+            </a:r>
+          </a:p>
+          <a:p xmlns:a="http://schemas.openxmlformats.org/drawingml/2006/main">
+            <a:r>
+              <a:t>[Sources]</a:t>
+            </a:r>
+          </a:p>
+          <a:p xmlns:a="http://schemas.openxmlformats.org/drawingml/2006/main">
+            <a:r>
+              <a:t>- https://developers.openai.com/api/docs/guides/prompt-engineering</a:t>
+            </a:r>
+          </a:p>
+          <a:p xmlns:a="http://schemas.openxmlformats.org/drawingml/2006/main">
+            <a:r>
+              <a:t>[/Sources]</a:t>
             </a:r>
           </a:p>
         </p:txBody>
@@ -707,17 +728,32 @@
           <a:lstStyle xmlns:a="http://schemas.openxmlformats.org/drawingml/2006/main"/>
           <a:p xmlns:a="http://schemas.openxmlformats.org/drawingml/2006/main">
             <a:r>
-              <a:t>Timing: 90 seconds.</a:t>
-            </a:r>
-          </a:p>
-          <a:p xmlns:a="http://schemas.openxmlformats.org/drawingml/2006/main">
-            <a:r>
-              <a:t>Ask the class whether the provider call can succeed technically. Answer: yes.</a:t>
-            </a:r>
-          </a:p>
-          <a:p xmlns:a="http://schemas.openxmlformats.org/drawingml/2006/main">
-            <a:r>
-              <a:t>Then reveal why the result is not a professional analyst output.</a:t>
+              <a:t>Latency and available token counts are application data. Streaming improves delivery latency but does not add evidence or factual quality.</a:t>
+            </a:r>
+          </a:p>
+          <a:p xmlns:a="http://schemas.openxmlformats.org/drawingml/2006/main">
+            <a:r>
+              <a:t/>
+            </a:r>
+          </a:p>
+          <a:p xmlns:a="http://schemas.openxmlformats.org/drawingml/2006/main">
+            <a:r>
+              <a:t>[Sources]</a:t>
+            </a:r>
+          </a:p>
+          <a:p xmlns:a="http://schemas.openxmlformats.org/drawingml/2006/main">
+            <a:r>
+              <a:t>- https://developers.openai.com/api/docs/guides/streaming-responses</a:t>
+            </a:r>
+          </a:p>
+          <a:p xmlns:a="http://schemas.openxmlformats.org/drawingml/2006/main">
+            <a:r>
+              <a:t>- https://docs.ollama.com/api</a:t>
+            </a:r>
+          </a:p>
+          <a:p xmlns:a="http://schemas.openxmlformats.org/drawingml/2006/main">
+            <a:r>
+              <a:t>[/Sources]</a:t>
             </a:r>
           </a:p>
         </p:txBody>
@@ -787,22 +823,7 @@
           <a:lstStyle xmlns:a="http://schemas.openxmlformats.org/drawingml/2006/main"/>
           <a:p xmlns:a="http://schemas.openxmlformats.org/drawingml/2006/main">
             <a:r>
-              <a:t>Timing: 2 minutes.</a:t>
-            </a:r>
-          </a:p>
-          <a:p xmlns:a="http://schemas.openxmlformats.org/drawingml/2006/main">
-            <a:r>
-              <a:t>These are paraphrased facts from the official filing, not model-generated estimates.</a:t>
-            </a:r>
-          </a:p>
-          <a:p xmlns:a="http://schemas.openxmlformats.org/drawingml/2006/main">
-            <a:r>
-              <a:t>Explain the fact identifiers. The notebook will require citations such as [F1].</a:t>
-            </a:r>
-          </a:p>
-          <a:p xmlns:a="http://schemas.openxmlformats.org/drawingml/2006/main">
-            <a:r>
-              <a:t>Ask what the card cannot establish: valuation, price target, future guidance or investment recommendation.</a:t>
+              <a:t>Let the technically successful call fail as analysis. Ask students to name the five missing contract elements before revealing them.</a:t>
             </a:r>
           </a:p>
           <a:p xmlns:a="http://schemas.openxmlformats.org/drawingml/2006/main">
@@ -817,7 +838,7 @@
           </a:p>
           <a:p xmlns:a="http://schemas.openxmlformats.org/drawingml/2006/main">
             <a:r>
-              <a:t>- https://www.sec.gov/Archives/edgar/data/1045810/000104581026000021/nvda-20260125.htm</a:t>
+              <a:t>- https://developers.openai.com/api/docs/guides/prompt-engineering</a:t>
             </a:r>
           </a:p>
           <a:p xmlns:a="http://schemas.openxmlformats.org/drawingml/2006/main">
@@ -892,17 +913,122 @@
           <a:lstStyle xmlns:a="http://schemas.openxmlformats.org/drawingml/2006/main"/>
           <a:p xmlns:a="http://schemas.openxmlformats.org/drawingml/2006/main">
             <a:r>
-              <a:t>Timing: 2 minutes including transition.</a:t>
-            </a:r>
-          </a:p>
-          <a:p xmlns:a="http://schemas.openxmlformats.org/drawingml/2006/main">
-            <a:r>
-              <a:t>Read the four observable checks, then move immediately into the notebook.</a:t>
-            </a:r>
-          </a:p>
-          <a:p xmlns:a="http://schemas.openxmlformats.org/drawingml/2006/main">
-            <a:r>
-              <a:t>Student target: complete both model calls, obtain 4/4, and record the provider comparison.</a:t>
+              <a:t>These values are paraphrased from NVIDIA's fiscal 2026 Form 10-K. The evidence supports reported observations, not valuation or a recommendation.</a:t>
+            </a:r>
+          </a:p>
+          <a:p xmlns:a="http://schemas.openxmlformats.org/drawingml/2006/main">
+            <a:r>
+              <a:t/>
+            </a:r>
+          </a:p>
+          <a:p xmlns:a="http://schemas.openxmlformats.org/drawingml/2006/main">
+            <a:r>
+              <a:t>[Sources]</a:t>
+            </a:r>
+          </a:p>
+          <a:p xmlns:a="http://schemas.openxmlformats.org/drawingml/2006/main">
+            <a:r>
+              <a:t>- https://www.sec.gov/Archives/edgar/data/1045810/000104581026000021/nvda-20260125.htm</a:t>
+            </a:r>
+          </a:p>
+          <a:p xmlns:a="http://schemas.openxmlformats.org/drawingml/2006/main">
+            <a:r>
+              <a:t>[/Sources]</a:t>
+            </a:r>
+          </a:p>
+        </p:txBody>
+      </p:sp>
+      <p:sp>
+        <p:nvSpPr>
+          <p:cNvPr id="4" name="Slide Number Placeholder 3"/>
+          <p:cNvSpPr>
+            <a:spLocks xmlns:a="http://schemas.openxmlformats.org/drawingml/2006/main" noGrp="1"/>
+          </p:cNvSpPr>
+          <p:nvPr>
+            <p:ph type="sldNum" idx="5"/>
+          </p:nvPr>
+        </p:nvSpPr>
+        <p:spPr/>
+        <p:txBody>
+          <a:bodyPr xmlns:a="http://schemas.openxmlformats.org/drawingml/2006/main"/>
+          <a:lstStyle xmlns:a="http://schemas.openxmlformats.org/drawingml/2006/main"/>
+          <a:p xmlns:a="http://schemas.openxmlformats.org/drawingml/2006/main"/>
+        </p:txBody>
+      </p:sp>
+    </p:spTree>
+  </p:cSld>
+  <p:clrMapOvr>
+    <a:masterClrMapping xmlns:a="http://schemas.openxmlformats.org/drawingml/2006/main"/>
+  </p:clrMapOvr>
+</p:notes>
+</file>
+
+<file path=ppt/notesSlides/notesSlide7.xml><?xml version="1.0" encoding="utf-8"?>
+<p:notes xmlns:p="http://schemas.openxmlformats.org/presentationml/2006/main">
+  <p:cSld>
+    <p:spTree>
+      <p:nvGrpSpPr>
+        <p:cNvPr id="1" name=""/>
+        <p:cNvGrpSpPr/>
+        <p:nvPr/>
+      </p:nvGrpSpPr>
+      <p:grpSpPr>
+        <a:xfrm xmlns:a="http://schemas.openxmlformats.org/drawingml/2006/main"/>
+      </p:grpSpPr>
+      <p:sp>
+        <p:nvSpPr>
+          <p:cNvPr id="2" name="Slide Image Placeholder 1"/>
+          <p:cNvSpPr>
+            <a:spLocks xmlns:a="http://schemas.openxmlformats.org/drawingml/2006/main" noGrp="1"/>
+          </p:cNvSpPr>
+          <p:nvPr>
+            <p:ph type="sldImg" idx="0"/>
+          </p:nvPr>
+        </p:nvSpPr>
+        <p:spPr/>
+      </p:sp>
+      <p:sp>
+        <p:nvSpPr>
+          <p:cNvPr id="3" name="Notes Placeholder 2"/>
+          <p:cNvSpPr>
+            <a:spLocks xmlns:a="http://schemas.openxmlformats.org/drawingml/2006/main" noGrp="1"/>
+          </p:cNvSpPr>
+          <p:nvPr>
+            <p:ph type="body" idx="1"/>
+          </p:nvPr>
+        </p:nvSpPr>
+        <p:spPr/>
+        <p:txBody>
+          <a:bodyPr xmlns:a="http://schemas.openxmlformats.org/drawingml/2006/main"/>
+          <a:lstStyle xmlns:a="http://schemas.openxmlformats.org/drawingml/2006/main"/>
+          <a:p xmlns:a="http://schemas.openxmlformats.org/drawingml/2006/main">
+            <a:r>
+              <a:t>Read the four transparent checks, then move into the notebook. The remaining course path adds structured outputs, context, RAG, evaluation, agents and MCP.</a:t>
+            </a:r>
+          </a:p>
+          <a:p xmlns:a="http://schemas.openxmlformats.org/drawingml/2006/main">
+            <a:r>
+              <a:t/>
+            </a:r>
+          </a:p>
+          <a:p xmlns:a="http://schemas.openxmlformats.org/drawingml/2006/main">
+            <a:r>
+              <a:t>[Sources]</a:t>
+            </a:r>
+          </a:p>
+          <a:p xmlns:a="http://schemas.openxmlformats.org/drawingml/2006/main">
+            <a:r>
+              <a:t>- https://developers.openai.com/api/docs/guides/prompt-engineering</a:t>
+            </a:r>
+          </a:p>
+          <a:p xmlns:a="http://schemas.openxmlformats.org/drawingml/2006/main">
+            <a:r>
+              <a:t>- https://www.sec.gov/Archives/edgar/data/1045810/000104581026000021/nvda-20260125.htm</a:t>
+            </a:r>
+          </a:p>
+          <a:p xmlns:a="http://schemas.openxmlformats.org/drawingml/2006/main">
+            <a:r>
+              <a:t>[/Sources]</a:t>
             </a:r>
           </a:p>
         </p:txBody>
@@ -970,7 +1096,7 @@
   </p:cSld>
   <p:clrMap bg1="lt1" tx1="dk1" bg2="lt2" tx2="dk2" accent1="accent1" accent2="accent2" accent3="accent3" accent4="accent4" accent5="accent5" accent6="accent6" hlink="hlink" folHlink="folHlink"/>
   <p:sldLayoutIdLst>
-    <p:sldLayoutId xmlns:r="http://schemas.openxmlformats.org/officeDocument/2006/relationships" id="2147483649" r:id="R8dceb5d839d94735"/>
+    <p:sldLayoutId xmlns:r="http://schemas.openxmlformats.org/officeDocument/2006/relationships" id="2147483649" r:id="R95270bb7b21a4532"/>
   </p:sldLayoutIdLst>
   <p:txStyles>
     <p:titleStyle>
@@ -1582,6 +1708,7 @@
           <a:lstStyle xmlns:a="http://schemas.openxmlformats.org/drawingml/2006/main"/>
           <a:p xmlns:a="http://schemas.openxmlformats.org/drawingml/2006/main">
             <a:pPr>
+              <a:buNone/>
               <a:defRPr sz="1500" b="1">
                 <a:solidFill>
                   <a:srgbClr val="1F40CB"/>
@@ -1638,6 +1765,7 @@
           <a:lstStyle xmlns:a="http://schemas.openxmlformats.org/drawingml/2006/main"/>
           <a:p xmlns:a="http://schemas.openxmlformats.org/drawingml/2006/main">
             <a:pPr>
+              <a:buNone/>
               <a:defRPr sz="4950" b="1">
                 <a:solidFill>
                   <a:srgbClr val="051C2A"/>
@@ -1694,6 +1822,7 @@
           <a:lstStyle xmlns:a="http://schemas.openxmlformats.org/drawingml/2006/main"/>
           <a:p xmlns:a="http://schemas.openxmlformats.org/drawingml/2006/main">
             <a:pPr>
+              <a:buNone/>
               <a:defRPr sz="2400">
                 <a:solidFill>
                   <a:srgbClr val="373738"/>
@@ -1750,6 +1879,7 @@
           <a:lstStyle xmlns:a="http://schemas.openxmlformats.org/drawingml/2006/main"/>
           <a:p xmlns:a="http://schemas.openxmlformats.org/drawingml/2006/main">
             <a:pPr>
+              <a:buNone/>
               <a:defRPr sz="1425" b="1">
                 <a:solidFill>
                   <a:srgbClr val="1F40CB"/>
@@ -1806,6 +1936,7 @@
           <a:lstStyle xmlns:a="http://schemas.openxmlformats.org/drawingml/2006/main"/>
           <a:p xmlns:a="http://schemas.openxmlformats.org/drawingml/2006/main">
             <a:pPr>
+              <a:buNone/>
               <a:defRPr sz="1800">
                 <a:solidFill>
                   <a:srgbClr val="051C2A"/>
@@ -1891,6 +2022,7 @@
           <a:lstStyle xmlns:a="http://schemas.openxmlformats.org/drawingml/2006/main"/>
           <a:p xmlns:a="http://schemas.openxmlformats.org/drawingml/2006/main">
             <a:pPr>
+              <a:buNone/>
               <a:defRPr sz="1350" b="1">
                 <a:solidFill>
                   <a:srgbClr val="1F40CB"/>
@@ -1947,6 +2079,7 @@
           <a:lstStyle xmlns:a="http://schemas.openxmlformats.org/drawingml/2006/main"/>
           <a:p xmlns:a="http://schemas.openxmlformats.org/drawingml/2006/main">
             <a:pPr>
+              <a:buNone/>
               <a:defRPr sz="3600" b="1">
                 <a:solidFill>
                   <a:srgbClr val="051C2A"/>
@@ -2003,6 +2136,7 @@
           <a:lstStyle xmlns:a="http://schemas.openxmlformats.org/drawingml/2006/main"/>
           <a:p xmlns:a="http://schemas.openxmlformats.org/drawingml/2006/main">
             <a:pPr>
+              <a:buNone/>
               <a:defRPr sz="1800" b="1">
                 <a:solidFill>
                   <a:srgbClr val="373738"/>
@@ -2059,6 +2193,7 @@
           <a:lstStyle xmlns:a="http://schemas.openxmlformats.org/drawingml/2006/main"/>
           <a:p xmlns:a="http://schemas.openxmlformats.org/drawingml/2006/main">
             <a:pPr>
+              <a:buNone/>
               <a:defRPr sz="1500">
                 <a:solidFill>
                   <a:srgbClr val="9E9FA2"/>
@@ -2115,6 +2250,7 @@
           <a:lstStyle xmlns:a="http://schemas.openxmlformats.org/drawingml/2006/main"/>
           <a:p xmlns:a="http://schemas.openxmlformats.org/drawingml/2006/main">
             <a:pPr algn="ctr">
+              <a:buNone/>
               <a:defRPr sz="3450" b="1">
                 <a:solidFill>
                   <a:srgbClr val="F07D00"/>
@@ -2206,6 +2342,7 @@
           <a:lstStyle xmlns:a="http://schemas.openxmlformats.org/drawingml/2006/main"/>
           <a:p xmlns:a="http://schemas.openxmlformats.org/drawingml/2006/main">
             <a:pPr algn="ctr">
+              <a:buNone/>
               <a:defRPr sz="1500" b="1">
                 <a:solidFill>
                   <a:srgbClr val="00A2EB"/>
@@ -2262,6 +2399,7 @@
           <a:lstStyle xmlns:a="http://schemas.openxmlformats.org/drawingml/2006/main"/>
           <a:p xmlns:a="http://schemas.openxmlformats.org/drawingml/2006/main">
             <a:pPr algn="ctr">
+              <a:buNone/>
               <a:defRPr sz="2250" b="1">
                 <a:solidFill>
                   <a:srgbClr val="FFFFFF"/>
@@ -2318,6 +2456,7 @@
           <a:lstStyle xmlns:a="http://schemas.openxmlformats.org/drawingml/2006/main"/>
           <a:p xmlns:a="http://schemas.openxmlformats.org/drawingml/2006/main">
             <a:pPr algn="ctr">
+              <a:buNone/>
               <a:defRPr sz="3450" b="1">
                 <a:solidFill>
                   <a:srgbClr val="F07D00"/>
@@ -2374,6 +2513,7 @@
           <a:lstStyle xmlns:a="http://schemas.openxmlformats.org/drawingml/2006/main"/>
           <a:p xmlns:a="http://schemas.openxmlformats.org/drawingml/2006/main">
             <a:pPr>
+              <a:buNone/>
               <a:defRPr sz="1650" b="1">
                 <a:solidFill>
                   <a:srgbClr val="00A2EB"/>
@@ -2430,6 +2570,7 @@
           <a:lstStyle xmlns:a="http://schemas.openxmlformats.org/drawingml/2006/main"/>
           <a:p xmlns:a="http://schemas.openxmlformats.org/drawingml/2006/main">
             <a:pPr>
+              <a:buNone/>
               <a:defRPr sz="1425">
                 <a:solidFill>
                   <a:srgbClr val="373738"/>
@@ -2519,6 +2660,7 @@
           <a:lstStyle xmlns:a="http://schemas.openxmlformats.org/drawingml/2006/main"/>
           <a:p xmlns:a="http://schemas.openxmlformats.org/drawingml/2006/main">
             <a:pPr>
+              <a:buNone/>
               <a:defRPr sz="1650" b="1">
                 <a:solidFill>
                   <a:srgbClr val="1F40CB"/>
@@ -2575,6 +2717,7 @@
           <a:lstStyle xmlns:a="http://schemas.openxmlformats.org/drawingml/2006/main"/>
           <a:p xmlns:a="http://schemas.openxmlformats.org/drawingml/2006/main">
             <a:pPr>
+              <a:buNone/>
               <a:defRPr sz="1425">
                 <a:solidFill>
                   <a:srgbClr val="373738"/>
@@ -2664,6 +2807,7 @@
           <a:lstStyle xmlns:a="http://schemas.openxmlformats.org/drawingml/2006/main"/>
           <a:p xmlns:a="http://schemas.openxmlformats.org/drawingml/2006/main">
             <a:pPr>
+              <a:buNone/>
               <a:defRPr sz="1350" b="1">
                 <a:solidFill>
                   <a:srgbClr val="1F40CB"/>
@@ -2720,6 +2864,7 @@
           <a:lstStyle xmlns:a="http://schemas.openxmlformats.org/drawingml/2006/main"/>
           <a:p xmlns:a="http://schemas.openxmlformats.org/drawingml/2006/main">
             <a:pPr>
+              <a:buNone/>
               <a:defRPr sz="2100" b="1">
                 <a:solidFill>
                   <a:srgbClr val="051C2A"/>
@@ -2738,7 +2883,7 @@
                 <a:ea typeface="Calibri"/>
                 <a:cs typeface="Calibri"/>
               </a:rPr>
-              <a:t>provider  ·  model  ·  response text  ·  latency</a:t>
+              <a:t>provider  ·  model  ·  response  ·  latency  ·  tokens</a:t>
             </a:r>
           </a:p>
         </p:txBody>
@@ -2776,6 +2921,7 @@
           <a:lstStyle xmlns:a="http://schemas.openxmlformats.org/drawingml/2006/main"/>
           <a:p xmlns:a="http://schemas.openxmlformats.org/drawingml/2006/main">
             <a:pPr>
+              <a:buNone/>
               <a:defRPr sz="1725">
                 <a:solidFill>
                   <a:srgbClr val="373738"/>
@@ -2898,6 +3044,7 @@
           <a:lstStyle xmlns:a="http://schemas.openxmlformats.org/drawingml/2006/main"/>
           <a:p xmlns:a="http://schemas.openxmlformats.org/drawingml/2006/main">
             <a:pPr>
+              <a:buNone/>
               <a:defRPr sz="1275">
                 <a:solidFill>
                   <a:srgbClr val="9E9FA2"/>
@@ -2954,6 +3101,7 @@
           <a:lstStyle xmlns:a="http://schemas.openxmlformats.org/drawingml/2006/main"/>
           <a:p xmlns:a="http://schemas.openxmlformats.org/drawingml/2006/main">
             <a:pPr algn="r">
+              <a:buNone/>
               <a:defRPr sz="1200" b="1">
                 <a:solidFill>
                   <a:srgbClr val="9E9FA2"/>
@@ -3010,6 +3158,7 @@
           <a:lstStyle xmlns:a="http://schemas.openxmlformats.org/drawingml/2006/main"/>
           <a:p xmlns:a="http://schemas.openxmlformats.org/drawingml/2006/main">
             <a:pPr algn="r">
+              <a:buNone/>
               <a:defRPr sz="1200" b="1">
                 <a:solidFill>
                   <a:srgbClr val="9E9FA2"/>
@@ -3095,6 +3244,7 @@
           <a:lstStyle xmlns:a="http://schemas.openxmlformats.org/drawingml/2006/main"/>
           <a:p xmlns:a="http://schemas.openxmlformats.org/drawingml/2006/main">
             <a:pPr>
+              <a:buNone/>
               <a:defRPr sz="1350" b="1">
                 <a:solidFill>
                   <a:srgbClr val="1F40CB"/>
@@ -3151,6 +3301,7 @@
           <a:lstStyle xmlns:a="http://schemas.openxmlformats.org/drawingml/2006/main"/>
           <a:p xmlns:a="http://schemas.openxmlformats.org/drawingml/2006/main">
             <a:pPr>
+              <a:buNone/>
               <a:defRPr sz="3600" b="1">
                 <a:solidFill>
                   <a:srgbClr val="051C2A"/>
@@ -3207,6 +3358,7 @@
           <a:lstStyle xmlns:a="http://schemas.openxmlformats.org/drawingml/2006/main"/>
           <a:p xmlns:a="http://schemas.openxmlformats.org/drawingml/2006/main">
             <a:pPr>
+              <a:buNone/>
               <a:defRPr sz="1575" b="1">
                 <a:solidFill>
                   <a:srgbClr val="1F40CB"/>
@@ -3263,6 +3415,7 @@
           <a:lstStyle xmlns:a="http://schemas.openxmlformats.org/drawingml/2006/main"/>
           <a:p xmlns:a="http://schemas.openxmlformats.org/drawingml/2006/main">
             <a:pPr>
+              <a:buNone/>
               <a:defRPr sz="2025" b="1">
                 <a:solidFill>
                   <a:srgbClr val="051C2A"/>
@@ -3352,6 +3505,7 @@
           <a:lstStyle xmlns:a="http://schemas.openxmlformats.org/drawingml/2006/main"/>
           <a:p xmlns:a="http://schemas.openxmlformats.org/drawingml/2006/main">
             <a:pPr>
+              <a:buNone/>
               <a:defRPr sz="1575" b="1">
                 <a:solidFill>
                   <a:srgbClr val="00A2EB"/>
@@ -3408,6 +3562,7 @@
           <a:lstStyle xmlns:a="http://schemas.openxmlformats.org/drawingml/2006/main"/>
           <a:p xmlns:a="http://schemas.openxmlformats.org/drawingml/2006/main">
             <a:pPr>
+              <a:buNone/>
               <a:defRPr sz="2025" b="1">
                 <a:solidFill>
                   <a:srgbClr val="051C2A"/>
@@ -3499,6 +3654,7 @@
           <a:lstStyle xmlns:a="http://schemas.openxmlformats.org/drawingml/2006/main"/>
           <a:p xmlns:a="http://schemas.openxmlformats.org/drawingml/2006/main">
             <a:pPr>
+              <a:buNone/>
               <a:defRPr sz="1800">
                 <a:solidFill>
                   <a:srgbClr val="FFFFFF"/>
@@ -3555,6 +3711,7 @@
           <a:lstStyle xmlns:a="http://schemas.openxmlformats.org/drawingml/2006/main"/>
           <a:p xmlns:a="http://schemas.openxmlformats.org/drawingml/2006/main">
             <a:pPr>
+              <a:buNone/>
               <a:defRPr sz="1800">
                 <a:solidFill>
                   <a:srgbClr val="00A2EB"/>
@@ -3611,6 +3768,7 @@
           <a:lstStyle xmlns:a="http://schemas.openxmlformats.org/drawingml/2006/main"/>
           <a:p xmlns:a="http://schemas.openxmlformats.org/drawingml/2006/main">
             <a:pPr>
+              <a:buNone/>
               <a:defRPr sz="1800">
                 <a:solidFill>
                   <a:srgbClr val="FFFFFF"/>
@@ -3667,6 +3825,7 @@
           <a:lstStyle xmlns:a="http://schemas.openxmlformats.org/drawingml/2006/main"/>
           <a:p xmlns:a="http://schemas.openxmlformats.org/drawingml/2006/main">
             <a:pPr>
+              <a:buNone/>
               <a:defRPr sz="1800">
                 <a:solidFill>
                   <a:srgbClr val="FFFFFF"/>
@@ -3723,6 +3882,7 @@
           <a:lstStyle xmlns:a="http://schemas.openxmlformats.org/drawingml/2006/main"/>
           <a:p xmlns:a="http://schemas.openxmlformats.org/drawingml/2006/main">
             <a:pPr>
+              <a:buNone/>
               <a:defRPr sz="1575">
                 <a:solidFill>
                   <a:srgbClr val="9E9FA2"/>
@@ -3845,6 +4005,7 @@
           <a:lstStyle xmlns:a="http://schemas.openxmlformats.org/drawingml/2006/main"/>
           <a:p xmlns:a="http://schemas.openxmlformats.org/drawingml/2006/main">
             <a:pPr>
+              <a:buNone/>
               <a:defRPr sz="1275">
                 <a:solidFill>
                   <a:srgbClr val="9E9FA2"/>
@@ -3901,6 +4062,7 @@
           <a:lstStyle xmlns:a="http://schemas.openxmlformats.org/drawingml/2006/main"/>
           <a:p xmlns:a="http://schemas.openxmlformats.org/drawingml/2006/main">
             <a:pPr algn="r">
+              <a:buNone/>
               <a:defRPr sz="1200" b="1">
                 <a:solidFill>
                   <a:srgbClr val="9E9FA2"/>
@@ -3957,6 +4119,7 @@
           <a:lstStyle xmlns:a="http://schemas.openxmlformats.org/drawingml/2006/main"/>
           <a:p xmlns:a="http://schemas.openxmlformats.org/drawingml/2006/main">
             <a:pPr algn="r">
+              <a:buNone/>
               <a:defRPr sz="1200" b="1">
                 <a:solidFill>
                   <a:srgbClr val="9E9FA2"/>
@@ -4011,10 +4174,10 @@
       </p:grpSpPr>
       <p:sp>
         <p:nvSpPr>
-          <p:cNvPr id="21" name="">
-            <a:extLst xmlns:a="http://schemas.openxmlformats.org/drawingml/2006/main">
-              <a:ext uri="{FF2B5EF4-FFF2-40B4-BE49-F238E27FC236}">
-                <a16:creationId xmlns:a16="http://schemas.microsoft.com/office/drawing/2014/main" id="{480BC54A-1309-460D-AD2B-0F18507EB1B8}"/>
+          <p:cNvPr id="24" name="">
+            <a:extLst xmlns:a="http://schemas.openxmlformats.org/drawingml/2006/main">
+              <a:ext uri="{FF2B5EF4-FFF2-40B4-BE49-F238E27FC236}">
+                <a16:creationId xmlns:a16="http://schemas.microsoft.com/office/drawing/2014/main" id="{5B3FE622-5DC1-48D4-9C03-4885EC6CCADB}"/>
               </a:ext>
             </a:extLst>
           </p:cNvPr>
@@ -4042,6 +4205,7 @@
           <a:lstStyle xmlns:a="http://schemas.openxmlformats.org/drawingml/2006/main"/>
           <a:p xmlns:a="http://schemas.openxmlformats.org/drawingml/2006/main">
             <a:pPr>
+              <a:buNone/>
               <a:defRPr sz="1350" b="1">
                 <a:solidFill>
                   <a:srgbClr val="1F40CB"/>
@@ -4060,7 +4224,7 @@
                 <a:ea typeface="Calibri"/>
                 <a:cs typeface="Calibri"/>
               </a:rPr>
-              <a:t>FAILURE LAB</a:t>
+              <a:t>MEASUREMENT</a:t>
             </a:r>
           </a:p>
         </p:txBody>
@@ -4070,7 +4234,7 @@
           <p:cNvPr id="2" name="">
             <a:extLst xmlns:a="http://schemas.openxmlformats.org/drawingml/2006/main">
               <a:ext uri="{FF2B5EF4-FFF2-40B4-BE49-F238E27FC236}">
-                <a16:creationId xmlns:a16="http://schemas.microsoft.com/office/drawing/2014/main" id="{592B95A1-7E53-412C-8974-DFB6A8DFF62E}"/>
+                <a16:creationId xmlns:a16="http://schemas.microsoft.com/office/drawing/2014/main" id="{BB324F57-6BCA-4E03-A88B-6655F725D897}"/>
               </a:ext>
             </a:extLst>
           </p:cNvPr>
@@ -4098,6 +4262,7 @@
           <a:lstStyle xmlns:a="http://schemas.openxmlformats.org/drawingml/2006/main"/>
           <a:p xmlns:a="http://schemas.openxmlformats.org/drawingml/2006/main">
             <a:pPr>
+              <a:buNone/>
               <a:defRPr sz="3600" b="1">
                 <a:solidFill>
                   <a:srgbClr val="051C2A"/>
@@ -4116,7 +4281,7 @@
                 <a:ea typeface="Calibri"/>
                 <a:cs typeface="Calibri"/>
               </a:rPr>
-              <a:t>A successful API call can still fail as analysis</a:t>
+              <a:t>Measure the run; stream the delivery</a:t>
             </a:r>
           </a:p>
         </p:txBody>
@@ -4126,19 +4291,133 @@
           <p:cNvPr id="3" name="">
             <a:extLst xmlns:a="http://schemas.openxmlformats.org/drawingml/2006/main">
               <a:ext uri="{FF2B5EF4-FFF2-40B4-BE49-F238E27FC236}">
-                <a16:creationId xmlns:a16="http://schemas.microsoft.com/office/drawing/2014/main" id="{8A1C2FBE-FCE9-4D4C-9DBD-D89790B01627}"/>
-              </a:ext>
-            </a:extLst>
-          </p:cNvPr>
-          <p:cNvSpPr>
-            <a:spLocks xmlns:a="http://schemas.openxmlformats.org/drawingml/2006/main" noGrp="1"/>
-          </p:cNvSpPr>
-          <p:nvPr/>
-        </p:nvSpPr>
-        <p:spPr>
-          <a:xfrm xmlns:a="http://schemas.openxmlformats.org/drawingml/2006/main">
-            <a:off x="1257300" y="2857500"/>
-            <a:ext cx="11811000" cy="685800"/>
+                <a16:creationId xmlns:a16="http://schemas.microsoft.com/office/drawing/2014/main" id="{4675077E-2BA2-4D49-9FA0-3C0BB445BE2C}"/>
+              </a:ext>
+            </a:extLst>
+          </p:cNvPr>
+          <p:cNvSpPr>
+            <a:spLocks xmlns:a="http://schemas.openxmlformats.org/drawingml/2006/main" noGrp="1"/>
+          </p:cNvSpPr>
+          <p:nvPr/>
+        </p:nvSpPr>
+        <p:spPr>
+          <a:xfrm xmlns:a="http://schemas.openxmlformats.org/drawingml/2006/main">
+            <a:off x="1066800" y="3162300"/>
+            <a:ext cx="2381250" cy="381000"/>
+          </a:xfrm>
+          <a:prstGeom xmlns:a="http://schemas.openxmlformats.org/drawingml/2006/main" prst="rect">
+            <a:avLst/>
+          </a:prstGeom>
+          <a:noFill xmlns:a="http://schemas.openxmlformats.org/drawingml/2006/main"/>
+          <a:ln xmlns:a="http://schemas.openxmlformats.org/drawingml/2006/main" w="0">
+            <a:noFill/>
+            <a:prstDash val="solid"/>
+          </a:ln>
+        </p:spPr>
+        <p:txBody>
+          <a:bodyPr xmlns:a="http://schemas.openxmlformats.org/drawingml/2006/main" lIns="0" tIns="0" rIns="0" bIns="0" anchor="t"/>
+          <a:lstStyle xmlns:a="http://schemas.openxmlformats.org/drawingml/2006/main"/>
+          <a:p xmlns:a="http://schemas.openxmlformats.org/drawingml/2006/main">
+            <a:pPr>
+              <a:buNone/>
+              <a:defRPr sz="1800" b="1">
+                <a:solidFill>
+                  <a:srgbClr val="373738"/>
+                </a:solidFill>
+                <a:latin typeface="Calibri"/>
+                <a:ea typeface="Calibri"/>
+                <a:cs typeface="Calibri"/>
+              </a:defRPr>
+            </a:pPr>
+            <a:r>
+              <a:rPr sz="1800" b="1">
+                <a:solidFill>
+                  <a:srgbClr val="373738"/>
+                </a:solidFill>
+                <a:latin typeface="Calibri"/>
+                <a:ea typeface="Calibri"/>
+                <a:cs typeface="Calibri"/>
+              </a:rPr>
+              <a:t>ModelRun</a:t>
+            </a:r>
+          </a:p>
+        </p:txBody>
+      </p:sp>
+      <p:sp>
+        <p:nvSpPr>
+          <p:cNvPr id="4" name="">
+            <a:extLst xmlns:a="http://schemas.openxmlformats.org/drawingml/2006/main">
+              <a:ext uri="{FF2B5EF4-FFF2-40B4-BE49-F238E27FC236}">
+                <a16:creationId xmlns:a16="http://schemas.microsoft.com/office/drawing/2014/main" id="{B09D7F4C-3745-47C4-B657-8DC95CD6DCD6}"/>
+              </a:ext>
+            </a:extLst>
+          </p:cNvPr>
+          <p:cNvSpPr>
+            <a:spLocks xmlns:a="http://schemas.openxmlformats.org/drawingml/2006/main" noGrp="1"/>
+          </p:cNvSpPr>
+          <p:nvPr/>
+        </p:nvSpPr>
+        <p:spPr>
+          <a:xfrm xmlns:a="http://schemas.openxmlformats.org/drawingml/2006/main">
+            <a:off x="1066800" y="3657600"/>
+            <a:ext cx="2667000" cy="323850"/>
+          </a:xfrm>
+          <a:prstGeom xmlns:a="http://schemas.openxmlformats.org/drawingml/2006/main" prst="rect">
+            <a:avLst/>
+          </a:prstGeom>
+          <a:noFill xmlns:a="http://schemas.openxmlformats.org/drawingml/2006/main"/>
+          <a:ln xmlns:a="http://schemas.openxmlformats.org/drawingml/2006/main" w="0">
+            <a:noFill/>
+            <a:prstDash val="solid"/>
+          </a:ln>
+        </p:spPr>
+        <p:txBody>
+          <a:bodyPr xmlns:a="http://schemas.openxmlformats.org/drawingml/2006/main" lIns="0" tIns="0" rIns="0" bIns="0" anchor="t"/>
+          <a:lstStyle xmlns:a="http://schemas.openxmlformats.org/drawingml/2006/main"/>
+          <a:p xmlns:a="http://schemas.openxmlformats.org/drawingml/2006/main">
+            <a:pPr>
+              <a:buNone/>
+              <a:defRPr sz="1500">
+                <a:solidFill>
+                  <a:srgbClr val="9E9FA2"/>
+                </a:solidFill>
+                <a:latin typeface="Calibri"/>
+                <a:ea typeface="Calibri"/>
+                <a:cs typeface="Calibri"/>
+              </a:defRPr>
+            </a:pPr>
+            <a:r>
+              <a:rPr sz="1500">
+                <a:solidFill>
+                  <a:srgbClr val="9E9FA2"/>
+                </a:solidFill>
+                <a:latin typeface="Calibri"/>
+                <a:ea typeface="Calibri"/>
+                <a:cs typeface="Calibri"/>
+              </a:rPr>
+              <a:t>provider · model · latency · tokens</a:t>
+            </a:r>
+          </a:p>
+        </p:txBody>
+      </p:sp>
+      <p:sp>
+        <p:nvSpPr>
+          <p:cNvPr id="5" name="">
+            <a:extLst xmlns:a="http://schemas.openxmlformats.org/drawingml/2006/main">
+              <a:ext uri="{FF2B5EF4-FFF2-40B4-BE49-F238E27FC236}">
+                <a16:creationId xmlns:a16="http://schemas.microsoft.com/office/drawing/2014/main" id="{76C84776-8416-45A0-AD08-92C3786E35A6}"/>
+              </a:ext>
+            </a:extLst>
+          </p:cNvPr>
+          <p:cNvSpPr>
+            <a:spLocks xmlns:a="http://schemas.openxmlformats.org/drawingml/2006/main" noGrp="1"/>
+          </p:cNvSpPr>
+          <p:nvPr/>
+        </p:nvSpPr>
+        <p:spPr>
+          <a:xfrm xmlns:a="http://schemas.openxmlformats.org/drawingml/2006/main">
+            <a:off x="3771900" y="3276600"/>
+            <a:ext cx="857250" cy="571500"/>
           </a:xfrm>
           <a:prstGeom xmlns:a="http://schemas.openxmlformats.org/drawingml/2006/main" prst="rect">
             <a:avLst/>
@@ -4154,7 +4433,8 @@
           <a:lstStyle xmlns:a="http://schemas.openxmlformats.org/drawingml/2006/main"/>
           <a:p xmlns:a="http://schemas.openxmlformats.org/drawingml/2006/main">
             <a:pPr algn="ctr">
-              <a:defRPr sz="2850" b="1">
+              <a:buNone/>
+              <a:defRPr sz="3450" b="1">
                 <a:solidFill>
                   <a:srgbClr val="F07D00"/>
                 </a:solidFill>
@@ -4164,7 +4444,7 @@
               </a:defRPr>
             </a:pPr>
             <a:r>
-              <a:rPr sz="2850" b="1">
+              <a:rPr sz="3450" b="1">
                 <a:solidFill>
                   <a:srgbClr val="F07D00"/>
                 </a:solidFill>
@@ -4172,29 +4452,349 @@
                 <a:ea typeface="Calibri"/>
                 <a:cs typeface="Calibri"/>
               </a:rPr>
-              <a:t>“What is happening with AI demand?”</a:t>
-            </a:r>
-          </a:p>
-        </p:txBody>
-      </p:sp>
-      <p:sp>
-        <p:nvSpPr>
-          <p:cNvPr id="4" name="">
-            <a:extLst xmlns:a="http://schemas.openxmlformats.org/drawingml/2006/main">
-              <a:ext uri="{FF2B5EF4-FFF2-40B4-BE49-F238E27FC236}">
-                <a16:creationId xmlns:a16="http://schemas.microsoft.com/office/drawing/2014/main" id="{C0F60789-BA8D-4377-A318-F3BEDA9C61FD}"/>
-              </a:ext>
-            </a:extLst>
-          </p:cNvPr>
-          <p:cNvSpPr>
-            <a:spLocks xmlns:a="http://schemas.openxmlformats.org/drawingml/2006/main" noGrp="1"/>
-          </p:cNvSpPr>
-          <p:nvPr/>
-        </p:nvSpPr>
-        <p:spPr>
-          <a:xfrm xmlns:a="http://schemas.openxmlformats.org/drawingml/2006/main">
-            <a:off x="2476500" y="3952875"/>
-            <a:ext cx="10287000" cy="19050"/>
+              <a:t>→</a:t>
+            </a:r>
+          </a:p>
+        </p:txBody>
+      </p:sp>
+      <p:sp>
+        <p:nvSpPr>
+          <p:cNvPr id="6" name="">
+            <a:extLst xmlns:a="http://schemas.openxmlformats.org/drawingml/2006/main">
+              <a:ext uri="{FF2B5EF4-FFF2-40B4-BE49-F238E27FC236}">
+                <a16:creationId xmlns:a16="http://schemas.microsoft.com/office/drawing/2014/main" id="{550B3F70-5AEC-4B8E-99F8-68D861B20C4A}"/>
+              </a:ext>
+            </a:extLst>
+          </p:cNvPr>
+          <p:cNvSpPr>
+            <a:spLocks xmlns:a="http://schemas.openxmlformats.org/drawingml/2006/main" noGrp="1"/>
+          </p:cNvSpPr>
+          <p:nvPr/>
+        </p:nvSpPr>
+        <p:spPr>
+          <a:xfrm xmlns:a="http://schemas.openxmlformats.org/drawingml/2006/main">
+            <a:off x="4762500" y="2762250"/>
+            <a:ext cx="3714750" cy="1809750"/>
+          </a:xfrm>
+          <a:prstGeom xmlns:a="http://schemas.openxmlformats.org/drawingml/2006/main" prst="roundRect">
+            <a:avLst>
+              <a:gd name="adj" fmla="val 4211"/>
+            </a:avLst>
+          </a:prstGeom>
+          <a:solidFill xmlns:a="http://schemas.openxmlformats.org/drawingml/2006/main">
+            <a:srgbClr val="051C2A"/>
+          </a:solidFill>
+          <a:ln xmlns:a="http://schemas.openxmlformats.org/drawingml/2006/main" w="9525">
+            <a:solidFill>
+              <a:srgbClr val="051C2A"/>
+            </a:solidFill>
+            <a:prstDash val="solid"/>
+          </a:ln>
+        </p:spPr>
+      </p:sp>
+      <p:sp>
+        <p:nvSpPr>
+          <p:cNvPr id="7" name="">
+            <a:extLst xmlns:a="http://schemas.openxmlformats.org/drawingml/2006/main">
+              <a:ext uri="{FF2B5EF4-FFF2-40B4-BE49-F238E27FC236}">
+                <a16:creationId xmlns:a16="http://schemas.microsoft.com/office/drawing/2014/main" id="{E301410E-C82D-40B9-919F-3188A39B8084}"/>
+              </a:ext>
+            </a:extLst>
+          </p:cNvPr>
+          <p:cNvSpPr>
+            <a:spLocks xmlns:a="http://schemas.openxmlformats.org/drawingml/2006/main" noGrp="1"/>
+          </p:cNvSpPr>
+          <p:nvPr/>
+        </p:nvSpPr>
+        <p:spPr>
+          <a:xfrm xmlns:a="http://schemas.openxmlformats.org/drawingml/2006/main">
+            <a:off x="5219700" y="3143250"/>
+            <a:ext cx="2800350" cy="361950"/>
+          </a:xfrm>
+          <a:prstGeom xmlns:a="http://schemas.openxmlformats.org/drawingml/2006/main" prst="rect">
+            <a:avLst/>
+          </a:prstGeom>
+          <a:noFill xmlns:a="http://schemas.openxmlformats.org/drawingml/2006/main"/>
+          <a:ln xmlns:a="http://schemas.openxmlformats.org/drawingml/2006/main" w="0">
+            <a:noFill/>
+            <a:prstDash val="solid"/>
+          </a:ln>
+        </p:spPr>
+        <p:txBody>
+          <a:bodyPr xmlns:a="http://schemas.openxmlformats.org/drawingml/2006/main" lIns="0" tIns="0" rIns="0" bIns="0" anchor="t"/>
+          <a:lstStyle xmlns:a="http://schemas.openxmlformats.org/drawingml/2006/main"/>
+          <a:p xmlns:a="http://schemas.openxmlformats.org/drawingml/2006/main">
+            <a:pPr algn="ctr">
+              <a:buNone/>
+              <a:defRPr sz="1500" b="1">
+                <a:solidFill>
+                  <a:srgbClr val="00A2EB"/>
+                </a:solidFill>
+                <a:latin typeface="Calibri"/>
+                <a:ea typeface="Calibri"/>
+                <a:cs typeface="Calibri"/>
+              </a:defRPr>
+            </a:pPr>
+            <a:r>
+              <a:rPr sz="1500" b="1">
+                <a:solidFill>
+                  <a:srgbClr val="00A2EB"/>
+                </a:solidFill>
+                <a:latin typeface="Calibri"/>
+                <a:ea typeface="Calibri"/>
+                <a:cs typeface="Calibri"/>
+              </a:rPr>
+              <a:t>GATEWAY RECORD</a:t>
+            </a:r>
+          </a:p>
+        </p:txBody>
+      </p:sp>
+      <p:sp>
+        <p:nvSpPr>
+          <p:cNvPr id="8" name="">
+            <a:extLst xmlns:a="http://schemas.openxmlformats.org/drawingml/2006/main">
+              <a:ext uri="{FF2B5EF4-FFF2-40B4-BE49-F238E27FC236}">
+                <a16:creationId xmlns:a16="http://schemas.microsoft.com/office/drawing/2014/main" id="{1F827B01-F8B1-43B2-A1DD-78B1B1E4A471}"/>
+              </a:ext>
+            </a:extLst>
+          </p:cNvPr>
+          <p:cNvSpPr>
+            <a:spLocks xmlns:a="http://schemas.openxmlformats.org/drawingml/2006/main" noGrp="1"/>
+          </p:cNvSpPr>
+          <p:nvPr/>
+        </p:nvSpPr>
+        <p:spPr>
+          <a:xfrm xmlns:a="http://schemas.openxmlformats.org/drawingml/2006/main">
+            <a:off x="5219700" y="3714750"/>
+            <a:ext cx="2800350" cy="438150"/>
+          </a:xfrm>
+          <a:prstGeom xmlns:a="http://schemas.openxmlformats.org/drawingml/2006/main" prst="rect">
+            <a:avLst/>
+          </a:prstGeom>
+          <a:noFill xmlns:a="http://schemas.openxmlformats.org/drawingml/2006/main"/>
+          <a:ln xmlns:a="http://schemas.openxmlformats.org/drawingml/2006/main" w="0">
+            <a:noFill/>
+            <a:prstDash val="solid"/>
+          </a:ln>
+        </p:spPr>
+        <p:txBody>
+          <a:bodyPr xmlns:a="http://schemas.openxmlformats.org/drawingml/2006/main" lIns="0" tIns="0" rIns="0" bIns="0" anchor="t"/>
+          <a:lstStyle xmlns:a="http://schemas.openxmlformats.org/drawingml/2006/main"/>
+          <a:p xmlns:a="http://schemas.openxmlformats.org/drawingml/2006/main">
+            <a:pPr algn="ctr">
+              <a:buNone/>
+              <a:defRPr sz="2250" b="1">
+                <a:solidFill>
+                  <a:srgbClr val="FFFFFF"/>
+                </a:solidFill>
+                <a:latin typeface="Consolas"/>
+                <a:ea typeface="Consolas"/>
+                <a:cs typeface="Consolas"/>
+              </a:defRPr>
+            </a:pPr>
+            <a:r>
+              <a:rPr sz="2250" b="1">
+                <a:solidFill>
+                  <a:srgbClr val="FFFFFF"/>
+                </a:solidFill>
+                <a:latin typeface="Consolas"/>
+                <a:ea typeface="Consolas"/>
+                <a:cs typeface="Consolas"/>
+              </a:rPr>
+              <a:t>typed measurement</a:t>
+            </a:r>
+          </a:p>
+        </p:txBody>
+      </p:sp>
+      <p:sp>
+        <p:nvSpPr>
+          <p:cNvPr id="9" name="">
+            <a:extLst xmlns:a="http://schemas.openxmlformats.org/drawingml/2006/main">
+              <a:ext uri="{FF2B5EF4-FFF2-40B4-BE49-F238E27FC236}">
+                <a16:creationId xmlns:a16="http://schemas.microsoft.com/office/drawing/2014/main" id="{CDF73C19-5622-4DF9-9D1C-FAD948BF7C92}"/>
+              </a:ext>
+            </a:extLst>
+          </p:cNvPr>
+          <p:cNvSpPr>
+            <a:spLocks xmlns:a="http://schemas.openxmlformats.org/drawingml/2006/main" noGrp="1"/>
+          </p:cNvSpPr>
+          <p:nvPr/>
+        </p:nvSpPr>
+        <p:spPr>
+          <a:xfrm xmlns:a="http://schemas.openxmlformats.org/drawingml/2006/main">
+            <a:off x="8686800" y="3276600"/>
+            <a:ext cx="857250" cy="571500"/>
+          </a:xfrm>
+          <a:prstGeom xmlns:a="http://schemas.openxmlformats.org/drawingml/2006/main" prst="rect">
+            <a:avLst/>
+          </a:prstGeom>
+          <a:noFill xmlns:a="http://schemas.openxmlformats.org/drawingml/2006/main"/>
+          <a:ln xmlns:a="http://schemas.openxmlformats.org/drawingml/2006/main" w="0">
+            <a:noFill/>
+            <a:prstDash val="solid"/>
+          </a:ln>
+        </p:spPr>
+        <p:txBody>
+          <a:bodyPr xmlns:a="http://schemas.openxmlformats.org/drawingml/2006/main" lIns="0" tIns="0" rIns="0" bIns="0" anchor="t"/>
+          <a:lstStyle xmlns:a="http://schemas.openxmlformats.org/drawingml/2006/main"/>
+          <a:p xmlns:a="http://schemas.openxmlformats.org/drawingml/2006/main">
+            <a:pPr algn="ctr">
+              <a:buNone/>
+              <a:defRPr sz="3450" b="1">
+                <a:solidFill>
+                  <a:srgbClr val="F07D00"/>
+                </a:solidFill>
+                <a:latin typeface="Calibri"/>
+                <a:ea typeface="Calibri"/>
+                <a:cs typeface="Calibri"/>
+              </a:defRPr>
+            </a:pPr>
+            <a:r>
+              <a:rPr sz="3450" b="1">
+                <a:solidFill>
+                  <a:srgbClr val="F07D00"/>
+                </a:solidFill>
+                <a:latin typeface="Calibri"/>
+                <a:ea typeface="Calibri"/>
+                <a:cs typeface="Calibri"/>
+              </a:rPr>
+              <a:t>→</a:t>
+            </a:r>
+          </a:p>
+        </p:txBody>
+      </p:sp>
+      <p:sp>
+        <p:nvSpPr>
+          <p:cNvPr id="10" name="">
+            <a:extLst xmlns:a="http://schemas.openxmlformats.org/drawingml/2006/main">
+              <a:ext uri="{FF2B5EF4-FFF2-40B4-BE49-F238E27FC236}">
+                <a16:creationId xmlns:a16="http://schemas.microsoft.com/office/drawing/2014/main" id="{66756397-FF53-42BA-8D93-F9D50CF6C26C}"/>
+              </a:ext>
+            </a:extLst>
+          </p:cNvPr>
+          <p:cNvSpPr>
+            <a:spLocks xmlns:a="http://schemas.openxmlformats.org/drawingml/2006/main" noGrp="1"/>
+          </p:cNvSpPr>
+          <p:nvPr/>
+        </p:nvSpPr>
+        <p:spPr>
+          <a:xfrm xmlns:a="http://schemas.openxmlformats.org/drawingml/2006/main">
+            <a:off x="9791700" y="2781300"/>
+            <a:ext cx="2095500" cy="342900"/>
+          </a:xfrm>
+          <a:prstGeom xmlns:a="http://schemas.openxmlformats.org/drawingml/2006/main" prst="rect">
+            <a:avLst/>
+          </a:prstGeom>
+          <a:noFill xmlns:a="http://schemas.openxmlformats.org/drawingml/2006/main"/>
+          <a:ln xmlns:a="http://schemas.openxmlformats.org/drawingml/2006/main" w="0">
+            <a:noFill/>
+            <a:prstDash val="solid"/>
+          </a:ln>
+        </p:spPr>
+        <p:txBody>
+          <a:bodyPr xmlns:a="http://schemas.openxmlformats.org/drawingml/2006/main" lIns="0" tIns="0" rIns="0" bIns="0" anchor="t"/>
+          <a:lstStyle xmlns:a="http://schemas.openxmlformats.org/drawingml/2006/main"/>
+          <a:p xmlns:a="http://schemas.openxmlformats.org/drawingml/2006/main">
+            <a:pPr>
+              <a:buNone/>
+              <a:defRPr sz="1650" b="1">
+                <a:solidFill>
+                  <a:srgbClr val="00A2EB"/>
+                </a:solidFill>
+                <a:latin typeface="Calibri"/>
+                <a:ea typeface="Calibri"/>
+                <a:cs typeface="Calibri"/>
+              </a:defRPr>
+            </a:pPr>
+            <a:r>
+              <a:rPr sz="1650" b="1">
+                <a:solidFill>
+                  <a:srgbClr val="00A2EB"/>
+                </a:solidFill>
+                <a:latin typeface="Calibri"/>
+                <a:ea typeface="Calibri"/>
+                <a:cs typeface="Calibri"/>
+              </a:rPr>
+              <a:t>TOKENS</a:t>
+            </a:r>
+          </a:p>
+        </p:txBody>
+      </p:sp>
+      <p:sp>
+        <p:nvSpPr>
+          <p:cNvPr id="11" name="">
+            <a:extLst xmlns:a="http://schemas.openxmlformats.org/drawingml/2006/main">
+              <a:ext uri="{FF2B5EF4-FFF2-40B4-BE49-F238E27FC236}">
+                <a16:creationId xmlns:a16="http://schemas.microsoft.com/office/drawing/2014/main" id="{5C5B0151-A132-4173-A1C4-8F9B569D7199}"/>
+              </a:ext>
+            </a:extLst>
+          </p:cNvPr>
+          <p:cNvSpPr>
+            <a:spLocks xmlns:a="http://schemas.openxmlformats.org/drawingml/2006/main" noGrp="1"/>
+          </p:cNvSpPr>
+          <p:nvPr/>
+        </p:nvSpPr>
+        <p:spPr>
+          <a:xfrm xmlns:a="http://schemas.openxmlformats.org/drawingml/2006/main">
+            <a:off x="9791700" y="3200400"/>
+            <a:ext cx="2095500" cy="285750"/>
+          </a:xfrm>
+          <a:prstGeom xmlns:a="http://schemas.openxmlformats.org/drawingml/2006/main" prst="rect">
+            <a:avLst/>
+          </a:prstGeom>
+          <a:noFill xmlns:a="http://schemas.openxmlformats.org/drawingml/2006/main"/>
+          <a:ln xmlns:a="http://schemas.openxmlformats.org/drawingml/2006/main" w="0">
+            <a:noFill/>
+            <a:prstDash val="solid"/>
+          </a:ln>
+        </p:spPr>
+        <p:txBody>
+          <a:bodyPr xmlns:a="http://schemas.openxmlformats.org/drawingml/2006/main" lIns="0" tIns="0" rIns="0" bIns="0" anchor="t"/>
+          <a:lstStyle xmlns:a="http://schemas.openxmlformats.org/drawingml/2006/main"/>
+          <a:p xmlns:a="http://schemas.openxmlformats.org/drawingml/2006/main">
+            <a:pPr>
+              <a:buNone/>
+              <a:defRPr sz="1425">
+                <a:solidFill>
+                  <a:srgbClr val="373738"/>
+                </a:solidFill>
+                <a:latin typeface="Calibri"/>
+                <a:ea typeface="Calibri"/>
+                <a:cs typeface="Calibri"/>
+              </a:defRPr>
+            </a:pPr>
+            <a:r>
+              <a:rPr sz="1425">
+                <a:solidFill>
+                  <a:srgbClr val="373738"/>
+                </a:solidFill>
+                <a:latin typeface="Calibri"/>
+                <a:ea typeface="Calibri"/>
+                <a:cs typeface="Calibri"/>
+              </a:rPr>
+              <a:t>available or None</a:t>
+            </a:r>
+          </a:p>
+        </p:txBody>
+      </p:sp>
+      <p:sp>
+        <p:nvSpPr>
+          <p:cNvPr id="12" name="">
+            <a:extLst xmlns:a="http://schemas.openxmlformats.org/drawingml/2006/main">
+              <a:ext uri="{FF2B5EF4-FFF2-40B4-BE49-F238E27FC236}">
+                <a16:creationId xmlns:a16="http://schemas.microsoft.com/office/drawing/2014/main" id="{2431D8AA-C5F7-45EA-8249-C0FE06295563}"/>
+              </a:ext>
+            </a:extLst>
+          </p:cNvPr>
+          <p:cNvSpPr>
+            <a:spLocks xmlns:a="http://schemas.openxmlformats.org/drawingml/2006/main" noGrp="1"/>
+          </p:cNvSpPr>
+          <p:nvPr/>
+        </p:nvSpPr>
+        <p:spPr>
+          <a:xfrm xmlns:a="http://schemas.openxmlformats.org/drawingml/2006/main">
+            <a:off x="9791700" y="3714750"/>
+            <a:ext cx="2381250" cy="19050"/>
           </a:xfrm>
           <a:prstGeom xmlns:a="http://schemas.openxmlformats.org/drawingml/2006/main" prst="rect">
             <a:avLst/>
@@ -4212,22 +4812,22 @@
       </p:sp>
       <p:sp>
         <p:nvSpPr>
-          <p:cNvPr id="5" name="">
-            <a:extLst xmlns:a="http://schemas.openxmlformats.org/drawingml/2006/main">
-              <a:ext uri="{FF2B5EF4-FFF2-40B4-BE49-F238E27FC236}">
-                <a16:creationId xmlns:a16="http://schemas.microsoft.com/office/drawing/2014/main" id="{F632BA03-1788-4BE1-A884-B111371C78E5}"/>
-              </a:ext>
-            </a:extLst>
-          </p:cNvPr>
-          <p:cNvSpPr>
-            <a:spLocks xmlns:a="http://schemas.openxmlformats.org/drawingml/2006/main" noGrp="1"/>
-          </p:cNvSpPr>
-          <p:nvPr/>
-        </p:nvSpPr>
-        <p:spPr>
-          <a:xfrm xmlns:a="http://schemas.openxmlformats.org/drawingml/2006/main">
-            <a:off x="1123950" y="4648200"/>
-            <a:ext cx="495300" cy="323850"/>
+          <p:cNvPr id="13" name="">
+            <a:extLst xmlns:a="http://schemas.openxmlformats.org/drawingml/2006/main">
+              <a:ext uri="{FF2B5EF4-FFF2-40B4-BE49-F238E27FC236}">
+                <a16:creationId xmlns:a16="http://schemas.microsoft.com/office/drawing/2014/main" id="{1C84D04A-595A-4A10-B69B-3FBF80F91D37}"/>
+              </a:ext>
+            </a:extLst>
+          </p:cNvPr>
+          <p:cNvSpPr>
+            <a:spLocks xmlns:a="http://schemas.openxmlformats.org/drawingml/2006/main" noGrp="1"/>
+          </p:cNvSpPr>
+          <p:nvPr/>
+        </p:nvSpPr>
+        <p:spPr>
+          <a:xfrm xmlns:a="http://schemas.openxmlformats.org/drawingml/2006/main">
+            <a:off x="9791700" y="4000500"/>
+            <a:ext cx="2095500" cy="342900"/>
           </a:xfrm>
           <a:prstGeom xmlns:a="http://schemas.openxmlformats.org/drawingml/2006/main" prst="rect">
             <a:avLst/>
@@ -4243,47 +4843,48 @@
           <a:lstStyle xmlns:a="http://schemas.openxmlformats.org/drawingml/2006/main"/>
           <a:p xmlns:a="http://schemas.openxmlformats.org/drawingml/2006/main">
             <a:pPr>
-              <a:defRPr sz="1350" b="1">
-                <a:solidFill>
-                  <a:srgbClr val="F07D00"/>
-                </a:solidFill>
-                <a:latin typeface="Calibri"/>
-                <a:ea typeface="Calibri"/>
-                <a:cs typeface="Calibri"/>
-              </a:defRPr>
-            </a:pPr>
-            <a:r>
-              <a:rPr sz="1350" b="1">
-                <a:solidFill>
-                  <a:srgbClr val="F07D00"/>
-                </a:solidFill>
-                <a:latin typeface="Calibri"/>
-                <a:ea typeface="Calibri"/>
-                <a:cs typeface="Calibri"/>
-              </a:rPr>
-              <a:t>01</a:t>
-            </a:r>
-          </a:p>
-        </p:txBody>
-      </p:sp>
-      <p:sp>
-        <p:nvSpPr>
-          <p:cNvPr id="6" name="">
-            <a:extLst xmlns:a="http://schemas.openxmlformats.org/drawingml/2006/main">
-              <a:ext uri="{FF2B5EF4-FFF2-40B4-BE49-F238E27FC236}">
-                <a16:creationId xmlns:a16="http://schemas.microsoft.com/office/drawing/2014/main" id="{21D92F82-4B68-493F-A374-EE0CF32C7343}"/>
-              </a:ext>
-            </a:extLst>
-          </p:cNvPr>
-          <p:cNvSpPr>
-            <a:spLocks xmlns:a="http://schemas.openxmlformats.org/drawingml/2006/main" noGrp="1"/>
-          </p:cNvSpPr>
-          <p:nvPr/>
-        </p:nvSpPr>
-        <p:spPr>
-          <a:xfrm xmlns:a="http://schemas.openxmlformats.org/drawingml/2006/main">
-            <a:off x="1123950" y="5143500"/>
-            <a:ext cx="2266950" cy="438150"/>
+              <a:buNone/>
+              <a:defRPr sz="1650" b="1">
+                <a:solidFill>
+                  <a:srgbClr val="1F40CB"/>
+                </a:solidFill>
+                <a:latin typeface="Calibri"/>
+                <a:ea typeface="Calibri"/>
+                <a:cs typeface="Calibri"/>
+              </a:defRPr>
+            </a:pPr>
+            <a:r>
+              <a:rPr sz="1650" b="1">
+                <a:solidFill>
+                  <a:srgbClr val="1F40CB"/>
+                </a:solidFill>
+                <a:latin typeface="Calibri"/>
+                <a:ea typeface="Calibri"/>
+                <a:cs typeface="Calibri"/>
+              </a:rPr>
+              <a:t>STREAMING</a:t>
+            </a:r>
+          </a:p>
+        </p:txBody>
+      </p:sp>
+      <p:sp>
+        <p:nvSpPr>
+          <p:cNvPr id="14" name="">
+            <a:extLst xmlns:a="http://schemas.openxmlformats.org/drawingml/2006/main">
+              <a:ext uri="{FF2B5EF4-FFF2-40B4-BE49-F238E27FC236}">
+                <a16:creationId xmlns:a16="http://schemas.microsoft.com/office/drawing/2014/main" id="{3710D8BC-6C55-4CC4-9710-E682C884936C}"/>
+              </a:ext>
+            </a:extLst>
+          </p:cNvPr>
+          <p:cNvSpPr>
+            <a:spLocks xmlns:a="http://schemas.openxmlformats.org/drawingml/2006/main" noGrp="1"/>
+          </p:cNvSpPr>
+          <p:nvPr/>
+        </p:nvSpPr>
+        <p:spPr>
+          <a:xfrm xmlns:a="http://schemas.openxmlformats.org/drawingml/2006/main">
+            <a:off x="9791700" y="4419600"/>
+            <a:ext cx="2286000" cy="285750"/>
           </a:xfrm>
           <a:prstGeom xmlns:a="http://schemas.openxmlformats.org/drawingml/2006/main" prst="rect">
             <a:avLst/>
@@ -4299,473 +4900,26 @@
           <a:lstStyle xmlns:a="http://schemas.openxmlformats.org/drawingml/2006/main"/>
           <a:p xmlns:a="http://schemas.openxmlformats.org/drawingml/2006/main">
             <a:pPr>
-              <a:defRPr sz="1875" b="1">
-                <a:solidFill>
-                  <a:srgbClr val="051C2A"/>
-                </a:solidFill>
-                <a:latin typeface="Calibri"/>
-                <a:ea typeface="Calibri"/>
-                <a:cs typeface="Calibri"/>
-              </a:defRPr>
-            </a:pPr>
-            <a:r>
-              <a:rPr sz="1875" b="1">
-                <a:solidFill>
-                  <a:srgbClr val="051C2A"/>
-                </a:solidFill>
-                <a:latin typeface="Calibri"/>
-                <a:ea typeface="Calibri"/>
-                <a:cs typeface="Calibri"/>
-              </a:rPr>
-              <a:t>Company</a:t>
-            </a:r>
-          </a:p>
-        </p:txBody>
-      </p:sp>
-      <p:sp>
-        <p:nvSpPr>
-          <p:cNvPr id="7" name="">
-            <a:extLst xmlns:a="http://schemas.openxmlformats.org/drawingml/2006/main">
-              <a:ext uri="{FF2B5EF4-FFF2-40B4-BE49-F238E27FC236}">
-                <a16:creationId xmlns:a16="http://schemas.microsoft.com/office/drawing/2014/main" id="{0C641AFC-2FEB-434F-ADB4-9127D7801978}"/>
-              </a:ext>
-            </a:extLst>
-          </p:cNvPr>
-          <p:cNvSpPr>
-            <a:spLocks xmlns:a="http://schemas.openxmlformats.org/drawingml/2006/main" noGrp="1"/>
-          </p:cNvSpPr>
-          <p:nvPr/>
-        </p:nvSpPr>
-        <p:spPr>
-          <a:xfrm xmlns:a="http://schemas.openxmlformats.org/drawingml/2006/main">
-            <a:off x="3867150" y="4648200"/>
-            <a:ext cx="495300" cy="323850"/>
-          </a:xfrm>
-          <a:prstGeom xmlns:a="http://schemas.openxmlformats.org/drawingml/2006/main" prst="rect">
-            <a:avLst/>
-          </a:prstGeom>
-          <a:noFill xmlns:a="http://schemas.openxmlformats.org/drawingml/2006/main"/>
-          <a:ln xmlns:a="http://schemas.openxmlformats.org/drawingml/2006/main" w="0">
-            <a:noFill/>
-            <a:prstDash val="solid"/>
-          </a:ln>
-        </p:spPr>
-        <p:txBody>
-          <a:bodyPr xmlns:a="http://schemas.openxmlformats.org/drawingml/2006/main" lIns="0" tIns="0" rIns="0" bIns="0" anchor="t"/>
-          <a:lstStyle xmlns:a="http://schemas.openxmlformats.org/drawingml/2006/main"/>
-          <a:p xmlns:a="http://schemas.openxmlformats.org/drawingml/2006/main">
-            <a:pPr>
-              <a:defRPr sz="1350" b="1">
-                <a:solidFill>
-                  <a:srgbClr val="F07D00"/>
-                </a:solidFill>
-                <a:latin typeface="Calibri"/>
-                <a:ea typeface="Calibri"/>
-                <a:cs typeface="Calibri"/>
-              </a:defRPr>
-            </a:pPr>
-            <a:r>
-              <a:rPr sz="1350" b="1">
-                <a:solidFill>
-                  <a:srgbClr val="F07D00"/>
-                </a:solidFill>
-                <a:latin typeface="Calibri"/>
-                <a:ea typeface="Calibri"/>
-                <a:cs typeface="Calibri"/>
-              </a:rPr>
-              <a:t>02</a:t>
-            </a:r>
-          </a:p>
-        </p:txBody>
-      </p:sp>
-      <p:sp>
-        <p:nvSpPr>
-          <p:cNvPr id="8" name="">
-            <a:extLst xmlns:a="http://schemas.openxmlformats.org/drawingml/2006/main">
-              <a:ext uri="{FF2B5EF4-FFF2-40B4-BE49-F238E27FC236}">
-                <a16:creationId xmlns:a16="http://schemas.microsoft.com/office/drawing/2014/main" id="{5F0EEE86-8AD2-4FC0-A0CA-3F39924551D1}"/>
-              </a:ext>
-            </a:extLst>
-          </p:cNvPr>
-          <p:cNvSpPr>
-            <a:spLocks xmlns:a="http://schemas.openxmlformats.org/drawingml/2006/main" noGrp="1"/>
-          </p:cNvSpPr>
-          <p:nvPr/>
-        </p:nvSpPr>
-        <p:spPr>
-          <a:xfrm xmlns:a="http://schemas.openxmlformats.org/drawingml/2006/main">
-            <a:off x="3867150" y="5143500"/>
-            <a:ext cx="2266950" cy="438150"/>
-          </a:xfrm>
-          <a:prstGeom xmlns:a="http://schemas.openxmlformats.org/drawingml/2006/main" prst="rect">
-            <a:avLst/>
-          </a:prstGeom>
-          <a:noFill xmlns:a="http://schemas.openxmlformats.org/drawingml/2006/main"/>
-          <a:ln xmlns:a="http://schemas.openxmlformats.org/drawingml/2006/main" w="0">
-            <a:noFill/>
-            <a:prstDash val="solid"/>
-          </a:ln>
-        </p:spPr>
-        <p:txBody>
-          <a:bodyPr xmlns:a="http://schemas.openxmlformats.org/drawingml/2006/main" lIns="0" tIns="0" rIns="0" bIns="0" anchor="t"/>
-          <a:lstStyle xmlns:a="http://schemas.openxmlformats.org/drawingml/2006/main"/>
-          <a:p xmlns:a="http://schemas.openxmlformats.org/drawingml/2006/main">
-            <a:pPr>
-              <a:defRPr sz="1875" b="1">
-                <a:solidFill>
-                  <a:srgbClr val="051C2A"/>
-                </a:solidFill>
-                <a:latin typeface="Calibri"/>
-                <a:ea typeface="Calibri"/>
-                <a:cs typeface="Calibri"/>
-              </a:defRPr>
-            </a:pPr>
-            <a:r>
-              <a:rPr sz="1875" b="1">
-                <a:solidFill>
-                  <a:srgbClr val="051C2A"/>
-                </a:solidFill>
-                <a:latin typeface="Calibri"/>
-                <a:ea typeface="Calibri"/>
-                <a:cs typeface="Calibri"/>
-              </a:rPr>
-              <a:t>Period</a:t>
-            </a:r>
-          </a:p>
-        </p:txBody>
-      </p:sp>
-      <p:sp>
-        <p:nvSpPr>
-          <p:cNvPr id="9" name="">
-            <a:extLst xmlns:a="http://schemas.openxmlformats.org/drawingml/2006/main">
-              <a:ext uri="{FF2B5EF4-FFF2-40B4-BE49-F238E27FC236}">
-                <a16:creationId xmlns:a16="http://schemas.microsoft.com/office/drawing/2014/main" id="{42A9F77B-9D95-469A-B256-2B019874F5B4}"/>
-              </a:ext>
-            </a:extLst>
-          </p:cNvPr>
-          <p:cNvSpPr>
-            <a:spLocks xmlns:a="http://schemas.openxmlformats.org/drawingml/2006/main" noGrp="1"/>
-          </p:cNvSpPr>
-          <p:nvPr/>
-        </p:nvSpPr>
-        <p:spPr>
-          <a:xfrm xmlns:a="http://schemas.openxmlformats.org/drawingml/2006/main">
-            <a:off x="6610350" y="4648200"/>
-            <a:ext cx="495300" cy="323850"/>
-          </a:xfrm>
-          <a:prstGeom xmlns:a="http://schemas.openxmlformats.org/drawingml/2006/main" prst="rect">
-            <a:avLst/>
-          </a:prstGeom>
-          <a:noFill xmlns:a="http://schemas.openxmlformats.org/drawingml/2006/main"/>
-          <a:ln xmlns:a="http://schemas.openxmlformats.org/drawingml/2006/main" w="0">
-            <a:noFill/>
-            <a:prstDash val="solid"/>
-          </a:ln>
-        </p:spPr>
-        <p:txBody>
-          <a:bodyPr xmlns:a="http://schemas.openxmlformats.org/drawingml/2006/main" lIns="0" tIns="0" rIns="0" bIns="0" anchor="t"/>
-          <a:lstStyle xmlns:a="http://schemas.openxmlformats.org/drawingml/2006/main"/>
-          <a:p xmlns:a="http://schemas.openxmlformats.org/drawingml/2006/main">
-            <a:pPr>
-              <a:defRPr sz="1350" b="1">
-                <a:solidFill>
-                  <a:srgbClr val="F07D00"/>
-                </a:solidFill>
-                <a:latin typeface="Calibri"/>
-                <a:ea typeface="Calibri"/>
-                <a:cs typeface="Calibri"/>
-              </a:defRPr>
-            </a:pPr>
-            <a:r>
-              <a:rPr sz="1350" b="1">
-                <a:solidFill>
-                  <a:srgbClr val="F07D00"/>
-                </a:solidFill>
-                <a:latin typeface="Calibri"/>
-                <a:ea typeface="Calibri"/>
-                <a:cs typeface="Calibri"/>
-              </a:rPr>
-              <a:t>03</a:t>
-            </a:r>
-          </a:p>
-        </p:txBody>
-      </p:sp>
-      <p:sp>
-        <p:nvSpPr>
-          <p:cNvPr id="10" name="">
-            <a:extLst xmlns:a="http://schemas.openxmlformats.org/drawingml/2006/main">
-              <a:ext uri="{FF2B5EF4-FFF2-40B4-BE49-F238E27FC236}">
-                <a16:creationId xmlns:a16="http://schemas.microsoft.com/office/drawing/2014/main" id="{6920B1BF-7CCF-4161-9AFF-CC9F8DCA91B3}"/>
-              </a:ext>
-            </a:extLst>
-          </p:cNvPr>
-          <p:cNvSpPr>
-            <a:spLocks xmlns:a="http://schemas.openxmlformats.org/drawingml/2006/main" noGrp="1"/>
-          </p:cNvSpPr>
-          <p:nvPr/>
-        </p:nvSpPr>
-        <p:spPr>
-          <a:xfrm xmlns:a="http://schemas.openxmlformats.org/drawingml/2006/main">
-            <a:off x="6610350" y="5143500"/>
-            <a:ext cx="2266950" cy="438150"/>
-          </a:xfrm>
-          <a:prstGeom xmlns:a="http://schemas.openxmlformats.org/drawingml/2006/main" prst="rect">
-            <a:avLst/>
-          </a:prstGeom>
-          <a:noFill xmlns:a="http://schemas.openxmlformats.org/drawingml/2006/main"/>
-          <a:ln xmlns:a="http://schemas.openxmlformats.org/drawingml/2006/main" w="0">
-            <a:noFill/>
-            <a:prstDash val="solid"/>
-          </a:ln>
-        </p:spPr>
-        <p:txBody>
-          <a:bodyPr xmlns:a="http://schemas.openxmlformats.org/drawingml/2006/main" lIns="0" tIns="0" rIns="0" bIns="0" anchor="t"/>
-          <a:lstStyle xmlns:a="http://schemas.openxmlformats.org/drawingml/2006/main"/>
-          <a:p xmlns:a="http://schemas.openxmlformats.org/drawingml/2006/main">
-            <a:pPr>
-              <a:defRPr sz="1875" b="1">
-                <a:solidFill>
-                  <a:srgbClr val="051C2A"/>
-                </a:solidFill>
-                <a:latin typeface="Calibri"/>
-                <a:ea typeface="Calibri"/>
-                <a:cs typeface="Calibri"/>
-              </a:defRPr>
-            </a:pPr>
-            <a:r>
-              <a:rPr sz="1875" b="1">
-                <a:solidFill>
-                  <a:srgbClr val="051C2A"/>
-                </a:solidFill>
-                <a:latin typeface="Calibri"/>
-                <a:ea typeface="Calibri"/>
-                <a:cs typeface="Calibri"/>
-              </a:rPr>
-              <a:t>Source</a:t>
-            </a:r>
-          </a:p>
-        </p:txBody>
-      </p:sp>
-      <p:sp>
-        <p:nvSpPr>
-          <p:cNvPr id="11" name="">
-            <a:extLst xmlns:a="http://schemas.openxmlformats.org/drawingml/2006/main">
-              <a:ext uri="{FF2B5EF4-FFF2-40B4-BE49-F238E27FC236}">
-                <a16:creationId xmlns:a16="http://schemas.microsoft.com/office/drawing/2014/main" id="{8E8CF07A-926D-46C1-84B0-CB0E949F4B99}"/>
-              </a:ext>
-            </a:extLst>
-          </p:cNvPr>
-          <p:cNvSpPr>
-            <a:spLocks xmlns:a="http://schemas.openxmlformats.org/drawingml/2006/main" noGrp="1"/>
-          </p:cNvSpPr>
-          <p:nvPr/>
-        </p:nvSpPr>
-        <p:spPr>
-          <a:xfrm xmlns:a="http://schemas.openxmlformats.org/drawingml/2006/main">
-            <a:off x="9353550" y="4648200"/>
-            <a:ext cx="495300" cy="323850"/>
-          </a:xfrm>
-          <a:prstGeom xmlns:a="http://schemas.openxmlformats.org/drawingml/2006/main" prst="rect">
-            <a:avLst/>
-          </a:prstGeom>
-          <a:noFill xmlns:a="http://schemas.openxmlformats.org/drawingml/2006/main"/>
-          <a:ln xmlns:a="http://schemas.openxmlformats.org/drawingml/2006/main" w="0">
-            <a:noFill/>
-            <a:prstDash val="solid"/>
-          </a:ln>
-        </p:spPr>
-        <p:txBody>
-          <a:bodyPr xmlns:a="http://schemas.openxmlformats.org/drawingml/2006/main" lIns="0" tIns="0" rIns="0" bIns="0" anchor="t"/>
-          <a:lstStyle xmlns:a="http://schemas.openxmlformats.org/drawingml/2006/main"/>
-          <a:p xmlns:a="http://schemas.openxmlformats.org/drawingml/2006/main">
-            <a:pPr>
-              <a:defRPr sz="1350" b="1">
-                <a:solidFill>
-                  <a:srgbClr val="F07D00"/>
-                </a:solidFill>
-                <a:latin typeface="Calibri"/>
-                <a:ea typeface="Calibri"/>
-                <a:cs typeface="Calibri"/>
-              </a:defRPr>
-            </a:pPr>
-            <a:r>
-              <a:rPr sz="1350" b="1">
-                <a:solidFill>
-                  <a:srgbClr val="F07D00"/>
-                </a:solidFill>
-                <a:latin typeface="Calibri"/>
-                <a:ea typeface="Calibri"/>
-                <a:cs typeface="Calibri"/>
-              </a:rPr>
-              <a:t>04</a:t>
-            </a:r>
-          </a:p>
-        </p:txBody>
-      </p:sp>
-      <p:sp>
-        <p:nvSpPr>
-          <p:cNvPr id="12" name="">
-            <a:extLst xmlns:a="http://schemas.openxmlformats.org/drawingml/2006/main">
-              <a:ext uri="{FF2B5EF4-FFF2-40B4-BE49-F238E27FC236}">
-                <a16:creationId xmlns:a16="http://schemas.microsoft.com/office/drawing/2014/main" id="{6D8E6400-99FC-4D00-A8CB-D89D7FA7E963}"/>
-              </a:ext>
-            </a:extLst>
-          </p:cNvPr>
-          <p:cNvSpPr>
-            <a:spLocks xmlns:a="http://schemas.openxmlformats.org/drawingml/2006/main" noGrp="1"/>
-          </p:cNvSpPr>
-          <p:nvPr/>
-        </p:nvSpPr>
-        <p:spPr>
-          <a:xfrm xmlns:a="http://schemas.openxmlformats.org/drawingml/2006/main">
-            <a:off x="9353550" y="5143500"/>
-            <a:ext cx="2266950" cy="438150"/>
-          </a:xfrm>
-          <a:prstGeom xmlns:a="http://schemas.openxmlformats.org/drawingml/2006/main" prst="rect">
-            <a:avLst/>
-          </a:prstGeom>
-          <a:noFill xmlns:a="http://schemas.openxmlformats.org/drawingml/2006/main"/>
-          <a:ln xmlns:a="http://schemas.openxmlformats.org/drawingml/2006/main" w="0">
-            <a:noFill/>
-            <a:prstDash val="solid"/>
-          </a:ln>
-        </p:spPr>
-        <p:txBody>
-          <a:bodyPr xmlns:a="http://schemas.openxmlformats.org/drawingml/2006/main" lIns="0" tIns="0" rIns="0" bIns="0" anchor="t"/>
-          <a:lstStyle xmlns:a="http://schemas.openxmlformats.org/drawingml/2006/main"/>
-          <a:p xmlns:a="http://schemas.openxmlformats.org/drawingml/2006/main">
-            <a:pPr>
-              <a:defRPr sz="1875" b="1">
-                <a:solidFill>
-                  <a:srgbClr val="051C2A"/>
-                </a:solidFill>
-                <a:latin typeface="Calibri"/>
-                <a:ea typeface="Calibri"/>
-                <a:cs typeface="Calibri"/>
-              </a:defRPr>
-            </a:pPr>
-            <a:r>
-              <a:rPr sz="1875" b="1">
-                <a:solidFill>
-                  <a:srgbClr val="051C2A"/>
-                </a:solidFill>
-                <a:latin typeface="Calibri"/>
-                <a:ea typeface="Calibri"/>
-                <a:cs typeface="Calibri"/>
-              </a:rPr>
-              <a:t>Evidence rule</a:t>
-            </a:r>
-          </a:p>
-        </p:txBody>
-      </p:sp>
-      <p:sp>
-        <p:nvSpPr>
-          <p:cNvPr id="13" name="">
-            <a:extLst xmlns:a="http://schemas.openxmlformats.org/drawingml/2006/main">
-              <a:ext uri="{FF2B5EF4-FFF2-40B4-BE49-F238E27FC236}">
-                <a16:creationId xmlns:a16="http://schemas.microsoft.com/office/drawing/2014/main" id="{BB04CD7E-4803-4104-8338-9D962B7E6766}"/>
-              </a:ext>
-            </a:extLst>
-          </p:cNvPr>
-          <p:cNvSpPr>
-            <a:spLocks xmlns:a="http://schemas.openxmlformats.org/drawingml/2006/main" noGrp="1"/>
-          </p:cNvSpPr>
-          <p:nvPr/>
-        </p:nvSpPr>
-        <p:spPr>
-          <a:xfrm xmlns:a="http://schemas.openxmlformats.org/drawingml/2006/main">
-            <a:off x="12096750" y="4648200"/>
-            <a:ext cx="495300" cy="323850"/>
-          </a:xfrm>
-          <a:prstGeom xmlns:a="http://schemas.openxmlformats.org/drawingml/2006/main" prst="rect">
-            <a:avLst/>
-          </a:prstGeom>
-          <a:noFill xmlns:a="http://schemas.openxmlformats.org/drawingml/2006/main"/>
-          <a:ln xmlns:a="http://schemas.openxmlformats.org/drawingml/2006/main" w="0">
-            <a:noFill/>
-            <a:prstDash val="solid"/>
-          </a:ln>
-        </p:spPr>
-        <p:txBody>
-          <a:bodyPr xmlns:a="http://schemas.openxmlformats.org/drawingml/2006/main" lIns="0" tIns="0" rIns="0" bIns="0" anchor="t"/>
-          <a:lstStyle xmlns:a="http://schemas.openxmlformats.org/drawingml/2006/main"/>
-          <a:p xmlns:a="http://schemas.openxmlformats.org/drawingml/2006/main">
-            <a:pPr>
-              <a:defRPr sz="1350" b="1">
-                <a:solidFill>
-                  <a:srgbClr val="F07D00"/>
-                </a:solidFill>
-                <a:latin typeface="Calibri"/>
-                <a:ea typeface="Calibri"/>
-                <a:cs typeface="Calibri"/>
-              </a:defRPr>
-            </a:pPr>
-            <a:r>
-              <a:rPr sz="1350" b="1">
-                <a:solidFill>
-                  <a:srgbClr val="F07D00"/>
-                </a:solidFill>
-                <a:latin typeface="Calibri"/>
-                <a:ea typeface="Calibri"/>
-                <a:cs typeface="Calibri"/>
-              </a:rPr>
-              <a:t>05</a:t>
-            </a:r>
-          </a:p>
-        </p:txBody>
-      </p:sp>
-      <p:sp>
-        <p:nvSpPr>
-          <p:cNvPr id="14" name="">
-            <a:extLst xmlns:a="http://schemas.openxmlformats.org/drawingml/2006/main">
-              <a:ext uri="{FF2B5EF4-FFF2-40B4-BE49-F238E27FC236}">
-                <a16:creationId xmlns:a16="http://schemas.microsoft.com/office/drawing/2014/main" id="{65270AE8-D659-434A-B5EA-AB73577F8DC8}"/>
-              </a:ext>
-            </a:extLst>
-          </p:cNvPr>
-          <p:cNvSpPr>
-            <a:spLocks xmlns:a="http://schemas.openxmlformats.org/drawingml/2006/main" noGrp="1"/>
-          </p:cNvSpPr>
-          <p:nvPr/>
-        </p:nvSpPr>
-        <p:spPr>
-          <a:xfrm xmlns:a="http://schemas.openxmlformats.org/drawingml/2006/main">
-            <a:off x="12096750" y="5143500"/>
-            <a:ext cx="2266950" cy="438150"/>
-          </a:xfrm>
-          <a:prstGeom xmlns:a="http://schemas.openxmlformats.org/drawingml/2006/main" prst="rect">
-            <a:avLst/>
-          </a:prstGeom>
-          <a:noFill xmlns:a="http://schemas.openxmlformats.org/drawingml/2006/main"/>
-          <a:ln xmlns:a="http://schemas.openxmlformats.org/drawingml/2006/main" w="0">
-            <a:noFill/>
-            <a:prstDash val="solid"/>
-          </a:ln>
-        </p:spPr>
-        <p:txBody>
-          <a:bodyPr xmlns:a="http://schemas.openxmlformats.org/drawingml/2006/main" lIns="0" tIns="0" rIns="0" bIns="0" anchor="t"/>
-          <a:lstStyle xmlns:a="http://schemas.openxmlformats.org/drawingml/2006/main"/>
-          <a:p xmlns:a="http://schemas.openxmlformats.org/drawingml/2006/main">
-            <a:pPr>
-              <a:defRPr sz="1875" b="1">
-                <a:solidFill>
-                  <a:srgbClr val="051C2A"/>
-                </a:solidFill>
-                <a:latin typeface="Calibri"/>
-                <a:ea typeface="Calibri"/>
-                <a:cs typeface="Calibri"/>
-              </a:defRPr>
-            </a:pPr>
-            <a:r>
-              <a:rPr sz="1875" b="1">
-                <a:solidFill>
-                  <a:srgbClr val="051C2A"/>
-                </a:solidFill>
-                <a:latin typeface="Calibri"/>
-                <a:ea typeface="Calibri"/>
-                <a:cs typeface="Calibri"/>
-              </a:rPr>
-              <a:t>Output contract</a:t>
+              <a:buNone/>
+              <a:defRPr sz="1425">
+                <a:solidFill>
+                  <a:srgbClr val="373738"/>
+                </a:solidFill>
+                <a:latin typeface="Calibri"/>
+                <a:ea typeface="Calibri"/>
+                <a:cs typeface="Calibri"/>
+              </a:defRPr>
+            </a:pPr>
+            <a:r>
+              <a:rPr sz="1425">
+                <a:solidFill>
+                  <a:srgbClr val="373738"/>
+                </a:solidFill>
+                <a:latin typeface="Calibri"/>
+                <a:ea typeface="Calibri"/>
+                <a:cs typeface="Calibri"/>
+              </a:rPr>
+              <a:t>partial delivery</a:t>
             </a:r>
           </a:p>
         </p:txBody>
@@ -4775,75 +4929,19 @@
           <p:cNvPr id="15" name="">
             <a:extLst xmlns:a="http://schemas.openxmlformats.org/drawingml/2006/main">
               <a:ext uri="{FF2B5EF4-FFF2-40B4-BE49-F238E27FC236}">
-                <a16:creationId xmlns:a16="http://schemas.microsoft.com/office/drawing/2014/main" id="{32780C9E-1A2E-4219-955F-7ED3FB5CD9E3}"/>
-              </a:ext>
-            </a:extLst>
-          </p:cNvPr>
-          <p:cNvSpPr>
-            <a:spLocks xmlns:a="http://schemas.openxmlformats.org/drawingml/2006/main" noGrp="1"/>
-          </p:cNvSpPr>
-          <p:nvPr/>
-        </p:nvSpPr>
-        <p:spPr>
-          <a:xfrm xmlns:a="http://schemas.openxmlformats.org/drawingml/2006/main">
-            <a:off x="2857500" y="6496050"/>
-            <a:ext cx="9525000" cy="400050"/>
-          </a:xfrm>
-          <a:prstGeom xmlns:a="http://schemas.openxmlformats.org/drawingml/2006/main" prst="rect">
-            <a:avLst/>
-          </a:prstGeom>
-          <a:noFill xmlns:a="http://schemas.openxmlformats.org/drawingml/2006/main"/>
-          <a:ln xmlns:a="http://schemas.openxmlformats.org/drawingml/2006/main" w="0">
-            <a:noFill/>
-            <a:prstDash val="solid"/>
-          </a:ln>
-        </p:spPr>
-        <p:txBody>
-          <a:bodyPr xmlns:a="http://schemas.openxmlformats.org/drawingml/2006/main" lIns="0" tIns="0" rIns="0" bIns="0" anchor="t"/>
-          <a:lstStyle xmlns:a="http://schemas.openxmlformats.org/drawingml/2006/main"/>
-          <a:p xmlns:a="http://schemas.openxmlformats.org/drawingml/2006/main">
-            <a:pPr algn="ctr">
-              <a:defRPr sz="1950" b="1">
-                <a:solidFill>
-                  <a:srgbClr val="051C2A"/>
-                </a:solidFill>
-                <a:latin typeface="Calibri"/>
-                <a:ea typeface="Calibri"/>
-                <a:cs typeface="Calibri"/>
-              </a:defRPr>
-            </a:pPr>
-            <a:r>
-              <a:rPr sz="1950" b="1">
-                <a:solidFill>
-                  <a:srgbClr val="051C2A"/>
-                </a:solidFill>
-                <a:latin typeface="Calibri"/>
-                <a:ea typeface="Calibri"/>
-                <a:cs typeface="Calibri"/>
-              </a:rPr>
-              <a:t>A larger model cannot recover a missing application contract reliably.</a:t>
-            </a:r>
-          </a:p>
-        </p:txBody>
-      </p:sp>
-      <p:sp>
-        <p:nvSpPr>
-          <p:cNvPr id="16" name="">
-            <a:extLst xmlns:a="http://schemas.openxmlformats.org/drawingml/2006/main">
-              <a:ext uri="{FF2B5EF4-FFF2-40B4-BE49-F238E27FC236}">
-                <a16:creationId xmlns:a16="http://schemas.microsoft.com/office/drawing/2014/main" id="{86DF59FE-4FEE-42DE-92D0-4AA138236B06}"/>
-              </a:ext>
-            </a:extLst>
-          </p:cNvPr>
-          <p:cNvSpPr>
-            <a:spLocks xmlns:a="http://schemas.openxmlformats.org/drawingml/2006/main" noGrp="1"/>
-          </p:cNvSpPr>
-          <p:nvPr/>
-        </p:nvSpPr>
-        <p:spPr>
-          <a:xfrm xmlns:a="http://schemas.openxmlformats.org/drawingml/2006/main">
-            <a:off x="857250" y="7905750"/>
-            <a:ext cx="13525500" cy="19050"/>
+                <a16:creationId xmlns:a16="http://schemas.microsoft.com/office/drawing/2014/main" id="{2F992DE2-DBDA-4301-8DC8-9279D4957853}"/>
+              </a:ext>
+            </a:extLst>
+          </p:cNvPr>
+          <p:cNvSpPr>
+            <a:spLocks xmlns:a="http://schemas.openxmlformats.org/drawingml/2006/main" noGrp="1"/>
+          </p:cNvSpPr>
+          <p:nvPr/>
+        </p:nvSpPr>
+        <p:spPr>
+          <a:xfrm xmlns:a="http://schemas.openxmlformats.org/drawingml/2006/main">
+            <a:off x="971550" y="5619750"/>
+            <a:ext cx="13296900" cy="19050"/>
           </a:xfrm>
           <a:prstGeom xmlns:a="http://schemas.openxmlformats.org/drawingml/2006/main" prst="rect">
             <a:avLst/>
@@ -4861,10 +4959,214 @@
       </p:sp>
       <p:sp>
         <p:nvSpPr>
+          <p:cNvPr id="16" name="">
+            <a:extLst xmlns:a="http://schemas.openxmlformats.org/drawingml/2006/main">
+              <a:ext uri="{FF2B5EF4-FFF2-40B4-BE49-F238E27FC236}">
+                <a16:creationId xmlns:a16="http://schemas.microsoft.com/office/drawing/2014/main" id="{F9E04DE3-A748-46D1-80BD-4FF702D1C0DC}"/>
+              </a:ext>
+            </a:extLst>
+          </p:cNvPr>
+          <p:cNvSpPr>
+            <a:spLocks xmlns:a="http://schemas.openxmlformats.org/drawingml/2006/main" noGrp="1"/>
+          </p:cNvSpPr>
+          <p:nvPr/>
+        </p:nvSpPr>
+        <p:spPr>
+          <a:xfrm xmlns:a="http://schemas.openxmlformats.org/drawingml/2006/main">
+            <a:off x="1066800" y="6038850"/>
+            <a:ext cx="2476500" cy="304800"/>
+          </a:xfrm>
+          <a:prstGeom xmlns:a="http://schemas.openxmlformats.org/drawingml/2006/main" prst="rect">
+            <a:avLst/>
+          </a:prstGeom>
+          <a:noFill xmlns:a="http://schemas.openxmlformats.org/drawingml/2006/main"/>
+          <a:ln xmlns:a="http://schemas.openxmlformats.org/drawingml/2006/main" w="0">
+            <a:noFill/>
+            <a:prstDash val="solid"/>
+          </a:ln>
+        </p:spPr>
+        <p:txBody>
+          <a:bodyPr xmlns:a="http://schemas.openxmlformats.org/drawingml/2006/main" lIns="0" tIns="0" rIns="0" bIns="0" anchor="t"/>
+          <a:lstStyle xmlns:a="http://schemas.openxmlformats.org/drawingml/2006/main"/>
+          <a:p xmlns:a="http://schemas.openxmlformats.org/drawingml/2006/main">
+            <a:pPr>
+              <a:buNone/>
+              <a:defRPr sz="1350" b="1">
+                <a:solidFill>
+                  <a:srgbClr val="1F40CB"/>
+                </a:solidFill>
+                <a:latin typeface="Calibri"/>
+                <a:ea typeface="Calibri"/>
+                <a:cs typeface="Calibri"/>
+              </a:defRPr>
+            </a:pPr>
+            <a:r>
+              <a:rPr sz="1350" b="1">
+                <a:solidFill>
+                  <a:srgbClr val="1F40CB"/>
+                </a:solidFill>
+                <a:latin typeface="Calibri"/>
+                <a:ea typeface="Calibri"/>
+                <a:cs typeface="Calibri"/>
+              </a:rPr>
+              <a:t>ENGINEERING RULE</a:t>
+            </a:r>
+          </a:p>
+        </p:txBody>
+      </p:sp>
+      <p:sp>
+        <p:nvSpPr>
           <p:cNvPr id="17" name="">
             <a:extLst xmlns:a="http://schemas.openxmlformats.org/drawingml/2006/main">
               <a:ext uri="{FF2B5EF4-FFF2-40B4-BE49-F238E27FC236}">
-                <a16:creationId xmlns:a16="http://schemas.microsoft.com/office/drawing/2014/main" id="{CCD1BFF5-CF10-414F-A9A1-5F4FE7F25AE3}"/>
+                <a16:creationId xmlns:a16="http://schemas.microsoft.com/office/drawing/2014/main" id="{B898884D-F1F0-4F39-971A-9EEBC152E6EC}"/>
+              </a:ext>
+            </a:extLst>
+          </p:cNvPr>
+          <p:cNvSpPr>
+            <a:spLocks xmlns:a="http://schemas.openxmlformats.org/drawingml/2006/main" noGrp="1"/>
+          </p:cNvSpPr>
+          <p:nvPr/>
+        </p:nvSpPr>
+        <p:spPr>
+          <a:xfrm xmlns:a="http://schemas.openxmlformats.org/drawingml/2006/main">
+            <a:off x="3848100" y="5953125"/>
+            <a:ext cx="8096250" cy="457200"/>
+          </a:xfrm>
+          <a:prstGeom xmlns:a="http://schemas.openxmlformats.org/drawingml/2006/main" prst="rect">
+            <a:avLst/>
+          </a:prstGeom>
+          <a:noFill xmlns:a="http://schemas.openxmlformats.org/drawingml/2006/main"/>
+          <a:ln xmlns:a="http://schemas.openxmlformats.org/drawingml/2006/main" w="0">
+            <a:noFill/>
+            <a:prstDash val="solid"/>
+          </a:ln>
+        </p:spPr>
+        <p:txBody>
+          <a:bodyPr xmlns:a="http://schemas.openxmlformats.org/drawingml/2006/main" lIns="0" tIns="0" rIns="0" bIns="0" anchor="t"/>
+          <a:lstStyle xmlns:a="http://schemas.openxmlformats.org/drawingml/2006/main"/>
+          <a:p xmlns:a="http://schemas.openxmlformats.org/drawingml/2006/main">
+            <a:pPr>
+              <a:buNone/>
+              <a:defRPr sz="2100" b="1">
+                <a:solidFill>
+                  <a:srgbClr val="051C2A"/>
+                </a:solidFill>
+                <a:latin typeface="Calibri"/>
+                <a:ea typeface="Calibri"/>
+                <a:cs typeface="Calibri"/>
+              </a:defRPr>
+            </a:pPr>
+            <a:r>
+              <a:rPr sz="2100" b="1">
+                <a:solidFill>
+                  <a:srgbClr val="051C2A"/>
+                </a:solidFill>
+                <a:latin typeface="Calibri"/>
+                <a:ea typeface="Calibri"/>
+                <a:cs typeface="Calibri"/>
+              </a:rPr>
+              <a:t>Missing metadata stays None</a:t>
+            </a:r>
+          </a:p>
+        </p:txBody>
+      </p:sp>
+      <p:sp>
+        <p:nvSpPr>
+          <p:cNvPr id="18" name="">
+            <a:extLst xmlns:a="http://schemas.openxmlformats.org/drawingml/2006/main">
+              <a:ext uri="{FF2B5EF4-FFF2-40B4-BE49-F238E27FC236}">
+                <a16:creationId xmlns:a16="http://schemas.microsoft.com/office/drawing/2014/main" id="{098E2BDC-8EFB-46D2-9F43-DF5F5651B987}"/>
+              </a:ext>
+            </a:extLst>
+          </p:cNvPr>
+          <p:cNvSpPr>
+            <a:spLocks xmlns:a="http://schemas.openxmlformats.org/drawingml/2006/main" noGrp="1"/>
+          </p:cNvSpPr>
+          <p:nvPr/>
+        </p:nvSpPr>
+        <p:spPr>
+          <a:xfrm xmlns:a="http://schemas.openxmlformats.org/drawingml/2006/main">
+            <a:off x="3848100" y="6705600"/>
+            <a:ext cx="8763000" cy="361950"/>
+          </a:xfrm>
+          <a:prstGeom xmlns:a="http://schemas.openxmlformats.org/drawingml/2006/main" prst="rect">
+            <a:avLst/>
+          </a:prstGeom>
+          <a:noFill xmlns:a="http://schemas.openxmlformats.org/drawingml/2006/main"/>
+          <a:ln xmlns:a="http://schemas.openxmlformats.org/drawingml/2006/main" w="0">
+            <a:noFill/>
+            <a:prstDash val="solid"/>
+          </a:ln>
+        </p:spPr>
+        <p:txBody>
+          <a:bodyPr xmlns:a="http://schemas.openxmlformats.org/drawingml/2006/main" lIns="0" tIns="0" rIns="0" bIns="0" anchor="t"/>
+          <a:lstStyle xmlns:a="http://schemas.openxmlformats.org/drawingml/2006/main"/>
+          <a:p xmlns:a="http://schemas.openxmlformats.org/drawingml/2006/main">
+            <a:pPr>
+              <a:buNone/>
+              <a:defRPr sz="1725">
+                <a:solidFill>
+                  <a:srgbClr val="373738"/>
+                </a:solidFill>
+                <a:latin typeface="Calibri"/>
+                <a:ea typeface="Calibri"/>
+                <a:cs typeface="Calibri"/>
+              </a:defRPr>
+            </a:pPr>
+            <a:r>
+              <a:rPr sz="1725">
+                <a:solidFill>
+                  <a:srgbClr val="373738"/>
+                </a:solidFill>
+                <a:latin typeface="Calibri"/>
+                <a:ea typeface="Calibri"/>
+                <a:cs typeface="Calibri"/>
+              </a:rPr>
+              <a:t>Streaming changes delivery—not factual quality.</a:t>
+            </a:r>
+          </a:p>
+        </p:txBody>
+      </p:sp>
+      <p:sp>
+        <p:nvSpPr>
+          <p:cNvPr id="19" name="">
+            <a:extLst xmlns:a="http://schemas.openxmlformats.org/drawingml/2006/main">
+              <a:ext uri="{FF2B5EF4-FFF2-40B4-BE49-F238E27FC236}">
+                <a16:creationId xmlns:a16="http://schemas.microsoft.com/office/drawing/2014/main" id="{FB3216C8-4273-465E-8AAA-7F81F6BD4F9A}"/>
+              </a:ext>
+            </a:extLst>
+          </p:cNvPr>
+          <p:cNvSpPr>
+            <a:spLocks xmlns:a="http://schemas.openxmlformats.org/drawingml/2006/main" noGrp="1"/>
+          </p:cNvSpPr>
+          <p:nvPr/>
+        </p:nvSpPr>
+        <p:spPr>
+          <a:xfrm xmlns:a="http://schemas.openxmlformats.org/drawingml/2006/main">
+            <a:off x="857250" y="7905750"/>
+            <a:ext cx="13525500" cy="19050"/>
+          </a:xfrm>
+          <a:prstGeom xmlns:a="http://schemas.openxmlformats.org/drawingml/2006/main" prst="rect">
+            <a:avLst/>
+          </a:prstGeom>
+          <a:solidFill xmlns:a="http://schemas.openxmlformats.org/drawingml/2006/main">
+            <a:srgbClr val="E4E6E8"/>
+          </a:solidFill>
+          <a:ln xmlns:a="http://schemas.openxmlformats.org/drawingml/2006/main" w="9525">
+            <a:solidFill>
+              <a:srgbClr val="E4E6E8"/>
+            </a:solidFill>
+            <a:prstDash val="solid"/>
+          </a:ln>
+        </p:spPr>
+      </p:sp>
+      <p:sp>
+        <p:nvSpPr>
+          <p:cNvPr id="20" name="">
+            <a:extLst xmlns:a="http://schemas.openxmlformats.org/drawingml/2006/main">
+              <a:ext uri="{FF2B5EF4-FFF2-40B4-BE49-F238E27FC236}">
+                <a16:creationId xmlns:a16="http://schemas.microsoft.com/office/drawing/2014/main" id="{6CACED58-8E88-4E45-BBE1-234F2479710B}"/>
               </a:ext>
             </a:extLst>
           </p:cNvPr>
@@ -4894,10 +5196,10 @@
       </p:sp>
       <p:sp>
         <p:nvSpPr>
-          <p:cNvPr id="18" name="">
-            <a:extLst xmlns:a="http://schemas.openxmlformats.org/drawingml/2006/main">
-              <a:ext uri="{FF2B5EF4-FFF2-40B4-BE49-F238E27FC236}">
-                <a16:creationId xmlns:a16="http://schemas.microsoft.com/office/drawing/2014/main" id="{79A777C2-72B8-4165-974F-061823F0161A}"/>
+          <p:cNvPr id="21" name="">
+            <a:extLst xmlns:a="http://schemas.openxmlformats.org/drawingml/2006/main">
+              <a:ext uri="{FF2B5EF4-FFF2-40B4-BE49-F238E27FC236}">
+                <a16:creationId xmlns:a16="http://schemas.microsoft.com/office/drawing/2014/main" id="{3B5FEDB8-E30E-496F-8612-2FECE0C1E01D}"/>
               </a:ext>
             </a:extLst>
           </p:cNvPr>
@@ -4925,6 +5227,7 @@
           <a:lstStyle xmlns:a="http://schemas.openxmlformats.org/drawingml/2006/main"/>
           <a:p xmlns:a="http://schemas.openxmlformats.org/drawingml/2006/main">
             <a:pPr>
+              <a:buNone/>
               <a:defRPr sz="1275">
                 <a:solidFill>
                   <a:srgbClr val="9E9FA2"/>
@@ -4950,10 +5253,10 @@
       </p:sp>
       <p:sp>
         <p:nvSpPr>
-          <p:cNvPr id="19" name="">
-            <a:extLst xmlns:a="http://schemas.openxmlformats.org/drawingml/2006/main">
-              <a:ext uri="{FF2B5EF4-FFF2-40B4-BE49-F238E27FC236}">
-                <a16:creationId xmlns:a16="http://schemas.microsoft.com/office/drawing/2014/main" id="{656DE7B0-9049-4B6C-8B3A-B01028AA58B8}"/>
+          <p:cNvPr id="22" name="">
+            <a:extLst xmlns:a="http://schemas.openxmlformats.org/drawingml/2006/main">
+              <a:ext uri="{FF2B5EF4-FFF2-40B4-BE49-F238E27FC236}">
+                <a16:creationId xmlns:a16="http://schemas.microsoft.com/office/drawing/2014/main" id="{43A99E8C-5D07-4E5E-982C-7D35651966C4}"/>
               </a:ext>
             </a:extLst>
           </p:cNvPr>
@@ -4981,6 +5284,7 @@
           <a:lstStyle xmlns:a="http://schemas.openxmlformats.org/drawingml/2006/main"/>
           <a:p xmlns:a="http://schemas.openxmlformats.org/drawingml/2006/main">
             <a:pPr algn="r">
+              <a:buNone/>
               <a:defRPr sz="1200" b="1">
                 <a:solidFill>
                   <a:srgbClr val="9E9FA2"/>
@@ -4999,17 +5303,17 @@
                 <a:ea typeface="Calibri"/>
                 <a:cs typeface="Calibri"/>
               </a:rPr>
-              <a:t>FAILURE</a:t>
-            </a:r>
-          </a:p>
-        </p:txBody>
-      </p:sp>
-      <p:sp>
-        <p:nvSpPr>
-          <p:cNvPr id="20" name="">
-            <a:extLst xmlns:a="http://schemas.openxmlformats.org/drawingml/2006/main">
-              <a:ext uri="{FF2B5EF4-FFF2-40B4-BE49-F238E27FC236}">
-                <a16:creationId xmlns:a16="http://schemas.microsoft.com/office/drawing/2014/main" id="{B0657728-BC95-4348-AF6C-34919712C05C}"/>
+              <a:t>OBSERVABILITY</a:t>
+            </a:r>
+          </a:p>
+        </p:txBody>
+      </p:sp>
+      <p:sp>
+        <p:nvSpPr>
+          <p:cNvPr id="23" name="">
+            <a:extLst xmlns:a="http://schemas.openxmlformats.org/drawingml/2006/main">
+              <a:ext uri="{FF2B5EF4-FFF2-40B4-BE49-F238E27FC236}">
+                <a16:creationId xmlns:a16="http://schemas.microsoft.com/office/drawing/2014/main" id="{3CB80793-ED5A-4395-A2C9-BD38721FD6BE}"/>
               </a:ext>
             </a:extLst>
           </p:cNvPr>
@@ -5037,6 +5341,7 @@
           <a:lstStyle xmlns:a="http://schemas.openxmlformats.org/drawingml/2006/main"/>
           <a:p xmlns:a="http://schemas.openxmlformats.org/drawingml/2006/main">
             <a:pPr algn="r">
+              <a:buNone/>
               <a:defRPr sz="1200" b="1">
                 <a:solidFill>
                   <a:srgbClr val="9E9FA2"/>
@@ -5063,7 +5368,7 @@
     </p:spTree>
     <p:extLst>
       <p:ext uri="{BB962C8B-B14F-4D97-AF65-F5344CB8AC3E}">
-        <p14:creationId xmlns:p14="http://schemas.microsoft.com/office/powerpoint/2010/main" val="1510656681"/>
+        <p14:creationId xmlns:p14="http://schemas.microsoft.com/office/powerpoint/2010/main" val="553509772"/>
       </p:ext>
     </p:extLst>
   </p:cSld>
@@ -5091,10 +5396,10 @@
       </p:grpSpPr>
       <p:sp>
         <p:nvSpPr>
-          <p:cNvPr id="16" name="">
-            <a:extLst xmlns:a="http://schemas.openxmlformats.org/drawingml/2006/main">
-              <a:ext uri="{FF2B5EF4-FFF2-40B4-BE49-F238E27FC236}">
-                <a16:creationId xmlns:a16="http://schemas.microsoft.com/office/drawing/2014/main" id="{2FEB10B4-0FED-42C3-8AA0-5BAB4CEF90E7}"/>
+          <p:cNvPr id="21" name="">
+            <a:extLst xmlns:a="http://schemas.openxmlformats.org/drawingml/2006/main">
+              <a:ext uri="{FF2B5EF4-FFF2-40B4-BE49-F238E27FC236}">
+                <a16:creationId xmlns:a16="http://schemas.microsoft.com/office/drawing/2014/main" id="{480BC54A-1309-460D-AD2B-0F18507EB1B8}"/>
               </a:ext>
             </a:extLst>
           </p:cNvPr>
@@ -5122,6 +5427,7 @@
           <a:lstStyle xmlns:a="http://schemas.openxmlformats.org/drawingml/2006/main"/>
           <a:p xmlns:a="http://schemas.openxmlformats.org/drawingml/2006/main">
             <a:pPr>
+              <a:buNone/>
               <a:defRPr sz="1350" b="1">
                 <a:solidFill>
                   <a:srgbClr val="1F40CB"/>
@@ -5140,7 +5446,7 @@
                 <a:ea typeface="Calibri"/>
                 <a:cs typeface="Calibri"/>
               </a:rPr>
-              <a:t>NVIDIA FISCAL 2026</a:t>
+              <a:t>FAILURE LAB</a:t>
             </a:r>
           </a:p>
         </p:txBody>
@@ -5150,7 +5456,7 @@
           <p:cNvPr id="2" name="">
             <a:extLst xmlns:a="http://schemas.openxmlformats.org/drawingml/2006/main">
               <a:ext uri="{FF2B5EF4-FFF2-40B4-BE49-F238E27FC236}">
-                <a16:creationId xmlns:a16="http://schemas.microsoft.com/office/drawing/2014/main" id="{865BB064-4AE8-44EA-963D-8F76C6A28D53}"/>
+                <a16:creationId xmlns:a16="http://schemas.microsoft.com/office/drawing/2014/main" id="{592B95A1-7E53-412C-8974-DFB6A8DFF62E}"/>
               </a:ext>
             </a:extLst>
           </p:cNvPr>
@@ -5178,6 +5484,7 @@
           <a:lstStyle xmlns:a="http://schemas.openxmlformats.org/drawingml/2006/main"/>
           <a:p xmlns:a="http://schemas.openxmlformats.org/drawingml/2006/main">
             <a:pPr>
+              <a:buNone/>
               <a:defRPr sz="3600" b="1">
                 <a:solidFill>
                   <a:srgbClr val="051C2A"/>
@@ -5196,7 +5503,7 @@
                 <a:ea typeface="Calibri"/>
                 <a:cs typeface="Calibri"/>
               </a:rPr>
-              <a:t>Real evidence makes the question answerable</a:t>
+              <a:t>A successful API call can still fail as analysis</a:t>
             </a:r>
           </a:p>
         </p:txBody>
@@ -5206,53 +5513,54 @@
           <p:cNvPr id="3" name="">
             <a:extLst xmlns:a="http://schemas.openxmlformats.org/drawingml/2006/main">
               <a:ext uri="{FF2B5EF4-FFF2-40B4-BE49-F238E27FC236}">
-                <a16:creationId xmlns:a16="http://schemas.microsoft.com/office/drawing/2014/main" id="{51CA505F-3B0C-49A0-98CF-6D6175D62EAB}"/>
-              </a:ext>
-            </a:extLst>
-          </p:cNvPr>
-          <p:cNvSpPr>
-            <a:spLocks xmlns:a="http://schemas.openxmlformats.org/drawingml/2006/main" noGrp="1"/>
-          </p:cNvSpPr>
-          <p:nvPr/>
-        </p:nvSpPr>
-        <p:spPr>
-          <a:xfrm xmlns:a="http://schemas.openxmlformats.org/drawingml/2006/main">
-            <a:off x="1066800" y="2857500"/>
-            <a:ext cx="4381500" cy="857250"/>
-          </a:xfrm>
-          <a:prstGeom xmlns:a="http://schemas.openxmlformats.org/drawingml/2006/main" prst="rect">
-            <a:avLst/>
-          </a:prstGeom>
-          <a:noFill xmlns:a="http://schemas.openxmlformats.org/drawingml/2006/main"/>
-          <a:ln xmlns:a="http://schemas.openxmlformats.org/drawingml/2006/main" w="0">
-            <a:noFill/>
-            <a:prstDash val="solid"/>
-          </a:ln>
-        </p:spPr>
-        <p:txBody>
-          <a:bodyPr xmlns:a="http://schemas.openxmlformats.org/drawingml/2006/main" lIns="0" tIns="0" rIns="0" bIns="0" anchor="t"/>
-          <a:lstStyle xmlns:a="http://schemas.openxmlformats.org/drawingml/2006/main"/>
-          <a:p xmlns:a="http://schemas.openxmlformats.org/drawingml/2006/main">
-            <a:pPr>
-              <a:defRPr sz="4350" b="1">
-                <a:solidFill>
-                  <a:srgbClr val="051C2A"/>
-                </a:solidFill>
-                <a:latin typeface="Calibri"/>
-                <a:ea typeface="Calibri"/>
-                <a:cs typeface="Calibri"/>
-              </a:defRPr>
-            </a:pPr>
-            <a:r>
-              <a:rPr sz="4350" b="1">
-                <a:solidFill>
-                  <a:srgbClr val="051C2A"/>
-                </a:solidFill>
-                <a:latin typeface="Calibri"/>
-                <a:ea typeface="Calibri"/>
-                <a:cs typeface="Calibri"/>
-              </a:rPr>
-              <a:t>$215.9bn</a:t>
+                <a16:creationId xmlns:a16="http://schemas.microsoft.com/office/drawing/2014/main" id="{8A1C2FBE-FCE9-4D4C-9DBD-D89790B01627}"/>
+              </a:ext>
+            </a:extLst>
+          </p:cNvPr>
+          <p:cNvSpPr>
+            <a:spLocks xmlns:a="http://schemas.openxmlformats.org/drawingml/2006/main" noGrp="1"/>
+          </p:cNvSpPr>
+          <p:nvPr/>
+        </p:nvSpPr>
+        <p:spPr>
+          <a:xfrm xmlns:a="http://schemas.openxmlformats.org/drawingml/2006/main">
+            <a:off x="1257300" y="2857500"/>
+            <a:ext cx="11811000" cy="685800"/>
+          </a:xfrm>
+          <a:prstGeom xmlns:a="http://schemas.openxmlformats.org/drawingml/2006/main" prst="rect">
+            <a:avLst/>
+          </a:prstGeom>
+          <a:noFill xmlns:a="http://schemas.openxmlformats.org/drawingml/2006/main"/>
+          <a:ln xmlns:a="http://schemas.openxmlformats.org/drawingml/2006/main" w="0">
+            <a:noFill/>
+            <a:prstDash val="solid"/>
+          </a:ln>
+        </p:spPr>
+        <p:txBody>
+          <a:bodyPr xmlns:a="http://schemas.openxmlformats.org/drawingml/2006/main" lIns="0" tIns="0" rIns="0" bIns="0" anchor="t"/>
+          <a:lstStyle xmlns:a="http://schemas.openxmlformats.org/drawingml/2006/main"/>
+          <a:p xmlns:a="http://schemas.openxmlformats.org/drawingml/2006/main">
+            <a:pPr algn="ctr">
+              <a:buNone/>
+              <a:defRPr sz="2850" b="1">
+                <a:solidFill>
+                  <a:srgbClr val="F07D00"/>
+                </a:solidFill>
+                <a:latin typeface="Calibri"/>
+                <a:ea typeface="Calibri"/>
+                <a:cs typeface="Calibri"/>
+              </a:defRPr>
+            </a:pPr>
+            <a:r>
+              <a:rPr sz="2850" b="1">
+                <a:solidFill>
+                  <a:srgbClr val="F07D00"/>
+                </a:solidFill>
+                <a:latin typeface="Calibri"/>
+                <a:ea typeface="Calibri"/>
+                <a:cs typeface="Calibri"/>
+              </a:rPr>
+              <a:t>“What is happening with AI demand?”</a:t>
             </a:r>
           </a:p>
         </p:txBody>
@@ -5262,75 +5570,19 @@
           <p:cNvPr id="4" name="">
             <a:extLst xmlns:a="http://schemas.openxmlformats.org/drawingml/2006/main">
               <a:ext uri="{FF2B5EF4-FFF2-40B4-BE49-F238E27FC236}">
-                <a16:creationId xmlns:a16="http://schemas.microsoft.com/office/drawing/2014/main" id="{7AD41D26-D959-489A-A086-84E330386F5D}"/>
-              </a:ext>
-            </a:extLst>
-          </p:cNvPr>
-          <p:cNvSpPr>
-            <a:spLocks xmlns:a="http://schemas.openxmlformats.org/drawingml/2006/main" noGrp="1"/>
-          </p:cNvSpPr>
-          <p:nvPr/>
-        </p:nvSpPr>
-        <p:spPr>
-          <a:xfrm xmlns:a="http://schemas.openxmlformats.org/drawingml/2006/main">
-            <a:off x="1066800" y="3905250"/>
-            <a:ext cx="4953000" cy="361950"/>
-          </a:xfrm>
-          <a:prstGeom xmlns:a="http://schemas.openxmlformats.org/drawingml/2006/main" prst="rect">
-            <a:avLst/>
-          </a:prstGeom>
-          <a:noFill xmlns:a="http://schemas.openxmlformats.org/drawingml/2006/main"/>
-          <a:ln xmlns:a="http://schemas.openxmlformats.org/drawingml/2006/main" w="0">
-            <a:noFill/>
-            <a:prstDash val="solid"/>
-          </a:ln>
-        </p:spPr>
-        <p:txBody>
-          <a:bodyPr xmlns:a="http://schemas.openxmlformats.org/drawingml/2006/main" lIns="0" tIns="0" rIns="0" bIns="0" anchor="t"/>
-          <a:lstStyle xmlns:a="http://schemas.openxmlformats.org/drawingml/2006/main"/>
-          <a:p xmlns:a="http://schemas.openxmlformats.org/drawingml/2006/main">
-            <a:pPr>
-              <a:defRPr sz="1650">
-                <a:solidFill>
-                  <a:srgbClr val="373738"/>
-                </a:solidFill>
-                <a:latin typeface="Calibri"/>
-                <a:ea typeface="Calibri"/>
-                <a:cs typeface="Calibri"/>
-              </a:defRPr>
-            </a:pPr>
-            <a:r>
-              <a:rPr sz="1650">
-                <a:solidFill>
-                  <a:srgbClr val="373738"/>
-                </a:solidFill>
-                <a:latin typeface="Calibri"/>
-                <a:ea typeface="Calibri"/>
-                <a:cs typeface="Calibri"/>
-              </a:rPr>
-              <a:t>Revenue · +65% year on year  [F1]</a:t>
-            </a:r>
-          </a:p>
-        </p:txBody>
-      </p:sp>
-      <p:sp>
-        <p:nvSpPr>
-          <p:cNvPr id="5" name="">
-            <a:extLst xmlns:a="http://schemas.openxmlformats.org/drawingml/2006/main">
-              <a:ext uri="{FF2B5EF4-FFF2-40B4-BE49-F238E27FC236}">
-                <a16:creationId xmlns:a16="http://schemas.microsoft.com/office/drawing/2014/main" id="{5B522A8F-16AD-44AB-BA1E-BB7C095B3A39}"/>
-              </a:ext>
-            </a:extLst>
-          </p:cNvPr>
-          <p:cNvSpPr>
-            <a:spLocks xmlns:a="http://schemas.openxmlformats.org/drawingml/2006/main" noGrp="1"/>
-          </p:cNvSpPr>
-          <p:nvPr/>
-        </p:nvSpPr>
-        <p:spPr>
-          <a:xfrm xmlns:a="http://schemas.openxmlformats.org/drawingml/2006/main">
-            <a:off x="6477000" y="2724150"/>
-            <a:ext cx="19050" cy="3143250"/>
+                <a16:creationId xmlns:a16="http://schemas.microsoft.com/office/drawing/2014/main" id="{C0F60789-BA8D-4377-A318-F3BEDA9C61FD}"/>
+              </a:ext>
+            </a:extLst>
+          </p:cNvPr>
+          <p:cNvSpPr>
+            <a:spLocks xmlns:a="http://schemas.openxmlformats.org/drawingml/2006/main" noGrp="1"/>
+          </p:cNvSpPr>
+          <p:nvPr/>
+        </p:nvSpPr>
+        <p:spPr>
+          <a:xfrm xmlns:a="http://schemas.openxmlformats.org/drawingml/2006/main">
+            <a:off x="2476500" y="3952875"/>
+            <a:ext cx="10287000" cy="19050"/>
           </a:xfrm>
           <a:prstGeom xmlns:a="http://schemas.openxmlformats.org/drawingml/2006/main" prst="rect">
             <a:avLst/>
@@ -5348,22 +5600,79 @@
       </p:sp>
       <p:sp>
         <p:nvSpPr>
+          <p:cNvPr id="5" name="">
+            <a:extLst xmlns:a="http://schemas.openxmlformats.org/drawingml/2006/main">
+              <a:ext uri="{FF2B5EF4-FFF2-40B4-BE49-F238E27FC236}">
+                <a16:creationId xmlns:a16="http://schemas.microsoft.com/office/drawing/2014/main" id="{F632BA03-1788-4BE1-A884-B111371C78E5}"/>
+              </a:ext>
+            </a:extLst>
+          </p:cNvPr>
+          <p:cNvSpPr>
+            <a:spLocks xmlns:a="http://schemas.openxmlformats.org/drawingml/2006/main" noGrp="1"/>
+          </p:cNvSpPr>
+          <p:nvPr/>
+        </p:nvSpPr>
+        <p:spPr>
+          <a:xfrm xmlns:a="http://schemas.openxmlformats.org/drawingml/2006/main">
+            <a:off x="1123950" y="4648200"/>
+            <a:ext cx="495300" cy="323850"/>
+          </a:xfrm>
+          <a:prstGeom xmlns:a="http://schemas.openxmlformats.org/drawingml/2006/main" prst="rect">
+            <a:avLst/>
+          </a:prstGeom>
+          <a:noFill xmlns:a="http://schemas.openxmlformats.org/drawingml/2006/main"/>
+          <a:ln xmlns:a="http://schemas.openxmlformats.org/drawingml/2006/main" w="0">
+            <a:noFill/>
+            <a:prstDash val="solid"/>
+          </a:ln>
+        </p:spPr>
+        <p:txBody>
+          <a:bodyPr xmlns:a="http://schemas.openxmlformats.org/drawingml/2006/main" lIns="0" tIns="0" rIns="0" bIns="0" anchor="t"/>
+          <a:lstStyle xmlns:a="http://schemas.openxmlformats.org/drawingml/2006/main"/>
+          <a:p xmlns:a="http://schemas.openxmlformats.org/drawingml/2006/main">
+            <a:pPr>
+              <a:buNone/>
+              <a:defRPr sz="1350" b="1">
+                <a:solidFill>
+                  <a:srgbClr val="F07D00"/>
+                </a:solidFill>
+                <a:latin typeface="Calibri"/>
+                <a:ea typeface="Calibri"/>
+                <a:cs typeface="Calibri"/>
+              </a:defRPr>
+            </a:pPr>
+            <a:r>
+              <a:rPr sz="1350" b="1">
+                <a:solidFill>
+                  <a:srgbClr val="F07D00"/>
+                </a:solidFill>
+                <a:latin typeface="Calibri"/>
+                <a:ea typeface="Calibri"/>
+                <a:cs typeface="Calibri"/>
+              </a:rPr>
+              <a:t>01</a:t>
+            </a:r>
+          </a:p>
+        </p:txBody>
+      </p:sp>
+      <p:sp>
+        <p:nvSpPr>
           <p:cNvPr id="6" name="">
             <a:extLst xmlns:a="http://schemas.openxmlformats.org/drawingml/2006/main">
               <a:ext uri="{FF2B5EF4-FFF2-40B4-BE49-F238E27FC236}">
-                <a16:creationId xmlns:a16="http://schemas.microsoft.com/office/drawing/2014/main" id="{3E7C6626-7591-4116-BDA4-36A1BF728E57}"/>
-              </a:ext>
-            </a:extLst>
-          </p:cNvPr>
-          <p:cNvSpPr>
-            <a:spLocks xmlns:a="http://schemas.openxmlformats.org/drawingml/2006/main" noGrp="1"/>
-          </p:cNvSpPr>
-          <p:nvPr/>
-        </p:nvSpPr>
-        <p:spPr>
-          <a:xfrm xmlns:a="http://schemas.openxmlformats.org/drawingml/2006/main">
-            <a:off x="7239000" y="2857500"/>
-            <a:ext cx="4953000" cy="857250"/>
+                <a16:creationId xmlns:a16="http://schemas.microsoft.com/office/drawing/2014/main" id="{21D92F82-4B68-493F-A374-EE0CF32C7343}"/>
+              </a:ext>
+            </a:extLst>
+          </p:cNvPr>
+          <p:cNvSpPr>
+            <a:spLocks xmlns:a="http://schemas.openxmlformats.org/drawingml/2006/main" noGrp="1"/>
+          </p:cNvSpPr>
+          <p:nvPr/>
+        </p:nvSpPr>
+        <p:spPr>
+          <a:xfrm xmlns:a="http://schemas.openxmlformats.org/drawingml/2006/main">
+            <a:off x="1123950" y="5143500"/>
+            <a:ext cx="2266950" cy="438150"/>
           </a:xfrm>
           <a:prstGeom xmlns:a="http://schemas.openxmlformats.org/drawingml/2006/main" prst="rect">
             <a:avLst/>
@@ -5379,25 +5688,26 @@
           <a:lstStyle xmlns:a="http://schemas.openxmlformats.org/drawingml/2006/main"/>
           <a:p xmlns:a="http://schemas.openxmlformats.org/drawingml/2006/main">
             <a:pPr>
-              <a:defRPr sz="4350" b="1">
-                <a:solidFill>
-                  <a:srgbClr val="1F40CB"/>
-                </a:solidFill>
-                <a:latin typeface="Calibri"/>
-                <a:ea typeface="Calibri"/>
-                <a:cs typeface="Calibri"/>
-              </a:defRPr>
-            </a:pPr>
-            <a:r>
-              <a:rPr sz="4350" b="1">
-                <a:solidFill>
-                  <a:srgbClr val="1F40CB"/>
-                </a:solidFill>
-                <a:latin typeface="Calibri"/>
-                <a:ea typeface="Calibri"/>
-                <a:cs typeface="Calibri"/>
-              </a:rPr>
-              <a:t>$193.7bn</a:t>
+              <a:buNone/>
+              <a:defRPr sz="1875" b="1">
+                <a:solidFill>
+                  <a:srgbClr val="051C2A"/>
+                </a:solidFill>
+                <a:latin typeface="Calibri"/>
+                <a:ea typeface="Calibri"/>
+                <a:cs typeface="Calibri"/>
+              </a:defRPr>
+            </a:pPr>
+            <a:r>
+              <a:rPr sz="1875" b="1">
+                <a:solidFill>
+                  <a:srgbClr val="051C2A"/>
+                </a:solidFill>
+                <a:latin typeface="Calibri"/>
+                <a:ea typeface="Calibri"/>
+                <a:cs typeface="Calibri"/>
+              </a:rPr>
+              <a:t>Company</a:t>
             </a:r>
           </a:p>
         </p:txBody>
@@ -5407,19 +5717,19 @@
           <p:cNvPr id="7" name="">
             <a:extLst xmlns:a="http://schemas.openxmlformats.org/drawingml/2006/main">
               <a:ext uri="{FF2B5EF4-FFF2-40B4-BE49-F238E27FC236}">
-                <a16:creationId xmlns:a16="http://schemas.microsoft.com/office/drawing/2014/main" id="{913A65EC-CF94-4DE7-B420-D90CF126DC5B}"/>
-              </a:ext>
-            </a:extLst>
-          </p:cNvPr>
-          <p:cNvSpPr>
-            <a:spLocks xmlns:a="http://schemas.openxmlformats.org/drawingml/2006/main" noGrp="1"/>
-          </p:cNvSpPr>
-          <p:nvPr/>
-        </p:nvSpPr>
-        <p:spPr>
-          <a:xfrm xmlns:a="http://schemas.openxmlformats.org/drawingml/2006/main">
-            <a:off x="7239000" y="3905250"/>
-            <a:ext cx="5524500" cy="361950"/>
+                <a16:creationId xmlns:a16="http://schemas.microsoft.com/office/drawing/2014/main" id="{0C641AFC-2FEB-434F-ADB4-9127D7801978}"/>
+              </a:ext>
+            </a:extLst>
+          </p:cNvPr>
+          <p:cNvSpPr>
+            <a:spLocks xmlns:a="http://schemas.openxmlformats.org/drawingml/2006/main" noGrp="1"/>
+          </p:cNvSpPr>
+          <p:nvPr/>
+        </p:nvSpPr>
+        <p:spPr>
+          <a:xfrm xmlns:a="http://schemas.openxmlformats.org/drawingml/2006/main">
+            <a:off x="3867150" y="4648200"/>
+            <a:ext cx="495300" cy="323850"/>
           </a:xfrm>
           <a:prstGeom xmlns:a="http://schemas.openxmlformats.org/drawingml/2006/main" prst="rect">
             <a:avLst/>
@@ -5435,25 +5745,26 @@
           <a:lstStyle xmlns:a="http://schemas.openxmlformats.org/drawingml/2006/main"/>
           <a:p xmlns:a="http://schemas.openxmlformats.org/drawingml/2006/main">
             <a:pPr>
-              <a:defRPr sz="1650">
-                <a:solidFill>
-                  <a:srgbClr val="373738"/>
-                </a:solidFill>
-                <a:latin typeface="Calibri"/>
-                <a:ea typeface="Calibri"/>
-                <a:cs typeface="Calibri"/>
-              </a:defRPr>
-            </a:pPr>
-            <a:r>
-              <a:rPr sz="1650">
-                <a:solidFill>
-                  <a:srgbClr val="373738"/>
-                </a:solidFill>
-                <a:latin typeface="Calibri"/>
-                <a:ea typeface="Calibri"/>
-                <a:cs typeface="Calibri"/>
-              </a:rPr>
-              <a:t>Data Center · +68% year on year  [F2]</a:t>
+              <a:buNone/>
+              <a:defRPr sz="1350" b="1">
+                <a:solidFill>
+                  <a:srgbClr val="F07D00"/>
+                </a:solidFill>
+                <a:latin typeface="Calibri"/>
+                <a:ea typeface="Calibri"/>
+                <a:cs typeface="Calibri"/>
+              </a:defRPr>
+            </a:pPr>
+            <a:r>
+              <a:rPr sz="1350" b="1">
+                <a:solidFill>
+                  <a:srgbClr val="F07D00"/>
+                </a:solidFill>
+                <a:latin typeface="Calibri"/>
+                <a:ea typeface="Calibri"/>
+                <a:cs typeface="Calibri"/>
+              </a:rPr>
+              <a:t>02</a:t>
             </a:r>
           </a:p>
         </p:txBody>
@@ -5463,19 +5774,19 @@
           <p:cNvPr id="8" name="">
             <a:extLst xmlns:a="http://schemas.openxmlformats.org/drawingml/2006/main">
               <a:ext uri="{FF2B5EF4-FFF2-40B4-BE49-F238E27FC236}">
-                <a16:creationId xmlns:a16="http://schemas.microsoft.com/office/drawing/2014/main" id="{C08E439B-7E83-494E-A3B5-46C4B69928CF}"/>
-              </a:ext>
-            </a:extLst>
-          </p:cNvPr>
-          <p:cNvSpPr>
-            <a:spLocks xmlns:a="http://schemas.openxmlformats.org/drawingml/2006/main" noGrp="1"/>
-          </p:cNvSpPr>
-          <p:nvPr/>
-        </p:nvSpPr>
-        <p:spPr>
-          <a:xfrm xmlns:a="http://schemas.openxmlformats.org/drawingml/2006/main">
-            <a:off x="1066800" y="4953000"/>
-            <a:ext cx="5715000" cy="361950"/>
+                <a16:creationId xmlns:a16="http://schemas.microsoft.com/office/drawing/2014/main" id="{5F0EEE86-8AD2-4FC0-A0CA-3F39924551D1}"/>
+              </a:ext>
+            </a:extLst>
+          </p:cNvPr>
+          <p:cNvSpPr>
+            <a:spLocks xmlns:a="http://schemas.openxmlformats.org/drawingml/2006/main" noGrp="1"/>
+          </p:cNvSpPr>
+          <p:nvPr/>
+        </p:nvSpPr>
+        <p:spPr>
+          <a:xfrm xmlns:a="http://schemas.openxmlformats.org/drawingml/2006/main">
+            <a:off x="3867150" y="5143500"/>
+            <a:ext cx="2266950" cy="438150"/>
           </a:xfrm>
           <a:prstGeom xmlns:a="http://schemas.openxmlformats.org/drawingml/2006/main" prst="rect">
             <a:avLst/>
@@ -5491,7 +5802,8 @@
           <a:lstStyle xmlns:a="http://schemas.openxmlformats.org/drawingml/2006/main"/>
           <a:p xmlns:a="http://schemas.openxmlformats.org/drawingml/2006/main">
             <a:pPr>
-              <a:defRPr sz="1725" b="1">
+              <a:buNone/>
+              <a:defRPr sz="1875" b="1">
                 <a:solidFill>
                   <a:srgbClr val="051C2A"/>
                 </a:solidFill>
@@ -5501,7 +5813,7 @@
               </a:defRPr>
             </a:pPr>
             <a:r>
-              <a:rPr sz="1725" b="1">
+              <a:rPr sz="1875" b="1">
                 <a:solidFill>
                   <a:srgbClr val="051C2A"/>
                 </a:solidFill>
@@ -5509,7 +5821,7 @@
                 <a:ea typeface="Calibri"/>
                 <a:cs typeface="Calibri"/>
               </a:rPr>
-              <a:t>[F3]  Gaming revenue: $16.0bn · +41%</a:t>
+              <a:t>Period</a:t>
             </a:r>
           </a:p>
         </p:txBody>
@@ -5519,19 +5831,19 @@
           <p:cNvPr id="9" name="">
             <a:extLst xmlns:a="http://schemas.openxmlformats.org/drawingml/2006/main">
               <a:ext uri="{FF2B5EF4-FFF2-40B4-BE49-F238E27FC236}">
-                <a16:creationId xmlns:a16="http://schemas.microsoft.com/office/drawing/2014/main" id="{C6B113A5-935F-4D64-84B0-5B781937EF01}"/>
-              </a:ext>
-            </a:extLst>
-          </p:cNvPr>
-          <p:cNvSpPr>
-            <a:spLocks xmlns:a="http://schemas.openxmlformats.org/drawingml/2006/main" noGrp="1"/>
-          </p:cNvSpPr>
-          <p:nvPr/>
-        </p:nvSpPr>
-        <p:spPr>
-          <a:xfrm xmlns:a="http://schemas.openxmlformats.org/drawingml/2006/main">
-            <a:off x="7239000" y="4953000"/>
-            <a:ext cx="6667500" cy="685800"/>
+                <a16:creationId xmlns:a16="http://schemas.microsoft.com/office/drawing/2014/main" id="{42A9F77B-9D95-469A-B256-2B019874F5B4}"/>
+              </a:ext>
+            </a:extLst>
+          </p:cNvPr>
+          <p:cNvSpPr>
+            <a:spLocks xmlns:a="http://schemas.openxmlformats.org/drawingml/2006/main" noGrp="1"/>
+          </p:cNvSpPr>
+          <p:nvPr/>
+        </p:nvSpPr>
+        <p:spPr>
+          <a:xfrm xmlns:a="http://schemas.openxmlformats.org/drawingml/2006/main">
+            <a:off x="6610350" y="4648200"/>
+            <a:ext cx="495300" cy="323850"/>
           </a:xfrm>
           <a:prstGeom xmlns:a="http://schemas.openxmlformats.org/drawingml/2006/main" prst="rect">
             <a:avLst/>
@@ -5547,7 +5859,8 @@
           <a:lstStyle xmlns:a="http://schemas.openxmlformats.org/drawingml/2006/main"/>
           <a:p xmlns:a="http://schemas.openxmlformats.org/drawingml/2006/main">
             <a:pPr>
-              <a:defRPr sz="1725" b="1">
+              <a:buNone/>
+              <a:defRPr sz="1350" b="1">
                 <a:solidFill>
                   <a:srgbClr val="F07D00"/>
                 </a:solidFill>
@@ -5557,7 +5870,7 @@
               </a:defRPr>
             </a:pPr>
             <a:r>
-              <a:rPr sz="1725" b="1">
+              <a:rPr sz="1350" b="1">
                 <a:solidFill>
                   <a:srgbClr val="F07D00"/>
                 </a:solidFill>
@@ -5565,7 +5878,7 @@
                 <a:ea typeface="Calibri"/>
                 <a:cs typeface="Calibri"/>
               </a:rPr>
-              <a:t>[F4]  Gross margin decreased; H20-related charge: $4.5bn</a:t>
+              <a:t>03</a:t>
             </a:r>
           </a:p>
         </p:txBody>
@@ -5575,19 +5888,19 @@
           <p:cNvPr id="10" name="">
             <a:extLst xmlns:a="http://schemas.openxmlformats.org/drawingml/2006/main">
               <a:ext uri="{FF2B5EF4-FFF2-40B4-BE49-F238E27FC236}">
-                <a16:creationId xmlns:a16="http://schemas.microsoft.com/office/drawing/2014/main" id="{C0422730-1A2F-437A-8161-C3EA5A7E3843}"/>
-              </a:ext>
-            </a:extLst>
-          </p:cNvPr>
-          <p:cNvSpPr>
-            <a:spLocks xmlns:a="http://schemas.openxmlformats.org/drawingml/2006/main" noGrp="1"/>
-          </p:cNvSpPr>
-          <p:nvPr/>
-        </p:nvSpPr>
-        <p:spPr>
-          <a:xfrm xmlns:a="http://schemas.openxmlformats.org/drawingml/2006/main">
-            <a:off x="1066800" y="6343650"/>
-            <a:ext cx="11811000" cy="514350"/>
+                <a16:creationId xmlns:a16="http://schemas.microsoft.com/office/drawing/2014/main" id="{6920B1BF-7CCF-4161-9AFF-CC9F8DCA91B3}"/>
+              </a:ext>
+            </a:extLst>
+          </p:cNvPr>
+          <p:cNvSpPr>
+            <a:spLocks xmlns:a="http://schemas.openxmlformats.org/drawingml/2006/main" noGrp="1"/>
+          </p:cNvSpPr>
+          <p:nvPr/>
+        </p:nvSpPr>
+        <p:spPr>
+          <a:xfrm xmlns:a="http://schemas.openxmlformats.org/drawingml/2006/main">
+            <a:off x="6610350" y="5143500"/>
+            <a:ext cx="2266950" cy="438150"/>
           </a:xfrm>
           <a:prstGeom xmlns:a="http://schemas.openxmlformats.org/drawingml/2006/main" prst="rect">
             <a:avLst/>
@@ -5603,7 +5916,8 @@
           <a:lstStyle xmlns:a="http://schemas.openxmlformats.org/drawingml/2006/main"/>
           <a:p xmlns:a="http://schemas.openxmlformats.org/drawingml/2006/main">
             <a:pPr>
-              <a:defRPr sz="2025" b="1">
+              <a:buNone/>
+              <a:defRPr sz="1875" b="1">
                 <a:solidFill>
                   <a:srgbClr val="051C2A"/>
                 </a:solidFill>
@@ -5613,7 +5927,7 @@
               </a:defRPr>
             </a:pPr>
             <a:r>
-              <a:rPr sz="2025" b="1">
+              <a:rPr sz="1875" b="1">
                 <a:solidFill>
                   <a:srgbClr val="051C2A"/>
                 </a:solidFill>
@@ -5621,7 +5935,7 @@
                 <a:ea typeface="Calibri"/>
                 <a:cs typeface="Calibri"/>
               </a:rPr>
-              <a:t>The evidence supports growth and segment-scale observations—not valuation or a price target.</a:t>
+              <a:t>Source</a:t>
             </a:r>
           </a:p>
         </p:txBody>
@@ -5631,7 +5945,292 @@
           <p:cNvPr id="11" name="">
             <a:extLst xmlns:a="http://schemas.openxmlformats.org/drawingml/2006/main">
               <a:ext uri="{FF2B5EF4-FFF2-40B4-BE49-F238E27FC236}">
-                <a16:creationId xmlns:a16="http://schemas.microsoft.com/office/drawing/2014/main" id="{1CA99A9B-F12A-48FE-953D-620804A38EED}"/>
+                <a16:creationId xmlns:a16="http://schemas.microsoft.com/office/drawing/2014/main" id="{8E8CF07A-926D-46C1-84B0-CB0E949F4B99}"/>
+              </a:ext>
+            </a:extLst>
+          </p:cNvPr>
+          <p:cNvSpPr>
+            <a:spLocks xmlns:a="http://schemas.openxmlformats.org/drawingml/2006/main" noGrp="1"/>
+          </p:cNvSpPr>
+          <p:nvPr/>
+        </p:nvSpPr>
+        <p:spPr>
+          <a:xfrm xmlns:a="http://schemas.openxmlformats.org/drawingml/2006/main">
+            <a:off x="9353550" y="4648200"/>
+            <a:ext cx="495300" cy="323850"/>
+          </a:xfrm>
+          <a:prstGeom xmlns:a="http://schemas.openxmlformats.org/drawingml/2006/main" prst="rect">
+            <a:avLst/>
+          </a:prstGeom>
+          <a:noFill xmlns:a="http://schemas.openxmlformats.org/drawingml/2006/main"/>
+          <a:ln xmlns:a="http://schemas.openxmlformats.org/drawingml/2006/main" w="0">
+            <a:noFill/>
+            <a:prstDash val="solid"/>
+          </a:ln>
+        </p:spPr>
+        <p:txBody>
+          <a:bodyPr xmlns:a="http://schemas.openxmlformats.org/drawingml/2006/main" lIns="0" tIns="0" rIns="0" bIns="0" anchor="t"/>
+          <a:lstStyle xmlns:a="http://schemas.openxmlformats.org/drawingml/2006/main"/>
+          <a:p xmlns:a="http://schemas.openxmlformats.org/drawingml/2006/main">
+            <a:pPr>
+              <a:buNone/>
+              <a:defRPr sz="1350" b="1">
+                <a:solidFill>
+                  <a:srgbClr val="F07D00"/>
+                </a:solidFill>
+                <a:latin typeface="Calibri"/>
+                <a:ea typeface="Calibri"/>
+                <a:cs typeface="Calibri"/>
+              </a:defRPr>
+            </a:pPr>
+            <a:r>
+              <a:rPr sz="1350" b="1">
+                <a:solidFill>
+                  <a:srgbClr val="F07D00"/>
+                </a:solidFill>
+                <a:latin typeface="Calibri"/>
+                <a:ea typeface="Calibri"/>
+                <a:cs typeface="Calibri"/>
+              </a:rPr>
+              <a:t>04</a:t>
+            </a:r>
+          </a:p>
+        </p:txBody>
+      </p:sp>
+      <p:sp>
+        <p:nvSpPr>
+          <p:cNvPr id="12" name="">
+            <a:extLst xmlns:a="http://schemas.openxmlformats.org/drawingml/2006/main">
+              <a:ext uri="{FF2B5EF4-FFF2-40B4-BE49-F238E27FC236}">
+                <a16:creationId xmlns:a16="http://schemas.microsoft.com/office/drawing/2014/main" id="{6D8E6400-99FC-4D00-A8CB-D89D7FA7E963}"/>
+              </a:ext>
+            </a:extLst>
+          </p:cNvPr>
+          <p:cNvSpPr>
+            <a:spLocks xmlns:a="http://schemas.openxmlformats.org/drawingml/2006/main" noGrp="1"/>
+          </p:cNvSpPr>
+          <p:nvPr/>
+        </p:nvSpPr>
+        <p:spPr>
+          <a:xfrm xmlns:a="http://schemas.openxmlformats.org/drawingml/2006/main">
+            <a:off x="9353550" y="5143500"/>
+            <a:ext cx="2266950" cy="438150"/>
+          </a:xfrm>
+          <a:prstGeom xmlns:a="http://schemas.openxmlformats.org/drawingml/2006/main" prst="rect">
+            <a:avLst/>
+          </a:prstGeom>
+          <a:noFill xmlns:a="http://schemas.openxmlformats.org/drawingml/2006/main"/>
+          <a:ln xmlns:a="http://schemas.openxmlformats.org/drawingml/2006/main" w="0">
+            <a:noFill/>
+            <a:prstDash val="solid"/>
+          </a:ln>
+        </p:spPr>
+        <p:txBody>
+          <a:bodyPr xmlns:a="http://schemas.openxmlformats.org/drawingml/2006/main" lIns="0" tIns="0" rIns="0" bIns="0" anchor="t"/>
+          <a:lstStyle xmlns:a="http://schemas.openxmlformats.org/drawingml/2006/main"/>
+          <a:p xmlns:a="http://schemas.openxmlformats.org/drawingml/2006/main">
+            <a:pPr>
+              <a:buNone/>
+              <a:defRPr sz="1875" b="1">
+                <a:solidFill>
+                  <a:srgbClr val="051C2A"/>
+                </a:solidFill>
+                <a:latin typeface="Calibri"/>
+                <a:ea typeface="Calibri"/>
+                <a:cs typeface="Calibri"/>
+              </a:defRPr>
+            </a:pPr>
+            <a:r>
+              <a:rPr sz="1875" b="1">
+                <a:solidFill>
+                  <a:srgbClr val="051C2A"/>
+                </a:solidFill>
+                <a:latin typeface="Calibri"/>
+                <a:ea typeface="Calibri"/>
+                <a:cs typeface="Calibri"/>
+              </a:rPr>
+              <a:t>Evidence rule</a:t>
+            </a:r>
+          </a:p>
+        </p:txBody>
+      </p:sp>
+      <p:sp>
+        <p:nvSpPr>
+          <p:cNvPr id="13" name="">
+            <a:extLst xmlns:a="http://schemas.openxmlformats.org/drawingml/2006/main">
+              <a:ext uri="{FF2B5EF4-FFF2-40B4-BE49-F238E27FC236}">
+                <a16:creationId xmlns:a16="http://schemas.microsoft.com/office/drawing/2014/main" id="{BB04CD7E-4803-4104-8338-9D962B7E6766}"/>
+              </a:ext>
+            </a:extLst>
+          </p:cNvPr>
+          <p:cNvSpPr>
+            <a:spLocks xmlns:a="http://schemas.openxmlformats.org/drawingml/2006/main" noGrp="1"/>
+          </p:cNvSpPr>
+          <p:nvPr/>
+        </p:nvSpPr>
+        <p:spPr>
+          <a:xfrm xmlns:a="http://schemas.openxmlformats.org/drawingml/2006/main">
+            <a:off x="12096750" y="4648200"/>
+            <a:ext cx="495300" cy="323850"/>
+          </a:xfrm>
+          <a:prstGeom xmlns:a="http://schemas.openxmlformats.org/drawingml/2006/main" prst="rect">
+            <a:avLst/>
+          </a:prstGeom>
+          <a:noFill xmlns:a="http://schemas.openxmlformats.org/drawingml/2006/main"/>
+          <a:ln xmlns:a="http://schemas.openxmlformats.org/drawingml/2006/main" w="0">
+            <a:noFill/>
+            <a:prstDash val="solid"/>
+          </a:ln>
+        </p:spPr>
+        <p:txBody>
+          <a:bodyPr xmlns:a="http://schemas.openxmlformats.org/drawingml/2006/main" lIns="0" tIns="0" rIns="0" bIns="0" anchor="t"/>
+          <a:lstStyle xmlns:a="http://schemas.openxmlformats.org/drawingml/2006/main"/>
+          <a:p xmlns:a="http://schemas.openxmlformats.org/drawingml/2006/main">
+            <a:pPr>
+              <a:buNone/>
+              <a:defRPr sz="1350" b="1">
+                <a:solidFill>
+                  <a:srgbClr val="F07D00"/>
+                </a:solidFill>
+                <a:latin typeface="Calibri"/>
+                <a:ea typeface="Calibri"/>
+                <a:cs typeface="Calibri"/>
+              </a:defRPr>
+            </a:pPr>
+            <a:r>
+              <a:rPr sz="1350" b="1">
+                <a:solidFill>
+                  <a:srgbClr val="F07D00"/>
+                </a:solidFill>
+                <a:latin typeface="Calibri"/>
+                <a:ea typeface="Calibri"/>
+                <a:cs typeface="Calibri"/>
+              </a:rPr>
+              <a:t>05</a:t>
+            </a:r>
+          </a:p>
+        </p:txBody>
+      </p:sp>
+      <p:sp>
+        <p:nvSpPr>
+          <p:cNvPr id="14" name="">
+            <a:extLst xmlns:a="http://schemas.openxmlformats.org/drawingml/2006/main">
+              <a:ext uri="{FF2B5EF4-FFF2-40B4-BE49-F238E27FC236}">
+                <a16:creationId xmlns:a16="http://schemas.microsoft.com/office/drawing/2014/main" id="{65270AE8-D659-434A-B5EA-AB73577F8DC8}"/>
+              </a:ext>
+            </a:extLst>
+          </p:cNvPr>
+          <p:cNvSpPr>
+            <a:spLocks xmlns:a="http://schemas.openxmlformats.org/drawingml/2006/main" noGrp="1"/>
+          </p:cNvSpPr>
+          <p:nvPr/>
+        </p:nvSpPr>
+        <p:spPr>
+          <a:xfrm xmlns:a="http://schemas.openxmlformats.org/drawingml/2006/main">
+            <a:off x="12096750" y="5143500"/>
+            <a:ext cx="2266950" cy="438150"/>
+          </a:xfrm>
+          <a:prstGeom xmlns:a="http://schemas.openxmlformats.org/drawingml/2006/main" prst="rect">
+            <a:avLst/>
+          </a:prstGeom>
+          <a:noFill xmlns:a="http://schemas.openxmlformats.org/drawingml/2006/main"/>
+          <a:ln xmlns:a="http://schemas.openxmlformats.org/drawingml/2006/main" w="0">
+            <a:noFill/>
+            <a:prstDash val="solid"/>
+          </a:ln>
+        </p:spPr>
+        <p:txBody>
+          <a:bodyPr xmlns:a="http://schemas.openxmlformats.org/drawingml/2006/main" lIns="0" tIns="0" rIns="0" bIns="0" anchor="t"/>
+          <a:lstStyle xmlns:a="http://schemas.openxmlformats.org/drawingml/2006/main"/>
+          <a:p xmlns:a="http://schemas.openxmlformats.org/drawingml/2006/main">
+            <a:pPr>
+              <a:buNone/>
+              <a:defRPr sz="1875" b="1">
+                <a:solidFill>
+                  <a:srgbClr val="051C2A"/>
+                </a:solidFill>
+                <a:latin typeface="Calibri"/>
+                <a:ea typeface="Calibri"/>
+                <a:cs typeface="Calibri"/>
+              </a:defRPr>
+            </a:pPr>
+            <a:r>
+              <a:rPr sz="1875" b="1">
+                <a:solidFill>
+                  <a:srgbClr val="051C2A"/>
+                </a:solidFill>
+                <a:latin typeface="Calibri"/>
+                <a:ea typeface="Calibri"/>
+                <a:cs typeface="Calibri"/>
+              </a:rPr>
+              <a:t>Output contract</a:t>
+            </a:r>
+          </a:p>
+        </p:txBody>
+      </p:sp>
+      <p:sp>
+        <p:nvSpPr>
+          <p:cNvPr id="15" name="">
+            <a:extLst xmlns:a="http://schemas.openxmlformats.org/drawingml/2006/main">
+              <a:ext uri="{FF2B5EF4-FFF2-40B4-BE49-F238E27FC236}">
+                <a16:creationId xmlns:a16="http://schemas.microsoft.com/office/drawing/2014/main" id="{32780C9E-1A2E-4219-955F-7ED3FB5CD9E3}"/>
+              </a:ext>
+            </a:extLst>
+          </p:cNvPr>
+          <p:cNvSpPr>
+            <a:spLocks xmlns:a="http://schemas.openxmlformats.org/drawingml/2006/main" noGrp="1"/>
+          </p:cNvSpPr>
+          <p:nvPr/>
+        </p:nvSpPr>
+        <p:spPr>
+          <a:xfrm xmlns:a="http://schemas.openxmlformats.org/drawingml/2006/main">
+            <a:off x="2857500" y="6496050"/>
+            <a:ext cx="9525000" cy="400050"/>
+          </a:xfrm>
+          <a:prstGeom xmlns:a="http://schemas.openxmlformats.org/drawingml/2006/main" prst="rect">
+            <a:avLst/>
+          </a:prstGeom>
+          <a:noFill xmlns:a="http://schemas.openxmlformats.org/drawingml/2006/main"/>
+          <a:ln xmlns:a="http://schemas.openxmlformats.org/drawingml/2006/main" w="0">
+            <a:noFill/>
+            <a:prstDash val="solid"/>
+          </a:ln>
+        </p:spPr>
+        <p:txBody>
+          <a:bodyPr xmlns:a="http://schemas.openxmlformats.org/drawingml/2006/main" lIns="0" tIns="0" rIns="0" bIns="0" anchor="t"/>
+          <a:lstStyle xmlns:a="http://schemas.openxmlformats.org/drawingml/2006/main"/>
+          <a:p xmlns:a="http://schemas.openxmlformats.org/drawingml/2006/main">
+            <a:pPr algn="ctr">
+              <a:buNone/>
+              <a:defRPr sz="1950" b="1">
+                <a:solidFill>
+                  <a:srgbClr val="051C2A"/>
+                </a:solidFill>
+                <a:latin typeface="Calibri"/>
+                <a:ea typeface="Calibri"/>
+                <a:cs typeface="Calibri"/>
+              </a:defRPr>
+            </a:pPr>
+            <a:r>
+              <a:rPr sz="1950" b="1">
+                <a:solidFill>
+                  <a:srgbClr val="051C2A"/>
+                </a:solidFill>
+                <a:latin typeface="Calibri"/>
+                <a:ea typeface="Calibri"/>
+                <a:cs typeface="Calibri"/>
+              </a:rPr>
+              <a:t>A larger model cannot recover a missing application contract reliably.</a:t>
+            </a:r>
+          </a:p>
+        </p:txBody>
+      </p:sp>
+      <p:sp>
+        <p:nvSpPr>
+          <p:cNvPr id="16" name="">
+            <a:extLst xmlns:a="http://schemas.openxmlformats.org/drawingml/2006/main">
+              <a:ext uri="{FF2B5EF4-FFF2-40B4-BE49-F238E27FC236}">
+                <a16:creationId xmlns:a16="http://schemas.microsoft.com/office/drawing/2014/main" id="{86DF59FE-4FEE-42DE-92D0-4AA138236B06}"/>
               </a:ext>
             </a:extLst>
           </p:cNvPr>
@@ -5661,10 +6260,10 @@
       </p:sp>
       <p:sp>
         <p:nvSpPr>
-          <p:cNvPr id="12" name="">
-            <a:extLst xmlns:a="http://schemas.openxmlformats.org/drawingml/2006/main">
-              <a:ext uri="{FF2B5EF4-FFF2-40B4-BE49-F238E27FC236}">
-                <a16:creationId xmlns:a16="http://schemas.microsoft.com/office/drawing/2014/main" id="{3D4C9EE8-1362-49E4-BFD2-8CCFD9A293C5}"/>
+          <p:cNvPr id="17" name="">
+            <a:extLst xmlns:a="http://schemas.openxmlformats.org/drawingml/2006/main">
+              <a:ext uri="{FF2B5EF4-FFF2-40B4-BE49-F238E27FC236}">
+                <a16:creationId xmlns:a16="http://schemas.microsoft.com/office/drawing/2014/main" id="{CCD1BFF5-CF10-414F-A9A1-5F4FE7F25AE3}"/>
               </a:ext>
             </a:extLst>
           </p:cNvPr>
@@ -5694,10 +6293,10 @@
       </p:sp>
       <p:sp>
         <p:nvSpPr>
-          <p:cNvPr id="13" name="">
-            <a:extLst xmlns:a="http://schemas.openxmlformats.org/drawingml/2006/main">
-              <a:ext uri="{FF2B5EF4-FFF2-40B4-BE49-F238E27FC236}">
-                <a16:creationId xmlns:a16="http://schemas.microsoft.com/office/drawing/2014/main" id="{24206614-6877-4386-9D02-F474A613C115}"/>
+          <p:cNvPr id="18" name="">
+            <a:extLst xmlns:a="http://schemas.openxmlformats.org/drawingml/2006/main">
+              <a:ext uri="{FF2B5EF4-FFF2-40B4-BE49-F238E27FC236}">
+                <a16:creationId xmlns:a16="http://schemas.microsoft.com/office/drawing/2014/main" id="{79A777C2-72B8-4165-974F-061823F0161A}"/>
               </a:ext>
             </a:extLst>
           </p:cNvPr>
@@ -5725,6 +6324,7 @@
           <a:lstStyle xmlns:a="http://schemas.openxmlformats.org/drawingml/2006/main"/>
           <a:p xmlns:a="http://schemas.openxmlformats.org/drawingml/2006/main">
             <a:pPr>
+              <a:buNone/>
               <a:defRPr sz="1275">
                 <a:solidFill>
                   <a:srgbClr val="9E9FA2"/>
@@ -5750,10 +6350,10 @@
       </p:sp>
       <p:sp>
         <p:nvSpPr>
-          <p:cNvPr id="14" name="">
-            <a:extLst xmlns:a="http://schemas.openxmlformats.org/drawingml/2006/main">
-              <a:ext uri="{FF2B5EF4-FFF2-40B4-BE49-F238E27FC236}">
-                <a16:creationId xmlns:a16="http://schemas.microsoft.com/office/drawing/2014/main" id="{7B1FCDDD-754E-4B46-A9F3-09ADE649CF72}"/>
+          <p:cNvPr id="19" name="">
+            <a:extLst xmlns:a="http://schemas.openxmlformats.org/drawingml/2006/main">
+              <a:ext uri="{FF2B5EF4-FFF2-40B4-BE49-F238E27FC236}">
+                <a16:creationId xmlns:a16="http://schemas.microsoft.com/office/drawing/2014/main" id="{656DE7B0-9049-4B6C-8B3A-B01028AA58B8}"/>
               </a:ext>
             </a:extLst>
           </p:cNvPr>
@@ -5781,6 +6381,7 @@
           <a:lstStyle xmlns:a="http://schemas.openxmlformats.org/drawingml/2006/main"/>
           <a:p xmlns:a="http://schemas.openxmlformats.org/drawingml/2006/main">
             <a:pPr algn="r">
+              <a:buNone/>
               <a:defRPr sz="1200" b="1">
                 <a:solidFill>
                   <a:srgbClr val="9E9FA2"/>
@@ -5799,17 +6400,17 @@
                 <a:ea typeface="Calibri"/>
                 <a:cs typeface="Calibri"/>
               </a:rPr>
-              <a:t>EVIDENCE</a:t>
-            </a:r>
-          </a:p>
-        </p:txBody>
-      </p:sp>
-      <p:sp>
-        <p:nvSpPr>
-          <p:cNvPr id="15" name="">
-            <a:extLst xmlns:a="http://schemas.openxmlformats.org/drawingml/2006/main">
-              <a:ext uri="{FF2B5EF4-FFF2-40B4-BE49-F238E27FC236}">
-                <a16:creationId xmlns:a16="http://schemas.microsoft.com/office/drawing/2014/main" id="{62F3E1F1-C1E6-4C5D-B5BB-8ED1767C9D2F}"/>
+              <a:t>FAILURE</a:t>
+            </a:r>
+          </a:p>
+        </p:txBody>
+      </p:sp>
+      <p:sp>
+        <p:nvSpPr>
+          <p:cNvPr id="20" name="">
+            <a:extLst xmlns:a="http://schemas.openxmlformats.org/drawingml/2006/main">
+              <a:ext uri="{FF2B5EF4-FFF2-40B4-BE49-F238E27FC236}">
+                <a16:creationId xmlns:a16="http://schemas.microsoft.com/office/drawing/2014/main" id="{B0657728-BC95-4348-AF6C-34919712C05C}"/>
               </a:ext>
             </a:extLst>
           </p:cNvPr>
@@ -5837,6 +6438,7 @@
           <a:lstStyle xmlns:a="http://schemas.openxmlformats.org/drawingml/2006/main"/>
           <a:p xmlns:a="http://schemas.openxmlformats.org/drawingml/2006/main">
             <a:pPr algn="r">
+              <a:buNone/>
               <a:defRPr sz="1200" b="1">
                 <a:solidFill>
                   <a:srgbClr val="9E9FA2"/>
@@ -5863,7 +6465,7 @@
     </p:spTree>
     <p:extLst>
       <p:ext uri="{BB962C8B-B14F-4D97-AF65-F5344CB8AC3E}">
-        <p14:creationId xmlns:p14="http://schemas.microsoft.com/office/powerpoint/2010/main" val="1878034231"/>
+        <p14:creationId xmlns:p14="http://schemas.microsoft.com/office/powerpoint/2010/main" val="1510656681"/>
       </p:ext>
     </p:extLst>
   </p:cSld>
@@ -5891,10 +6493,10 @@
       </p:grpSpPr>
       <p:sp>
         <p:nvSpPr>
-          <p:cNvPr id="29" name="">
-            <a:extLst xmlns:a="http://schemas.openxmlformats.org/drawingml/2006/main">
-              <a:ext uri="{FF2B5EF4-FFF2-40B4-BE49-F238E27FC236}">
-                <a16:creationId xmlns:a16="http://schemas.microsoft.com/office/drawing/2014/main" id="{47C48A24-E18F-4399-84FF-49EC1D75EC4A}"/>
+          <p:cNvPr id="16" name="">
+            <a:extLst xmlns:a="http://schemas.openxmlformats.org/drawingml/2006/main">
+              <a:ext uri="{FF2B5EF4-FFF2-40B4-BE49-F238E27FC236}">
+                <a16:creationId xmlns:a16="http://schemas.microsoft.com/office/drawing/2014/main" id="{2FEB10B4-0FED-42C3-8AA0-5BAB4CEF90E7}"/>
               </a:ext>
             </a:extLst>
           </p:cNvPr>
@@ -5922,6 +6524,7 @@
           <a:lstStyle xmlns:a="http://schemas.openxmlformats.org/drawingml/2006/main"/>
           <a:p xmlns:a="http://schemas.openxmlformats.org/drawingml/2006/main">
             <a:pPr>
+              <a:buNone/>
               <a:defRPr sz="1350" b="1">
                 <a:solidFill>
                   <a:srgbClr val="1F40CB"/>
@@ -5940,7 +6543,7 @@
                 <a:ea typeface="Calibri"/>
                 <a:cs typeface="Calibri"/>
               </a:rPr>
-              <a:t>VERIFICATION CONTRACT</a:t>
+              <a:t>NVIDIA FISCAL 2026</a:t>
             </a:r>
           </a:p>
         </p:txBody>
@@ -5950,7 +6553,7 @@
           <p:cNvPr id="2" name="">
             <a:extLst xmlns:a="http://schemas.openxmlformats.org/drawingml/2006/main">
               <a:ext uri="{FF2B5EF4-FFF2-40B4-BE49-F238E27FC236}">
-                <a16:creationId xmlns:a16="http://schemas.microsoft.com/office/drawing/2014/main" id="{7574DED0-BD05-4639-BE3C-BD8A49B9E36F}"/>
+                <a16:creationId xmlns:a16="http://schemas.microsoft.com/office/drawing/2014/main" id="{865BB064-4AE8-44EA-963D-8F76C6A28D53}"/>
               </a:ext>
             </a:extLst>
           </p:cNvPr>
@@ -5978,6 +6581,7 @@
           <a:lstStyle xmlns:a="http://schemas.openxmlformats.org/drawingml/2006/main"/>
           <a:p xmlns:a="http://schemas.openxmlformats.org/drawingml/2006/main">
             <a:pPr>
+              <a:buNone/>
               <a:defRPr sz="3600" b="1">
                 <a:solidFill>
                   <a:srgbClr val="051C2A"/>
@@ -5996,7 +6600,7 @@
                 <a:ea typeface="Calibri"/>
                 <a:cs typeface="Calibri"/>
               </a:rPr>
-              <a:t>A 4/4 check separates execution from basic grounding</a:t>
+              <a:t>Real evidence makes the question answerable</a:t>
             </a:r>
           </a:p>
         </p:txBody>
@@ -6006,19 +6610,19 @@
           <p:cNvPr id="3" name="">
             <a:extLst xmlns:a="http://schemas.openxmlformats.org/drawingml/2006/main">
               <a:ext uri="{FF2B5EF4-FFF2-40B4-BE49-F238E27FC236}">
-                <a16:creationId xmlns:a16="http://schemas.microsoft.com/office/drawing/2014/main" id="{B710C483-A890-47EA-A072-5D9086A148F5}"/>
-              </a:ext>
-            </a:extLst>
-          </p:cNvPr>
-          <p:cNvSpPr>
-            <a:spLocks xmlns:a="http://schemas.openxmlformats.org/drawingml/2006/main" noGrp="1"/>
-          </p:cNvSpPr>
-          <p:nvPr/>
-        </p:nvSpPr>
-        <p:spPr>
-          <a:xfrm xmlns:a="http://schemas.openxmlformats.org/drawingml/2006/main">
-            <a:off x="1162050" y="2857500"/>
-            <a:ext cx="571500" cy="361950"/>
+                <a16:creationId xmlns:a16="http://schemas.microsoft.com/office/drawing/2014/main" id="{51CA505F-3B0C-49A0-98CF-6D6175D62EAB}"/>
+              </a:ext>
+            </a:extLst>
+          </p:cNvPr>
+          <p:cNvSpPr>
+            <a:spLocks xmlns:a="http://schemas.openxmlformats.org/drawingml/2006/main" noGrp="1"/>
+          </p:cNvSpPr>
+          <p:nvPr/>
+        </p:nvSpPr>
+        <p:spPr>
+          <a:xfrm xmlns:a="http://schemas.openxmlformats.org/drawingml/2006/main">
+            <a:off x="1066800" y="2857500"/>
+            <a:ext cx="4381500" cy="857250"/>
           </a:xfrm>
           <a:prstGeom xmlns:a="http://schemas.openxmlformats.org/drawingml/2006/main" prst="rect">
             <a:avLst/>
@@ -6034,25 +6638,26 @@
           <a:lstStyle xmlns:a="http://schemas.openxmlformats.org/drawingml/2006/main"/>
           <a:p xmlns:a="http://schemas.openxmlformats.org/drawingml/2006/main">
             <a:pPr>
-              <a:defRPr sz="1425" b="1">
-                <a:solidFill>
-                  <a:srgbClr val="00A2EB"/>
-                </a:solidFill>
-                <a:latin typeface="Calibri"/>
-                <a:ea typeface="Calibri"/>
-                <a:cs typeface="Calibri"/>
-              </a:defRPr>
-            </a:pPr>
-            <a:r>
-              <a:rPr sz="1425" b="1">
-                <a:solidFill>
-                  <a:srgbClr val="00A2EB"/>
-                </a:solidFill>
-                <a:latin typeface="Calibri"/>
-                <a:ea typeface="Calibri"/>
-                <a:cs typeface="Calibri"/>
-              </a:rPr>
-              <a:t>01</a:t>
+              <a:buNone/>
+              <a:defRPr sz="4350" b="1">
+                <a:solidFill>
+                  <a:srgbClr val="051C2A"/>
+                </a:solidFill>
+                <a:latin typeface="Calibri"/>
+                <a:ea typeface="Calibri"/>
+                <a:cs typeface="Calibri"/>
+              </a:defRPr>
+            </a:pPr>
+            <a:r>
+              <a:rPr sz="4350" b="1">
+                <a:solidFill>
+                  <a:srgbClr val="051C2A"/>
+                </a:solidFill>
+                <a:latin typeface="Calibri"/>
+                <a:ea typeface="Calibri"/>
+                <a:cs typeface="Calibri"/>
+              </a:rPr>
+              <a:t>$215.9bn</a:t>
             </a:r>
           </a:p>
         </p:txBody>
@@ -6062,19 +6667,19 @@
           <p:cNvPr id="4" name="">
             <a:extLst xmlns:a="http://schemas.openxmlformats.org/drawingml/2006/main">
               <a:ext uri="{FF2B5EF4-FFF2-40B4-BE49-F238E27FC236}">
-                <a16:creationId xmlns:a16="http://schemas.microsoft.com/office/drawing/2014/main" id="{8A4E515B-5F3B-40A3-8912-9F85F0FE7567}"/>
-              </a:ext>
-            </a:extLst>
-          </p:cNvPr>
-          <p:cNvSpPr>
-            <a:spLocks xmlns:a="http://schemas.openxmlformats.org/drawingml/2006/main" noGrp="1"/>
-          </p:cNvSpPr>
-          <p:nvPr/>
-        </p:nvSpPr>
-        <p:spPr>
-          <a:xfrm xmlns:a="http://schemas.openxmlformats.org/drawingml/2006/main">
-            <a:off x="2143125" y="2819400"/>
-            <a:ext cx="5905500" cy="457200"/>
+                <a16:creationId xmlns:a16="http://schemas.microsoft.com/office/drawing/2014/main" id="{7AD41D26-D959-489A-A086-84E330386F5D}"/>
+              </a:ext>
+            </a:extLst>
+          </p:cNvPr>
+          <p:cNvSpPr>
+            <a:spLocks xmlns:a="http://schemas.openxmlformats.org/drawingml/2006/main" noGrp="1"/>
+          </p:cNvSpPr>
+          <p:nvPr/>
+        </p:nvSpPr>
+        <p:spPr>
+          <a:xfrm xmlns:a="http://schemas.openxmlformats.org/drawingml/2006/main">
+            <a:off x="1066800" y="3905250"/>
+            <a:ext cx="4953000" cy="361950"/>
           </a:xfrm>
           <a:prstGeom xmlns:a="http://schemas.openxmlformats.org/drawingml/2006/main" prst="rect">
             <a:avLst/>
@@ -6090,25 +6695,26 @@
           <a:lstStyle xmlns:a="http://schemas.openxmlformats.org/drawingml/2006/main"/>
           <a:p xmlns:a="http://schemas.openxmlformats.org/drawingml/2006/main">
             <a:pPr>
-              <a:defRPr sz="2100" b="1">
-                <a:solidFill>
-                  <a:srgbClr val="051C2A"/>
-                </a:solidFill>
-                <a:latin typeface="Calibri"/>
-                <a:ea typeface="Calibri"/>
-                <a:cs typeface="Calibri"/>
-              </a:defRPr>
-            </a:pPr>
-            <a:r>
-              <a:rPr sz="2100" b="1">
-                <a:solidFill>
-                  <a:srgbClr val="051C2A"/>
-                </a:solidFill>
-                <a:latin typeface="Calibri"/>
-                <a:ea typeface="Calibri"/>
-                <a:cs typeface="Calibri"/>
-              </a:rPr>
-              <a:t>Company and reporting period</a:t>
+              <a:buNone/>
+              <a:defRPr sz="1650">
+                <a:solidFill>
+                  <a:srgbClr val="373738"/>
+                </a:solidFill>
+                <a:latin typeface="Calibri"/>
+                <a:ea typeface="Calibri"/>
+                <a:cs typeface="Calibri"/>
+              </a:defRPr>
+            </a:pPr>
+            <a:r>
+              <a:rPr sz="1650">
+                <a:solidFill>
+                  <a:srgbClr val="373738"/>
+                </a:solidFill>
+                <a:latin typeface="Calibri"/>
+                <a:ea typeface="Calibri"/>
+                <a:cs typeface="Calibri"/>
+              </a:rPr>
+              <a:t>Revenue · +65% year on year  [F1]</a:t>
             </a:r>
           </a:p>
         </p:txBody>
@@ -6118,75 +6724,19 @@
           <p:cNvPr id="5" name="">
             <a:extLst xmlns:a="http://schemas.openxmlformats.org/drawingml/2006/main">
               <a:ext uri="{FF2B5EF4-FFF2-40B4-BE49-F238E27FC236}">
-                <a16:creationId xmlns:a16="http://schemas.microsoft.com/office/drawing/2014/main" id="{A2CF432C-0929-4FB7-9EB4-33A2C51C41DC}"/>
-              </a:ext>
-            </a:extLst>
-          </p:cNvPr>
-          <p:cNvSpPr>
-            <a:spLocks xmlns:a="http://schemas.openxmlformats.org/drawingml/2006/main" noGrp="1"/>
-          </p:cNvSpPr>
-          <p:nvPr/>
-        </p:nvSpPr>
-        <p:spPr>
-          <a:xfrm xmlns:a="http://schemas.openxmlformats.org/drawingml/2006/main">
-            <a:off x="8572500" y="2857500"/>
-            <a:ext cx="1047750" cy="323850"/>
-          </a:xfrm>
-          <a:prstGeom xmlns:a="http://schemas.openxmlformats.org/drawingml/2006/main" prst="rect">
-            <a:avLst/>
-          </a:prstGeom>
-          <a:noFill xmlns:a="http://schemas.openxmlformats.org/drawingml/2006/main"/>
-          <a:ln xmlns:a="http://schemas.openxmlformats.org/drawingml/2006/main" w="0">
-            <a:noFill/>
-            <a:prstDash val="solid"/>
-          </a:ln>
-        </p:spPr>
-        <p:txBody>
-          <a:bodyPr xmlns:a="http://schemas.openxmlformats.org/drawingml/2006/main" lIns="0" tIns="0" rIns="0" bIns="0" anchor="t"/>
-          <a:lstStyle xmlns:a="http://schemas.openxmlformats.org/drawingml/2006/main"/>
-          <a:p xmlns:a="http://schemas.openxmlformats.org/drawingml/2006/main">
-            <a:pPr>
-              <a:defRPr sz="1350" b="1">
-                <a:solidFill>
-                  <a:srgbClr val="1F40CB"/>
-                </a:solidFill>
-                <a:latin typeface="Calibri"/>
-                <a:ea typeface="Calibri"/>
-                <a:cs typeface="Calibri"/>
-              </a:defRPr>
-            </a:pPr>
-            <a:r>
-              <a:rPr sz="1350" b="1">
-                <a:solidFill>
-                  <a:srgbClr val="1F40CB"/>
-                </a:solidFill>
-                <a:latin typeface="Calibri"/>
-                <a:ea typeface="Calibri"/>
-                <a:cs typeface="Calibri"/>
-              </a:rPr>
-              <a:t>PASS</a:t>
-            </a:r>
-          </a:p>
-        </p:txBody>
-      </p:sp>
-      <p:sp>
-        <p:nvSpPr>
-          <p:cNvPr id="6" name="">
-            <a:extLst xmlns:a="http://schemas.openxmlformats.org/drawingml/2006/main">
-              <a:ext uri="{FF2B5EF4-FFF2-40B4-BE49-F238E27FC236}">
-                <a16:creationId xmlns:a16="http://schemas.microsoft.com/office/drawing/2014/main" id="{179A1F7B-8EE0-471C-AA17-75A56716B8A1}"/>
-              </a:ext>
-            </a:extLst>
-          </p:cNvPr>
-          <p:cNvSpPr>
-            <a:spLocks xmlns:a="http://schemas.openxmlformats.org/drawingml/2006/main" noGrp="1"/>
-          </p:cNvSpPr>
-          <p:nvPr/>
-        </p:nvSpPr>
-        <p:spPr>
-          <a:xfrm xmlns:a="http://schemas.openxmlformats.org/drawingml/2006/main">
-            <a:off x="2143125" y="3409950"/>
-            <a:ext cx="7524750" cy="19050"/>
+                <a16:creationId xmlns:a16="http://schemas.microsoft.com/office/drawing/2014/main" id="{5B522A8F-16AD-44AB-BA1E-BB7C095B3A39}"/>
+              </a:ext>
+            </a:extLst>
+          </p:cNvPr>
+          <p:cNvSpPr>
+            <a:spLocks xmlns:a="http://schemas.openxmlformats.org/drawingml/2006/main" noGrp="1"/>
+          </p:cNvSpPr>
+          <p:nvPr/>
+        </p:nvSpPr>
+        <p:spPr>
+          <a:xfrm xmlns:a="http://schemas.openxmlformats.org/drawingml/2006/main">
+            <a:off x="6477000" y="2724150"/>
+            <a:ext cx="19050" cy="3143250"/>
           </a:xfrm>
           <a:prstGeom xmlns:a="http://schemas.openxmlformats.org/drawingml/2006/main" prst="rect">
             <a:avLst/>
@@ -6204,22 +6754,79 @@
       </p:sp>
       <p:sp>
         <p:nvSpPr>
+          <p:cNvPr id="6" name="">
+            <a:extLst xmlns:a="http://schemas.openxmlformats.org/drawingml/2006/main">
+              <a:ext uri="{FF2B5EF4-FFF2-40B4-BE49-F238E27FC236}">
+                <a16:creationId xmlns:a16="http://schemas.microsoft.com/office/drawing/2014/main" id="{3E7C6626-7591-4116-BDA4-36A1BF728E57}"/>
+              </a:ext>
+            </a:extLst>
+          </p:cNvPr>
+          <p:cNvSpPr>
+            <a:spLocks xmlns:a="http://schemas.openxmlformats.org/drawingml/2006/main" noGrp="1"/>
+          </p:cNvSpPr>
+          <p:nvPr/>
+        </p:nvSpPr>
+        <p:spPr>
+          <a:xfrm xmlns:a="http://schemas.openxmlformats.org/drawingml/2006/main">
+            <a:off x="7239000" y="2857500"/>
+            <a:ext cx="4953000" cy="857250"/>
+          </a:xfrm>
+          <a:prstGeom xmlns:a="http://schemas.openxmlformats.org/drawingml/2006/main" prst="rect">
+            <a:avLst/>
+          </a:prstGeom>
+          <a:noFill xmlns:a="http://schemas.openxmlformats.org/drawingml/2006/main"/>
+          <a:ln xmlns:a="http://schemas.openxmlformats.org/drawingml/2006/main" w="0">
+            <a:noFill/>
+            <a:prstDash val="solid"/>
+          </a:ln>
+        </p:spPr>
+        <p:txBody>
+          <a:bodyPr xmlns:a="http://schemas.openxmlformats.org/drawingml/2006/main" lIns="0" tIns="0" rIns="0" bIns="0" anchor="t"/>
+          <a:lstStyle xmlns:a="http://schemas.openxmlformats.org/drawingml/2006/main"/>
+          <a:p xmlns:a="http://schemas.openxmlformats.org/drawingml/2006/main">
+            <a:pPr>
+              <a:buNone/>
+              <a:defRPr sz="4350" b="1">
+                <a:solidFill>
+                  <a:srgbClr val="1F40CB"/>
+                </a:solidFill>
+                <a:latin typeface="Calibri"/>
+                <a:ea typeface="Calibri"/>
+                <a:cs typeface="Calibri"/>
+              </a:defRPr>
+            </a:pPr>
+            <a:r>
+              <a:rPr sz="4350" b="1">
+                <a:solidFill>
+                  <a:srgbClr val="1F40CB"/>
+                </a:solidFill>
+                <a:latin typeface="Calibri"/>
+                <a:ea typeface="Calibri"/>
+                <a:cs typeface="Calibri"/>
+              </a:rPr>
+              <a:t>$193.7bn</a:t>
+            </a:r>
+          </a:p>
+        </p:txBody>
+      </p:sp>
+      <p:sp>
+        <p:nvSpPr>
           <p:cNvPr id="7" name="">
             <a:extLst xmlns:a="http://schemas.openxmlformats.org/drawingml/2006/main">
               <a:ext uri="{FF2B5EF4-FFF2-40B4-BE49-F238E27FC236}">
-                <a16:creationId xmlns:a16="http://schemas.microsoft.com/office/drawing/2014/main" id="{C5F63C6A-1C80-47E2-9174-F44504BE7A86}"/>
-              </a:ext>
-            </a:extLst>
-          </p:cNvPr>
-          <p:cNvSpPr>
-            <a:spLocks xmlns:a="http://schemas.openxmlformats.org/drawingml/2006/main" noGrp="1"/>
-          </p:cNvSpPr>
-          <p:nvPr/>
-        </p:nvSpPr>
-        <p:spPr>
-          <a:xfrm xmlns:a="http://schemas.openxmlformats.org/drawingml/2006/main">
-            <a:off x="1162050" y="3695700"/>
-            <a:ext cx="571500" cy="361950"/>
+                <a16:creationId xmlns:a16="http://schemas.microsoft.com/office/drawing/2014/main" id="{913A65EC-CF94-4DE7-B420-D90CF126DC5B}"/>
+              </a:ext>
+            </a:extLst>
+          </p:cNvPr>
+          <p:cNvSpPr>
+            <a:spLocks xmlns:a="http://schemas.openxmlformats.org/drawingml/2006/main" noGrp="1"/>
+          </p:cNvSpPr>
+          <p:nvPr/>
+        </p:nvSpPr>
+        <p:spPr>
+          <a:xfrm xmlns:a="http://schemas.openxmlformats.org/drawingml/2006/main">
+            <a:off x="7239000" y="3905250"/>
+            <a:ext cx="5524500" cy="361950"/>
           </a:xfrm>
           <a:prstGeom xmlns:a="http://schemas.openxmlformats.org/drawingml/2006/main" prst="rect">
             <a:avLst/>
@@ -6235,25 +6842,26 @@
           <a:lstStyle xmlns:a="http://schemas.openxmlformats.org/drawingml/2006/main"/>
           <a:p xmlns:a="http://schemas.openxmlformats.org/drawingml/2006/main">
             <a:pPr>
-              <a:defRPr sz="1425" b="1">
-                <a:solidFill>
-                  <a:srgbClr val="00A2EB"/>
-                </a:solidFill>
-                <a:latin typeface="Calibri"/>
-                <a:ea typeface="Calibri"/>
-                <a:cs typeface="Calibri"/>
-              </a:defRPr>
-            </a:pPr>
-            <a:r>
-              <a:rPr sz="1425" b="1">
-                <a:solidFill>
-                  <a:srgbClr val="00A2EB"/>
-                </a:solidFill>
-                <a:latin typeface="Calibri"/>
-                <a:ea typeface="Calibri"/>
-                <a:cs typeface="Calibri"/>
-              </a:rPr>
-              <a:t>02</a:t>
+              <a:buNone/>
+              <a:defRPr sz="1650">
+                <a:solidFill>
+                  <a:srgbClr val="373738"/>
+                </a:solidFill>
+                <a:latin typeface="Calibri"/>
+                <a:ea typeface="Calibri"/>
+                <a:cs typeface="Calibri"/>
+              </a:defRPr>
+            </a:pPr>
+            <a:r>
+              <a:rPr sz="1650">
+                <a:solidFill>
+                  <a:srgbClr val="373738"/>
+                </a:solidFill>
+                <a:latin typeface="Calibri"/>
+                <a:ea typeface="Calibri"/>
+                <a:cs typeface="Calibri"/>
+              </a:rPr>
+              <a:t>Data Center · +68% year on year  [F2]</a:t>
             </a:r>
           </a:p>
         </p:txBody>
@@ -6263,19 +6871,19 @@
           <p:cNvPr id="8" name="">
             <a:extLst xmlns:a="http://schemas.openxmlformats.org/drawingml/2006/main">
               <a:ext uri="{FF2B5EF4-FFF2-40B4-BE49-F238E27FC236}">
-                <a16:creationId xmlns:a16="http://schemas.microsoft.com/office/drawing/2014/main" id="{9521B42D-9ED7-495A-B9A4-706CAD687326}"/>
-              </a:ext>
-            </a:extLst>
-          </p:cNvPr>
-          <p:cNvSpPr>
-            <a:spLocks xmlns:a="http://schemas.openxmlformats.org/drawingml/2006/main" noGrp="1"/>
-          </p:cNvSpPr>
-          <p:nvPr/>
-        </p:nvSpPr>
-        <p:spPr>
-          <a:xfrm xmlns:a="http://schemas.openxmlformats.org/drawingml/2006/main">
-            <a:off x="2143125" y="3657600"/>
-            <a:ext cx="5905500" cy="457200"/>
+                <a16:creationId xmlns:a16="http://schemas.microsoft.com/office/drawing/2014/main" id="{C08E439B-7E83-494E-A3B5-46C4B69928CF}"/>
+              </a:ext>
+            </a:extLst>
+          </p:cNvPr>
+          <p:cNvSpPr>
+            <a:spLocks xmlns:a="http://schemas.openxmlformats.org/drawingml/2006/main" noGrp="1"/>
+          </p:cNvSpPr>
+          <p:nvPr/>
+        </p:nvSpPr>
+        <p:spPr>
+          <a:xfrm xmlns:a="http://schemas.openxmlformats.org/drawingml/2006/main">
+            <a:off x="1066800" y="4953000"/>
+            <a:ext cx="5715000" cy="361950"/>
           </a:xfrm>
           <a:prstGeom xmlns:a="http://schemas.openxmlformats.org/drawingml/2006/main" prst="rect">
             <a:avLst/>
@@ -6291,7 +6899,8 @@
           <a:lstStyle xmlns:a="http://schemas.openxmlformats.org/drawingml/2006/main"/>
           <a:p xmlns:a="http://schemas.openxmlformats.org/drawingml/2006/main">
             <a:pPr>
-              <a:defRPr sz="2100" b="1">
+              <a:buNone/>
+              <a:defRPr sz="1725" b="1">
                 <a:solidFill>
                   <a:srgbClr val="051C2A"/>
                 </a:solidFill>
@@ -6301,7 +6910,7 @@
               </a:defRPr>
             </a:pPr>
             <a:r>
-              <a:rPr sz="2100" b="1">
+              <a:rPr sz="1725" b="1">
                 <a:solidFill>
                   <a:srgbClr val="051C2A"/>
                 </a:solidFill>
@@ -6309,7 +6918,7 @@
                 <a:ea typeface="Calibri"/>
                 <a:cs typeface="Calibri"/>
               </a:rPr>
-              <a:t>Two+ metrics; no new numbers</a:t>
+              <a:t>[F3]  Gaming revenue: $16.0bn · +41%</a:t>
             </a:r>
           </a:p>
         </p:txBody>
@@ -6319,19 +6928,19 @@
           <p:cNvPr id="9" name="">
             <a:extLst xmlns:a="http://schemas.openxmlformats.org/drawingml/2006/main">
               <a:ext uri="{FF2B5EF4-FFF2-40B4-BE49-F238E27FC236}">
-                <a16:creationId xmlns:a16="http://schemas.microsoft.com/office/drawing/2014/main" id="{3879279A-F56C-43A4-BB61-5DBED2EC9897}"/>
-              </a:ext>
-            </a:extLst>
-          </p:cNvPr>
-          <p:cNvSpPr>
-            <a:spLocks xmlns:a="http://schemas.openxmlformats.org/drawingml/2006/main" noGrp="1"/>
-          </p:cNvSpPr>
-          <p:nvPr/>
-        </p:nvSpPr>
-        <p:spPr>
-          <a:xfrm xmlns:a="http://schemas.openxmlformats.org/drawingml/2006/main">
-            <a:off x="8572500" y="3695700"/>
-            <a:ext cx="1047750" cy="323850"/>
+                <a16:creationId xmlns:a16="http://schemas.microsoft.com/office/drawing/2014/main" id="{C6B113A5-935F-4D64-84B0-5B781937EF01}"/>
+              </a:ext>
+            </a:extLst>
+          </p:cNvPr>
+          <p:cNvSpPr>
+            <a:spLocks xmlns:a="http://schemas.openxmlformats.org/drawingml/2006/main" noGrp="1"/>
+          </p:cNvSpPr>
+          <p:nvPr/>
+        </p:nvSpPr>
+        <p:spPr>
+          <a:xfrm xmlns:a="http://schemas.openxmlformats.org/drawingml/2006/main">
+            <a:off x="7239000" y="4953000"/>
+            <a:ext cx="6667500" cy="685800"/>
           </a:xfrm>
           <a:prstGeom xmlns:a="http://schemas.openxmlformats.org/drawingml/2006/main" prst="rect">
             <a:avLst/>
@@ -6347,25 +6956,26 @@
           <a:lstStyle xmlns:a="http://schemas.openxmlformats.org/drawingml/2006/main"/>
           <a:p xmlns:a="http://schemas.openxmlformats.org/drawingml/2006/main">
             <a:pPr>
-              <a:defRPr sz="1350" b="1">
-                <a:solidFill>
-                  <a:srgbClr val="1F40CB"/>
-                </a:solidFill>
-                <a:latin typeface="Calibri"/>
-                <a:ea typeface="Calibri"/>
-                <a:cs typeface="Calibri"/>
-              </a:defRPr>
-            </a:pPr>
-            <a:r>
-              <a:rPr sz="1350" b="1">
-                <a:solidFill>
-                  <a:srgbClr val="1F40CB"/>
-                </a:solidFill>
-                <a:latin typeface="Calibri"/>
-                <a:ea typeface="Calibri"/>
-                <a:cs typeface="Calibri"/>
-              </a:rPr>
-              <a:t>PASS</a:t>
+              <a:buNone/>
+              <a:defRPr sz="1725" b="1">
+                <a:solidFill>
+                  <a:srgbClr val="F07D00"/>
+                </a:solidFill>
+                <a:latin typeface="Calibri"/>
+                <a:ea typeface="Calibri"/>
+                <a:cs typeface="Calibri"/>
+              </a:defRPr>
+            </a:pPr>
+            <a:r>
+              <a:rPr sz="1725" b="1">
+                <a:solidFill>
+                  <a:srgbClr val="F07D00"/>
+                </a:solidFill>
+                <a:latin typeface="Calibri"/>
+                <a:ea typeface="Calibri"/>
+                <a:cs typeface="Calibri"/>
+              </a:rPr>
+              <a:t>[F4]  Gross margin decreased; H20-related charge: $4.5bn</a:t>
             </a:r>
           </a:p>
         </p:txBody>
@@ -6375,19 +6985,76 @@
           <p:cNvPr id="10" name="">
             <a:extLst xmlns:a="http://schemas.openxmlformats.org/drawingml/2006/main">
               <a:ext uri="{FF2B5EF4-FFF2-40B4-BE49-F238E27FC236}">
-                <a16:creationId xmlns:a16="http://schemas.microsoft.com/office/drawing/2014/main" id="{17DD85C8-4C83-4C3E-8F6A-367A43180458}"/>
-              </a:ext>
-            </a:extLst>
-          </p:cNvPr>
-          <p:cNvSpPr>
-            <a:spLocks xmlns:a="http://schemas.openxmlformats.org/drawingml/2006/main" noGrp="1"/>
-          </p:cNvSpPr>
-          <p:nvPr/>
-        </p:nvSpPr>
-        <p:spPr>
-          <a:xfrm xmlns:a="http://schemas.openxmlformats.org/drawingml/2006/main">
-            <a:off x="2143125" y="4248150"/>
-            <a:ext cx="7524750" cy="19050"/>
+                <a16:creationId xmlns:a16="http://schemas.microsoft.com/office/drawing/2014/main" id="{C0422730-1A2F-437A-8161-C3EA5A7E3843}"/>
+              </a:ext>
+            </a:extLst>
+          </p:cNvPr>
+          <p:cNvSpPr>
+            <a:spLocks xmlns:a="http://schemas.openxmlformats.org/drawingml/2006/main" noGrp="1"/>
+          </p:cNvSpPr>
+          <p:nvPr/>
+        </p:nvSpPr>
+        <p:spPr>
+          <a:xfrm xmlns:a="http://schemas.openxmlformats.org/drawingml/2006/main">
+            <a:off x="1066800" y="6343650"/>
+            <a:ext cx="11811000" cy="514350"/>
+          </a:xfrm>
+          <a:prstGeom xmlns:a="http://schemas.openxmlformats.org/drawingml/2006/main" prst="rect">
+            <a:avLst/>
+          </a:prstGeom>
+          <a:noFill xmlns:a="http://schemas.openxmlformats.org/drawingml/2006/main"/>
+          <a:ln xmlns:a="http://schemas.openxmlformats.org/drawingml/2006/main" w="0">
+            <a:noFill/>
+            <a:prstDash val="solid"/>
+          </a:ln>
+        </p:spPr>
+        <p:txBody>
+          <a:bodyPr xmlns:a="http://schemas.openxmlformats.org/drawingml/2006/main" lIns="0" tIns="0" rIns="0" bIns="0" anchor="t"/>
+          <a:lstStyle xmlns:a="http://schemas.openxmlformats.org/drawingml/2006/main"/>
+          <a:p xmlns:a="http://schemas.openxmlformats.org/drawingml/2006/main">
+            <a:pPr>
+              <a:buNone/>
+              <a:defRPr sz="2025" b="1">
+                <a:solidFill>
+                  <a:srgbClr val="051C2A"/>
+                </a:solidFill>
+                <a:latin typeface="Calibri"/>
+                <a:ea typeface="Calibri"/>
+                <a:cs typeface="Calibri"/>
+              </a:defRPr>
+            </a:pPr>
+            <a:r>
+              <a:rPr sz="2025" b="1">
+                <a:solidFill>
+                  <a:srgbClr val="051C2A"/>
+                </a:solidFill>
+                <a:latin typeface="Calibri"/>
+                <a:ea typeface="Calibri"/>
+                <a:cs typeface="Calibri"/>
+              </a:rPr>
+              <a:t>The evidence supports growth and segment-scale observations—not valuation or a price target.</a:t>
+            </a:r>
+          </a:p>
+        </p:txBody>
+      </p:sp>
+      <p:sp>
+        <p:nvSpPr>
+          <p:cNvPr id="11" name="">
+            <a:extLst xmlns:a="http://schemas.openxmlformats.org/drawingml/2006/main">
+              <a:ext uri="{FF2B5EF4-FFF2-40B4-BE49-F238E27FC236}">
+                <a16:creationId xmlns:a16="http://schemas.microsoft.com/office/drawing/2014/main" id="{1CA99A9B-F12A-48FE-953D-620804A38EED}"/>
+              </a:ext>
+            </a:extLst>
+          </p:cNvPr>
+          <p:cNvSpPr>
+            <a:spLocks xmlns:a="http://schemas.openxmlformats.org/drawingml/2006/main" noGrp="1"/>
+          </p:cNvSpPr>
+          <p:nvPr/>
+        </p:nvSpPr>
+        <p:spPr>
+          <a:xfrm xmlns:a="http://schemas.openxmlformats.org/drawingml/2006/main">
+            <a:off x="857250" y="7905750"/>
+            <a:ext cx="13525500" cy="19050"/>
           </a:xfrm>
           <a:prstGeom xmlns:a="http://schemas.openxmlformats.org/drawingml/2006/main" prst="rect">
             <a:avLst/>
@@ -6405,21 +7072,368 @@
       </p:sp>
       <p:sp>
         <p:nvSpPr>
-          <p:cNvPr id="11" name="">
-            <a:extLst xmlns:a="http://schemas.openxmlformats.org/drawingml/2006/main">
-              <a:ext uri="{FF2B5EF4-FFF2-40B4-BE49-F238E27FC236}">
-                <a16:creationId xmlns:a16="http://schemas.microsoft.com/office/drawing/2014/main" id="{56A488D8-189E-4BB9-9C55-CA27344D4880}"/>
-              </a:ext>
-            </a:extLst>
-          </p:cNvPr>
-          <p:cNvSpPr>
-            <a:spLocks xmlns:a="http://schemas.openxmlformats.org/drawingml/2006/main" noGrp="1"/>
-          </p:cNvSpPr>
-          <p:nvPr/>
-        </p:nvSpPr>
-        <p:spPr>
-          <a:xfrm xmlns:a="http://schemas.openxmlformats.org/drawingml/2006/main">
-            <a:off x="1162050" y="4533900"/>
+          <p:cNvPr id="12" name="">
+            <a:extLst xmlns:a="http://schemas.openxmlformats.org/drawingml/2006/main">
+              <a:ext uri="{FF2B5EF4-FFF2-40B4-BE49-F238E27FC236}">
+                <a16:creationId xmlns:a16="http://schemas.microsoft.com/office/drawing/2014/main" id="{3D4C9EE8-1362-49E4-BFD2-8CCFD9A293C5}"/>
+              </a:ext>
+            </a:extLst>
+          </p:cNvPr>
+          <p:cNvSpPr>
+            <a:spLocks xmlns:a="http://schemas.openxmlformats.org/drawingml/2006/main" noGrp="1"/>
+          </p:cNvSpPr>
+          <p:nvPr/>
+        </p:nvSpPr>
+        <p:spPr>
+          <a:xfrm xmlns:a="http://schemas.openxmlformats.org/drawingml/2006/main">
+            <a:off x="857250" y="7905750"/>
+            <a:ext cx="8001000" cy="28575"/>
+          </a:xfrm>
+          <a:prstGeom xmlns:a="http://schemas.openxmlformats.org/drawingml/2006/main" prst="rect">
+            <a:avLst/>
+          </a:prstGeom>
+          <a:solidFill xmlns:a="http://schemas.openxmlformats.org/drawingml/2006/main">
+            <a:srgbClr val="00A2EB"/>
+          </a:solidFill>
+          <a:ln xmlns:a="http://schemas.openxmlformats.org/drawingml/2006/main" w="9525">
+            <a:solidFill>
+              <a:srgbClr val="00A2EB"/>
+            </a:solidFill>
+            <a:prstDash val="solid"/>
+          </a:ln>
+        </p:spPr>
+      </p:sp>
+      <p:sp>
+        <p:nvSpPr>
+          <p:cNvPr id="13" name="">
+            <a:extLst xmlns:a="http://schemas.openxmlformats.org/drawingml/2006/main">
+              <a:ext uri="{FF2B5EF4-FFF2-40B4-BE49-F238E27FC236}">
+                <a16:creationId xmlns:a16="http://schemas.microsoft.com/office/drawing/2014/main" id="{24206614-6877-4386-9D02-F474A613C115}"/>
+              </a:ext>
+            </a:extLst>
+          </p:cNvPr>
+          <p:cNvSpPr>
+            <a:spLocks xmlns:a="http://schemas.openxmlformats.org/drawingml/2006/main" noGrp="1"/>
+          </p:cNvSpPr>
+          <p:nvPr/>
+        </p:nvSpPr>
+        <p:spPr>
+          <a:xfrm xmlns:a="http://schemas.openxmlformats.org/drawingml/2006/main">
+            <a:off x="971550" y="8153400"/>
+            <a:ext cx="4000500" cy="228600"/>
+          </a:xfrm>
+          <a:prstGeom xmlns:a="http://schemas.openxmlformats.org/drawingml/2006/main" prst="rect">
+            <a:avLst/>
+          </a:prstGeom>
+          <a:noFill xmlns:a="http://schemas.openxmlformats.org/drawingml/2006/main"/>
+          <a:ln xmlns:a="http://schemas.openxmlformats.org/drawingml/2006/main" w="0">
+            <a:noFill/>
+            <a:prstDash val="solid"/>
+          </a:ln>
+        </p:spPr>
+        <p:txBody>
+          <a:bodyPr xmlns:a="http://schemas.openxmlformats.org/drawingml/2006/main" lIns="0" tIns="0" rIns="0" bIns="0" anchor="t"/>
+          <a:lstStyle xmlns:a="http://schemas.openxmlformats.org/drawingml/2006/main"/>
+          <a:p xmlns:a="http://schemas.openxmlformats.org/drawingml/2006/main">
+            <a:pPr>
+              <a:buNone/>
+              <a:defRPr sz="1275">
+                <a:solidFill>
+                  <a:srgbClr val="9E9FA2"/>
+                </a:solidFill>
+                <a:latin typeface="Calibri"/>
+                <a:ea typeface="Calibri"/>
+                <a:cs typeface="Calibri"/>
+              </a:defRPr>
+            </a:pPr>
+            <a:r>
+              <a:rPr sz="1275">
+                <a:solidFill>
+                  <a:srgbClr val="9E9FA2"/>
+                </a:solidFill>
+                <a:latin typeface="Calibri"/>
+                <a:ea typeface="Calibri"/>
+                <a:cs typeface="Calibri"/>
+              </a:rPr>
+              <a:t>First Finance - Arnaud Demes</a:t>
+            </a:r>
+          </a:p>
+        </p:txBody>
+      </p:sp>
+      <p:sp>
+        <p:nvSpPr>
+          <p:cNvPr id="14" name="">
+            <a:extLst xmlns:a="http://schemas.openxmlformats.org/drawingml/2006/main">
+              <a:ext uri="{FF2B5EF4-FFF2-40B4-BE49-F238E27FC236}">
+                <a16:creationId xmlns:a16="http://schemas.microsoft.com/office/drawing/2014/main" id="{7B1FCDDD-754E-4B46-A9F3-09ADE649CF72}"/>
+              </a:ext>
+            </a:extLst>
+          </p:cNvPr>
+          <p:cNvSpPr>
+            <a:spLocks xmlns:a="http://schemas.openxmlformats.org/drawingml/2006/main" noGrp="1"/>
+          </p:cNvSpPr>
+          <p:nvPr/>
+        </p:nvSpPr>
+        <p:spPr>
+          <a:xfrm xmlns:a="http://schemas.openxmlformats.org/drawingml/2006/main">
+            <a:off x="12477750" y="8153400"/>
+            <a:ext cx="1524000" cy="228600"/>
+          </a:xfrm>
+          <a:prstGeom xmlns:a="http://schemas.openxmlformats.org/drawingml/2006/main" prst="rect">
+            <a:avLst/>
+          </a:prstGeom>
+          <a:noFill xmlns:a="http://schemas.openxmlformats.org/drawingml/2006/main"/>
+          <a:ln xmlns:a="http://schemas.openxmlformats.org/drawingml/2006/main" w="0">
+            <a:noFill/>
+            <a:prstDash val="solid"/>
+          </a:ln>
+        </p:spPr>
+        <p:txBody>
+          <a:bodyPr xmlns:a="http://schemas.openxmlformats.org/drawingml/2006/main" lIns="0" tIns="0" rIns="0" bIns="0" anchor="t"/>
+          <a:lstStyle xmlns:a="http://schemas.openxmlformats.org/drawingml/2006/main"/>
+          <a:p xmlns:a="http://schemas.openxmlformats.org/drawingml/2006/main">
+            <a:pPr algn="r">
+              <a:buNone/>
+              <a:defRPr sz="1200" b="1">
+                <a:solidFill>
+                  <a:srgbClr val="9E9FA2"/>
+                </a:solidFill>
+                <a:latin typeface="Calibri"/>
+                <a:ea typeface="Calibri"/>
+                <a:cs typeface="Calibri"/>
+              </a:defRPr>
+            </a:pPr>
+            <a:r>
+              <a:rPr sz="1200" b="1">
+                <a:solidFill>
+                  <a:srgbClr val="9E9FA2"/>
+                </a:solidFill>
+                <a:latin typeface="Calibri"/>
+                <a:ea typeface="Calibri"/>
+                <a:cs typeface="Calibri"/>
+              </a:rPr>
+              <a:t>EVIDENCE</a:t>
+            </a:r>
+          </a:p>
+        </p:txBody>
+      </p:sp>
+      <p:sp>
+        <p:nvSpPr>
+          <p:cNvPr id="15" name="">
+            <a:extLst xmlns:a="http://schemas.openxmlformats.org/drawingml/2006/main">
+              <a:ext uri="{FF2B5EF4-FFF2-40B4-BE49-F238E27FC236}">
+                <a16:creationId xmlns:a16="http://schemas.microsoft.com/office/drawing/2014/main" id="{62F3E1F1-C1E6-4C5D-B5BB-8ED1767C9D2F}"/>
+              </a:ext>
+            </a:extLst>
+          </p:cNvPr>
+          <p:cNvSpPr>
+            <a:spLocks xmlns:a="http://schemas.openxmlformats.org/drawingml/2006/main" noGrp="1"/>
+          </p:cNvSpPr>
+          <p:nvPr/>
+        </p:nvSpPr>
+        <p:spPr>
+          <a:xfrm xmlns:a="http://schemas.openxmlformats.org/drawingml/2006/main">
+            <a:off x="14097000" y="8153400"/>
+            <a:ext cx="285750" cy="228600"/>
+          </a:xfrm>
+          <a:prstGeom xmlns:a="http://schemas.openxmlformats.org/drawingml/2006/main" prst="rect">
+            <a:avLst/>
+          </a:prstGeom>
+          <a:noFill xmlns:a="http://schemas.openxmlformats.org/drawingml/2006/main"/>
+          <a:ln xmlns:a="http://schemas.openxmlformats.org/drawingml/2006/main" w="0">
+            <a:noFill/>
+            <a:prstDash val="solid"/>
+          </a:ln>
+        </p:spPr>
+        <p:txBody>
+          <a:bodyPr xmlns:a="http://schemas.openxmlformats.org/drawingml/2006/main" lIns="0" tIns="0" rIns="0" bIns="0" anchor="t"/>
+          <a:lstStyle xmlns:a="http://schemas.openxmlformats.org/drawingml/2006/main"/>
+          <a:p xmlns:a="http://schemas.openxmlformats.org/drawingml/2006/main">
+            <a:pPr algn="r">
+              <a:buNone/>
+              <a:defRPr sz="1200" b="1">
+                <a:solidFill>
+                  <a:srgbClr val="9E9FA2"/>
+                </a:solidFill>
+                <a:latin typeface="Calibri"/>
+                <a:ea typeface="Calibri"/>
+                <a:cs typeface="Calibri"/>
+              </a:defRPr>
+            </a:pPr>
+            <a:r>
+              <a:rPr sz="1200" b="1">
+                <a:solidFill>
+                  <a:srgbClr val="9E9FA2"/>
+                </a:solidFill>
+                <a:latin typeface="Calibri"/>
+                <a:ea typeface="Calibri"/>
+                <a:cs typeface="Calibri"/>
+              </a:rPr>
+              <a:t>06</a:t>
+            </a:r>
+          </a:p>
+        </p:txBody>
+      </p:sp>
+    </p:spTree>
+    <p:extLst>
+      <p:ext uri="{BB962C8B-B14F-4D97-AF65-F5344CB8AC3E}">
+        <p14:creationId xmlns:p14="http://schemas.microsoft.com/office/powerpoint/2010/main" val="1878034231"/>
+      </p:ext>
+    </p:extLst>
+  </p:cSld>
+</p:sld>
+</file>
+
+<file path=ppt/slides/slide7.xml><?xml version="1.0" encoding="utf-8"?>
+<p:sld xmlns:p="http://schemas.openxmlformats.org/presentationml/2006/main">
+  <p:cSld>
+    <p:bg>
+      <p:bgPr>
+        <a:solidFill xmlns:a="http://schemas.openxmlformats.org/drawingml/2006/main">
+          <a:srgbClr val="F5F5F5"/>
+        </a:solidFill>
+      </p:bgPr>
+    </p:bg>
+    <p:spTree>
+      <p:nvGrpSpPr>
+        <p:cNvPr id="1" name=""/>
+        <p:cNvGrpSpPr/>
+        <p:nvPr/>
+      </p:nvGrpSpPr>
+      <p:grpSpPr>
+        <a:xfrm xmlns:a="http://schemas.openxmlformats.org/drawingml/2006/main"/>
+      </p:grpSpPr>
+      <p:sp>
+        <p:nvSpPr>
+          <p:cNvPr id="29" name="">
+            <a:extLst xmlns:a="http://schemas.openxmlformats.org/drawingml/2006/main">
+              <a:ext uri="{FF2B5EF4-FFF2-40B4-BE49-F238E27FC236}">
+                <a16:creationId xmlns:a16="http://schemas.microsoft.com/office/drawing/2014/main" id="{47C48A24-E18F-4399-84FF-49EC1D75EC4A}"/>
+              </a:ext>
+            </a:extLst>
+          </p:cNvPr>
+          <p:cNvSpPr>
+            <a:spLocks xmlns:a="http://schemas.openxmlformats.org/drawingml/2006/main" noGrp="1"/>
+          </p:cNvSpPr>
+          <p:nvPr/>
+        </p:nvSpPr>
+        <p:spPr>
+          <a:xfrm xmlns:a="http://schemas.openxmlformats.org/drawingml/2006/main">
+            <a:off x="971550" y="723900"/>
+            <a:ext cx="4953000" cy="266700"/>
+          </a:xfrm>
+          <a:prstGeom xmlns:a="http://schemas.openxmlformats.org/drawingml/2006/main" prst="rect">
+            <a:avLst/>
+          </a:prstGeom>
+          <a:noFill xmlns:a="http://schemas.openxmlformats.org/drawingml/2006/main"/>
+          <a:ln xmlns:a="http://schemas.openxmlformats.org/drawingml/2006/main" w="0">
+            <a:noFill/>
+            <a:prstDash val="solid"/>
+          </a:ln>
+        </p:spPr>
+        <p:txBody>
+          <a:bodyPr xmlns:a="http://schemas.openxmlformats.org/drawingml/2006/main" lIns="0" tIns="0" rIns="0" bIns="0" anchor="t"/>
+          <a:lstStyle xmlns:a="http://schemas.openxmlformats.org/drawingml/2006/main"/>
+          <a:p xmlns:a="http://schemas.openxmlformats.org/drawingml/2006/main">
+            <a:pPr>
+              <a:buNone/>
+              <a:defRPr sz="1350" b="1">
+                <a:solidFill>
+                  <a:srgbClr val="1F40CB"/>
+                </a:solidFill>
+                <a:latin typeface="Calibri"/>
+                <a:ea typeface="Calibri"/>
+                <a:cs typeface="Calibri"/>
+              </a:defRPr>
+            </a:pPr>
+            <a:r>
+              <a:rPr sz="1350" b="1">
+                <a:solidFill>
+                  <a:srgbClr val="1F40CB"/>
+                </a:solidFill>
+                <a:latin typeface="Calibri"/>
+                <a:ea typeface="Calibri"/>
+                <a:cs typeface="Calibri"/>
+              </a:rPr>
+              <a:t>VERIFICATION CONTRACT</a:t>
+            </a:r>
+          </a:p>
+        </p:txBody>
+      </p:sp>
+      <p:sp>
+        <p:nvSpPr>
+          <p:cNvPr id="2" name="">
+            <a:extLst xmlns:a="http://schemas.openxmlformats.org/drawingml/2006/main">
+              <a:ext uri="{FF2B5EF4-FFF2-40B4-BE49-F238E27FC236}">
+                <a16:creationId xmlns:a16="http://schemas.microsoft.com/office/drawing/2014/main" id="{7574DED0-BD05-4639-BE3C-BD8A49B9E36F}"/>
+              </a:ext>
+            </a:extLst>
+          </p:cNvPr>
+          <p:cNvSpPr>
+            <a:spLocks xmlns:a="http://schemas.openxmlformats.org/drawingml/2006/main" noGrp="1"/>
+          </p:cNvSpPr>
+          <p:nvPr/>
+        </p:nvSpPr>
+        <p:spPr>
+          <a:xfrm xmlns:a="http://schemas.openxmlformats.org/drawingml/2006/main">
+            <a:off x="971550" y="1181100"/>
+            <a:ext cx="13239750" cy="1123950"/>
+          </a:xfrm>
+          <a:prstGeom xmlns:a="http://schemas.openxmlformats.org/drawingml/2006/main" prst="rect">
+            <a:avLst/>
+          </a:prstGeom>
+          <a:noFill xmlns:a="http://schemas.openxmlformats.org/drawingml/2006/main"/>
+          <a:ln xmlns:a="http://schemas.openxmlformats.org/drawingml/2006/main" w="0">
+            <a:noFill/>
+            <a:prstDash val="solid"/>
+          </a:ln>
+        </p:spPr>
+        <p:txBody>
+          <a:bodyPr xmlns:a="http://schemas.openxmlformats.org/drawingml/2006/main" lIns="0" tIns="0" rIns="0" bIns="0" anchor="t"/>
+          <a:lstStyle xmlns:a="http://schemas.openxmlformats.org/drawingml/2006/main"/>
+          <a:p xmlns:a="http://schemas.openxmlformats.org/drawingml/2006/main">
+            <a:pPr>
+              <a:buNone/>
+              <a:defRPr sz="3600" b="1">
+                <a:solidFill>
+                  <a:srgbClr val="051C2A"/>
+                </a:solidFill>
+                <a:latin typeface="Calibri"/>
+                <a:ea typeface="Calibri"/>
+                <a:cs typeface="Calibri"/>
+              </a:defRPr>
+            </a:pPr>
+            <a:r>
+              <a:rPr sz="3600" b="1">
+                <a:solidFill>
+                  <a:srgbClr val="051C2A"/>
+                </a:solidFill>
+                <a:latin typeface="Calibri"/>
+                <a:ea typeface="Calibri"/>
+                <a:cs typeface="Calibri"/>
+              </a:rPr>
+              <a:t>A 4/4 check separates execution from basic grounding</a:t>
+            </a:r>
+          </a:p>
+        </p:txBody>
+      </p:sp>
+      <p:sp>
+        <p:nvSpPr>
+          <p:cNvPr id="3" name="">
+            <a:extLst xmlns:a="http://schemas.openxmlformats.org/drawingml/2006/main">
+              <a:ext uri="{FF2B5EF4-FFF2-40B4-BE49-F238E27FC236}">
+                <a16:creationId xmlns:a16="http://schemas.microsoft.com/office/drawing/2014/main" id="{B710C483-A890-47EA-A072-5D9086A148F5}"/>
+              </a:ext>
+            </a:extLst>
+          </p:cNvPr>
+          <p:cNvSpPr>
+            <a:spLocks xmlns:a="http://schemas.openxmlformats.org/drawingml/2006/main" noGrp="1"/>
+          </p:cNvSpPr>
+          <p:nvPr/>
+        </p:nvSpPr>
+        <p:spPr>
+          <a:xfrm xmlns:a="http://schemas.openxmlformats.org/drawingml/2006/main">
+            <a:off x="1162050" y="2857500"/>
             <a:ext cx="571500" cy="361950"/>
           </a:xfrm>
           <a:prstGeom xmlns:a="http://schemas.openxmlformats.org/drawingml/2006/main" prst="rect">
@@ -6436,6 +7450,7 @@
           <a:lstStyle xmlns:a="http://schemas.openxmlformats.org/drawingml/2006/main"/>
           <a:p xmlns:a="http://schemas.openxmlformats.org/drawingml/2006/main">
             <a:pPr>
+              <a:buNone/>
               <a:defRPr sz="1425" b="1">
                 <a:solidFill>
                   <a:srgbClr val="00A2EB"/>
@@ -6454,28 +7469,28 @@
                 <a:ea typeface="Calibri"/>
                 <a:cs typeface="Calibri"/>
               </a:rPr>
-              <a:t>03</a:t>
-            </a:r>
-          </a:p>
-        </p:txBody>
-      </p:sp>
-      <p:sp>
-        <p:nvSpPr>
-          <p:cNvPr id="12" name="">
-            <a:extLst xmlns:a="http://schemas.openxmlformats.org/drawingml/2006/main">
-              <a:ext uri="{FF2B5EF4-FFF2-40B4-BE49-F238E27FC236}">
-                <a16:creationId xmlns:a16="http://schemas.microsoft.com/office/drawing/2014/main" id="{2062B6DC-830C-4BC9-8851-A3888182AE1E}"/>
-              </a:ext>
-            </a:extLst>
-          </p:cNvPr>
-          <p:cNvSpPr>
-            <a:spLocks xmlns:a="http://schemas.openxmlformats.org/drawingml/2006/main" noGrp="1"/>
-          </p:cNvSpPr>
-          <p:nvPr/>
-        </p:nvSpPr>
-        <p:spPr>
-          <a:xfrm xmlns:a="http://schemas.openxmlformats.org/drawingml/2006/main">
-            <a:off x="2143125" y="4495800"/>
+              <a:t>01</a:t>
+            </a:r>
+          </a:p>
+        </p:txBody>
+      </p:sp>
+      <p:sp>
+        <p:nvSpPr>
+          <p:cNvPr id="4" name="">
+            <a:extLst xmlns:a="http://schemas.openxmlformats.org/drawingml/2006/main">
+              <a:ext uri="{FF2B5EF4-FFF2-40B4-BE49-F238E27FC236}">
+                <a16:creationId xmlns:a16="http://schemas.microsoft.com/office/drawing/2014/main" id="{8A4E515B-5F3B-40A3-8912-9F85F0FE7567}"/>
+              </a:ext>
+            </a:extLst>
+          </p:cNvPr>
+          <p:cNvSpPr>
+            <a:spLocks xmlns:a="http://schemas.openxmlformats.org/drawingml/2006/main" noGrp="1"/>
+          </p:cNvSpPr>
+          <p:nvPr/>
+        </p:nvSpPr>
+        <p:spPr>
+          <a:xfrm xmlns:a="http://schemas.openxmlformats.org/drawingml/2006/main">
+            <a:off x="2143125" y="2819400"/>
             <a:ext cx="5905500" cy="457200"/>
           </a:xfrm>
           <a:prstGeom xmlns:a="http://schemas.openxmlformats.org/drawingml/2006/main" prst="rect">
@@ -6492,6 +7507,7 @@
           <a:lstStyle xmlns:a="http://schemas.openxmlformats.org/drawingml/2006/main"/>
           <a:p xmlns:a="http://schemas.openxmlformats.org/drawingml/2006/main">
             <a:pPr>
+              <a:buNone/>
               <a:defRPr sz="2100" b="1">
                 <a:solidFill>
                   <a:srgbClr val="051C2A"/>
@@ -6510,28 +7526,28 @@
                 <a:ea typeface="Calibri"/>
                 <a:cs typeface="Calibri"/>
               </a:rPr>
-              <a:t>At least two evidence citations</a:t>
-            </a:r>
-          </a:p>
-        </p:txBody>
-      </p:sp>
-      <p:sp>
-        <p:nvSpPr>
-          <p:cNvPr id="13" name="">
-            <a:extLst xmlns:a="http://schemas.openxmlformats.org/drawingml/2006/main">
-              <a:ext uri="{FF2B5EF4-FFF2-40B4-BE49-F238E27FC236}">
-                <a16:creationId xmlns:a16="http://schemas.microsoft.com/office/drawing/2014/main" id="{56B92F15-B968-44A2-AC9F-1F44F75B84FF}"/>
-              </a:ext>
-            </a:extLst>
-          </p:cNvPr>
-          <p:cNvSpPr>
-            <a:spLocks xmlns:a="http://schemas.openxmlformats.org/drawingml/2006/main" noGrp="1"/>
-          </p:cNvSpPr>
-          <p:nvPr/>
-        </p:nvSpPr>
-        <p:spPr>
-          <a:xfrm xmlns:a="http://schemas.openxmlformats.org/drawingml/2006/main">
-            <a:off x="8572500" y="4533900"/>
+              <a:t>Company and reporting period</a:t>
+            </a:r>
+          </a:p>
+        </p:txBody>
+      </p:sp>
+      <p:sp>
+        <p:nvSpPr>
+          <p:cNvPr id="5" name="">
+            <a:extLst xmlns:a="http://schemas.openxmlformats.org/drawingml/2006/main">
+              <a:ext uri="{FF2B5EF4-FFF2-40B4-BE49-F238E27FC236}">
+                <a16:creationId xmlns:a16="http://schemas.microsoft.com/office/drawing/2014/main" id="{A2CF432C-0929-4FB7-9EB4-33A2C51C41DC}"/>
+              </a:ext>
+            </a:extLst>
+          </p:cNvPr>
+          <p:cNvSpPr>
+            <a:spLocks xmlns:a="http://schemas.openxmlformats.org/drawingml/2006/main" noGrp="1"/>
+          </p:cNvSpPr>
+          <p:nvPr/>
+        </p:nvSpPr>
+        <p:spPr>
+          <a:xfrm xmlns:a="http://schemas.openxmlformats.org/drawingml/2006/main">
+            <a:off x="8572500" y="2857500"/>
             <a:ext cx="1047750" cy="323850"/>
           </a:xfrm>
           <a:prstGeom xmlns:a="http://schemas.openxmlformats.org/drawingml/2006/main" prst="rect">
@@ -6548,6 +7564,7 @@
           <a:lstStyle xmlns:a="http://schemas.openxmlformats.org/drawingml/2006/main"/>
           <a:p xmlns:a="http://schemas.openxmlformats.org/drawingml/2006/main">
             <a:pPr>
+              <a:buNone/>
               <a:defRPr sz="1350" b="1">
                 <a:solidFill>
                   <a:srgbClr val="1F40CB"/>
@@ -6573,21 +7590,21 @@
       </p:sp>
       <p:sp>
         <p:nvSpPr>
-          <p:cNvPr id="14" name="">
-            <a:extLst xmlns:a="http://schemas.openxmlformats.org/drawingml/2006/main">
-              <a:ext uri="{FF2B5EF4-FFF2-40B4-BE49-F238E27FC236}">
-                <a16:creationId xmlns:a16="http://schemas.microsoft.com/office/drawing/2014/main" id="{AC9FCC08-CC44-427D-9C16-AD71F4A0FE15}"/>
-              </a:ext>
-            </a:extLst>
-          </p:cNvPr>
-          <p:cNvSpPr>
-            <a:spLocks xmlns:a="http://schemas.openxmlformats.org/drawingml/2006/main" noGrp="1"/>
-          </p:cNvSpPr>
-          <p:nvPr/>
-        </p:nvSpPr>
-        <p:spPr>
-          <a:xfrm xmlns:a="http://schemas.openxmlformats.org/drawingml/2006/main">
-            <a:off x="2143125" y="5086350"/>
+          <p:cNvPr id="6" name="">
+            <a:extLst xmlns:a="http://schemas.openxmlformats.org/drawingml/2006/main">
+              <a:ext uri="{FF2B5EF4-FFF2-40B4-BE49-F238E27FC236}">
+                <a16:creationId xmlns:a16="http://schemas.microsoft.com/office/drawing/2014/main" id="{179A1F7B-8EE0-471C-AA17-75A56716B8A1}"/>
+              </a:ext>
+            </a:extLst>
+          </p:cNvPr>
+          <p:cNvSpPr>
+            <a:spLocks xmlns:a="http://schemas.openxmlformats.org/drawingml/2006/main" noGrp="1"/>
+          </p:cNvSpPr>
+          <p:nvPr/>
+        </p:nvSpPr>
+        <p:spPr>
+          <a:xfrm xmlns:a="http://schemas.openxmlformats.org/drawingml/2006/main">
+            <a:off x="2143125" y="3409950"/>
             <a:ext cx="7524750" cy="19050"/>
           </a:xfrm>
           <a:prstGeom xmlns:a="http://schemas.openxmlformats.org/drawingml/2006/main" prst="rect">
@@ -6606,21 +7623,21 @@
       </p:sp>
       <p:sp>
         <p:nvSpPr>
-          <p:cNvPr id="15" name="">
-            <a:extLst xmlns:a="http://schemas.openxmlformats.org/drawingml/2006/main">
-              <a:ext uri="{FF2B5EF4-FFF2-40B4-BE49-F238E27FC236}">
-                <a16:creationId xmlns:a16="http://schemas.microsoft.com/office/drawing/2014/main" id="{46219D6C-4B5E-42DF-9DFC-40856CEAE76C}"/>
-              </a:ext>
-            </a:extLst>
-          </p:cNvPr>
-          <p:cNvSpPr>
-            <a:spLocks xmlns:a="http://schemas.openxmlformats.org/drawingml/2006/main" noGrp="1"/>
-          </p:cNvSpPr>
-          <p:nvPr/>
-        </p:nvSpPr>
-        <p:spPr>
-          <a:xfrm xmlns:a="http://schemas.openxmlformats.org/drawingml/2006/main">
-            <a:off x="1162050" y="5372100"/>
+          <p:cNvPr id="7" name="">
+            <a:extLst xmlns:a="http://schemas.openxmlformats.org/drawingml/2006/main">
+              <a:ext uri="{FF2B5EF4-FFF2-40B4-BE49-F238E27FC236}">
+                <a16:creationId xmlns:a16="http://schemas.microsoft.com/office/drawing/2014/main" id="{C5F63C6A-1C80-47E2-9174-F44504BE7A86}"/>
+              </a:ext>
+            </a:extLst>
+          </p:cNvPr>
+          <p:cNvSpPr>
+            <a:spLocks xmlns:a="http://schemas.openxmlformats.org/drawingml/2006/main" noGrp="1"/>
+          </p:cNvSpPr>
+          <p:nvPr/>
+        </p:nvSpPr>
+        <p:spPr>
+          <a:xfrm xmlns:a="http://schemas.openxmlformats.org/drawingml/2006/main">
+            <a:off x="1162050" y="3695700"/>
             <a:ext cx="571500" cy="361950"/>
           </a:xfrm>
           <a:prstGeom xmlns:a="http://schemas.openxmlformats.org/drawingml/2006/main" prst="rect">
@@ -6637,6 +7654,7 @@
           <a:lstStyle xmlns:a="http://schemas.openxmlformats.org/drawingml/2006/main"/>
           <a:p xmlns:a="http://schemas.openxmlformats.org/drawingml/2006/main">
             <a:pPr>
+              <a:buNone/>
               <a:defRPr sz="1425" b="1">
                 <a:solidFill>
                   <a:srgbClr val="00A2EB"/>
@@ -6655,28 +7673,28 @@
                 <a:ea typeface="Calibri"/>
                 <a:cs typeface="Calibri"/>
               </a:rPr>
-              <a:t>04</a:t>
-            </a:r>
-          </a:p>
-        </p:txBody>
-      </p:sp>
-      <p:sp>
-        <p:nvSpPr>
-          <p:cNvPr id="16" name="">
-            <a:extLst xmlns:a="http://schemas.openxmlformats.org/drawingml/2006/main">
-              <a:ext uri="{FF2B5EF4-FFF2-40B4-BE49-F238E27FC236}">
-                <a16:creationId xmlns:a16="http://schemas.microsoft.com/office/drawing/2014/main" id="{E2CA7A6E-EE89-4E7C-A0E4-A0D3E684AC6C}"/>
-              </a:ext>
-            </a:extLst>
-          </p:cNvPr>
-          <p:cNvSpPr>
-            <a:spLocks xmlns:a="http://schemas.openxmlformats.org/drawingml/2006/main" noGrp="1"/>
-          </p:cNvSpPr>
-          <p:nvPr/>
-        </p:nvSpPr>
-        <p:spPr>
-          <a:xfrm xmlns:a="http://schemas.openxmlformats.org/drawingml/2006/main">
-            <a:off x="2143125" y="5334000"/>
+              <a:t>02</a:t>
+            </a:r>
+          </a:p>
+        </p:txBody>
+      </p:sp>
+      <p:sp>
+        <p:nvSpPr>
+          <p:cNvPr id="8" name="">
+            <a:extLst xmlns:a="http://schemas.openxmlformats.org/drawingml/2006/main">
+              <a:ext uri="{FF2B5EF4-FFF2-40B4-BE49-F238E27FC236}">
+                <a16:creationId xmlns:a16="http://schemas.microsoft.com/office/drawing/2014/main" id="{9521B42D-9ED7-495A-B9A4-706CAD687326}"/>
+              </a:ext>
+            </a:extLst>
+          </p:cNvPr>
+          <p:cNvSpPr>
+            <a:spLocks xmlns:a="http://schemas.openxmlformats.org/drawingml/2006/main" noGrp="1"/>
+          </p:cNvSpPr>
+          <p:nvPr/>
+        </p:nvSpPr>
+        <p:spPr>
+          <a:xfrm xmlns:a="http://schemas.openxmlformats.org/drawingml/2006/main">
+            <a:off x="2143125" y="3657600"/>
             <a:ext cx="5905500" cy="457200"/>
           </a:xfrm>
           <a:prstGeom xmlns:a="http://schemas.openxmlformats.org/drawingml/2006/main" prst="rect">
@@ -6693,6 +7711,7 @@
           <a:lstStyle xmlns:a="http://schemas.openxmlformats.org/drawingml/2006/main"/>
           <a:p xmlns:a="http://schemas.openxmlformats.org/drawingml/2006/main">
             <a:pPr>
+              <a:buNone/>
               <a:defRPr sz="2100" b="1">
                 <a:solidFill>
                   <a:srgbClr val="051C2A"/>
@@ -6711,28 +7730,28 @@
                 <a:ea typeface="Calibri"/>
                 <a:cs typeface="Calibri"/>
               </a:rPr>
-              <a:t>One explicit limitation</a:t>
-            </a:r>
-          </a:p>
-        </p:txBody>
-      </p:sp>
-      <p:sp>
-        <p:nvSpPr>
-          <p:cNvPr id="17" name="">
-            <a:extLst xmlns:a="http://schemas.openxmlformats.org/drawingml/2006/main">
-              <a:ext uri="{FF2B5EF4-FFF2-40B4-BE49-F238E27FC236}">
-                <a16:creationId xmlns:a16="http://schemas.microsoft.com/office/drawing/2014/main" id="{EF9232DB-9ADA-4EC0-9488-23F6FAAFFAB6}"/>
-              </a:ext>
-            </a:extLst>
-          </p:cNvPr>
-          <p:cNvSpPr>
-            <a:spLocks xmlns:a="http://schemas.openxmlformats.org/drawingml/2006/main" noGrp="1"/>
-          </p:cNvSpPr>
-          <p:nvPr/>
-        </p:nvSpPr>
-        <p:spPr>
-          <a:xfrm xmlns:a="http://schemas.openxmlformats.org/drawingml/2006/main">
-            <a:off x="8572500" y="5372100"/>
+              <a:t>Two+ metrics; no new numbers</a:t>
+            </a:r>
+          </a:p>
+        </p:txBody>
+      </p:sp>
+      <p:sp>
+        <p:nvSpPr>
+          <p:cNvPr id="9" name="">
+            <a:extLst xmlns:a="http://schemas.openxmlformats.org/drawingml/2006/main">
+              <a:ext uri="{FF2B5EF4-FFF2-40B4-BE49-F238E27FC236}">
+                <a16:creationId xmlns:a16="http://schemas.microsoft.com/office/drawing/2014/main" id="{3879279A-F56C-43A4-BB61-5DBED2EC9897}"/>
+              </a:ext>
+            </a:extLst>
+          </p:cNvPr>
+          <p:cNvSpPr>
+            <a:spLocks xmlns:a="http://schemas.openxmlformats.org/drawingml/2006/main" noGrp="1"/>
+          </p:cNvSpPr>
+          <p:nvPr/>
+        </p:nvSpPr>
+        <p:spPr>
+          <a:xfrm xmlns:a="http://schemas.openxmlformats.org/drawingml/2006/main">
+            <a:off x="8572500" y="3695700"/>
             <a:ext cx="1047750" cy="323850"/>
           </a:xfrm>
           <a:prstGeom xmlns:a="http://schemas.openxmlformats.org/drawingml/2006/main" prst="rect">
@@ -6749,6 +7768,7 @@
           <a:lstStyle xmlns:a="http://schemas.openxmlformats.org/drawingml/2006/main"/>
           <a:p xmlns:a="http://schemas.openxmlformats.org/drawingml/2006/main">
             <a:pPr>
+              <a:buNone/>
               <a:defRPr sz="1350" b="1">
                 <a:solidFill>
                   <a:srgbClr val="1F40CB"/>
@@ -6774,21 +7794,21 @@
       </p:sp>
       <p:sp>
         <p:nvSpPr>
-          <p:cNvPr id="18" name="">
-            <a:extLst xmlns:a="http://schemas.openxmlformats.org/drawingml/2006/main">
-              <a:ext uri="{FF2B5EF4-FFF2-40B4-BE49-F238E27FC236}">
-                <a16:creationId xmlns:a16="http://schemas.microsoft.com/office/drawing/2014/main" id="{48F021EC-EF4B-4696-AC90-EE4C0AB71651}"/>
-              </a:ext>
-            </a:extLst>
-          </p:cNvPr>
-          <p:cNvSpPr>
-            <a:spLocks xmlns:a="http://schemas.openxmlformats.org/drawingml/2006/main" noGrp="1"/>
-          </p:cNvSpPr>
-          <p:nvPr/>
-        </p:nvSpPr>
-        <p:spPr>
-          <a:xfrm xmlns:a="http://schemas.openxmlformats.org/drawingml/2006/main">
-            <a:off x="2143125" y="5924550"/>
+          <p:cNvPr id="10" name="">
+            <a:extLst xmlns:a="http://schemas.openxmlformats.org/drawingml/2006/main">
+              <a:ext uri="{FF2B5EF4-FFF2-40B4-BE49-F238E27FC236}">
+                <a16:creationId xmlns:a16="http://schemas.microsoft.com/office/drawing/2014/main" id="{17DD85C8-4C83-4C3E-8F6A-367A43180458}"/>
+              </a:ext>
+            </a:extLst>
+          </p:cNvPr>
+          <p:cNvSpPr>
+            <a:spLocks xmlns:a="http://schemas.openxmlformats.org/drawingml/2006/main" noGrp="1"/>
+          </p:cNvSpPr>
+          <p:nvPr/>
+        </p:nvSpPr>
+        <p:spPr>
+          <a:xfrm xmlns:a="http://schemas.openxmlformats.org/drawingml/2006/main">
+            <a:off x="2143125" y="4248150"/>
             <a:ext cx="7524750" cy="19050"/>
           </a:xfrm>
           <a:prstGeom xmlns:a="http://schemas.openxmlformats.org/drawingml/2006/main" prst="rect">
@@ -6807,6 +7827,414 @@
       </p:sp>
       <p:sp>
         <p:nvSpPr>
+          <p:cNvPr id="11" name="">
+            <a:extLst xmlns:a="http://schemas.openxmlformats.org/drawingml/2006/main">
+              <a:ext uri="{FF2B5EF4-FFF2-40B4-BE49-F238E27FC236}">
+                <a16:creationId xmlns:a16="http://schemas.microsoft.com/office/drawing/2014/main" id="{56A488D8-189E-4BB9-9C55-CA27344D4880}"/>
+              </a:ext>
+            </a:extLst>
+          </p:cNvPr>
+          <p:cNvSpPr>
+            <a:spLocks xmlns:a="http://schemas.openxmlformats.org/drawingml/2006/main" noGrp="1"/>
+          </p:cNvSpPr>
+          <p:nvPr/>
+        </p:nvSpPr>
+        <p:spPr>
+          <a:xfrm xmlns:a="http://schemas.openxmlformats.org/drawingml/2006/main">
+            <a:off x="1162050" y="4533900"/>
+            <a:ext cx="571500" cy="361950"/>
+          </a:xfrm>
+          <a:prstGeom xmlns:a="http://schemas.openxmlformats.org/drawingml/2006/main" prst="rect">
+            <a:avLst/>
+          </a:prstGeom>
+          <a:noFill xmlns:a="http://schemas.openxmlformats.org/drawingml/2006/main"/>
+          <a:ln xmlns:a="http://schemas.openxmlformats.org/drawingml/2006/main" w="0">
+            <a:noFill/>
+            <a:prstDash val="solid"/>
+          </a:ln>
+        </p:spPr>
+        <p:txBody>
+          <a:bodyPr xmlns:a="http://schemas.openxmlformats.org/drawingml/2006/main" lIns="0" tIns="0" rIns="0" bIns="0" anchor="t"/>
+          <a:lstStyle xmlns:a="http://schemas.openxmlformats.org/drawingml/2006/main"/>
+          <a:p xmlns:a="http://schemas.openxmlformats.org/drawingml/2006/main">
+            <a:pPr>
+              <a:buNone/>
+              <a:defRPr sz="1425" b="1">
+                <a:solidFill>
+                  <a:srgbClr val="00A2EB"/>
+                </a:solidFill>
+                <a:latin typeface="Calibri"/>
+                <a:ea typeface="Calibri"/>
+                <a:cs typeface="Calibri"/>
+              </a:defRPr>
+            </a:pPr>
+            <a:r>
+              <a:rPr sz="1425" b="1">
+                <a:solidFill>
+                  <a:srgbClr val="00A2EB"/>
+                </a:solidFill>
+                <a:latin typeface="Calibri"/>
+                <a:ea typeface="Calibri"/>
+                <a:cs typeface="Calibri"/>
+              </a:rPr>
+              <a:t>03</a:t>
+            </a:r>
+          </a:p>
+        </p:txBody>
+      </p:sp>
+      <p:sp>
+        <p:nvSpPr>
+          <p:cNvPr id="12" name="">
+            <a:extLst xmlns:a="http://schemas.openxmlformats.org/drawingml/2006/main">
+              <a:ext uri="{FF2B5EF4-FFF2-40B4-BE49-F238E27FC236}">
+                <a16:creationId xmlns:a16="http://schemas.microsoft.com/office/drawing/2014/main" id="{2062B6DC-830C-4BC9-8851-A3888182AE1E}"/>
+              </a:ext>
+            </a:extLst>
+          </p:cNvPr>
+          <p:cNvSpPr>
+            <a:spLocks xmlns:a="http://schemas.openxmlformats.org/drawingml/2006/main" noGrp="1"/>
+          </p:cNvSpPr>
+          <p:nvPr/>
+        </p:nvSpPr>
+        <p:spPr>
+          <a:xfrm xmlns:a="http://schemas.openxmlformats.org/drawingml/2006/main">
+            <a:off x="2143125" y="4495800"/>
+            <a:ext cx="5905500" cy="457200"/>
+          </a:xfrm>
+          <a:prstGeom xmlns:a="http://schemas.openxmlformats.org/drawingml/2006/main" prst="rect">
+            <a:avLst/>
+          </a:prstGeom>
+          <a:noFill xmlns:a="http://schemas.openxmlformats.org/drawingml/2006/main"/>
+          <a:ln xmlns:a="http://schemas.openxmlformats.org/drawingml/2006/main" w="0">
+            <a:noFill/>
+            <a:prstDash val="solid"/>
+          </a:ln>
+        </p:spPr>
+        <p:txBody>
+          <a:bodyPr xmlns:a="http://schemas.openxmlformats.org/drawingml/2006/main" lIns="0" tIns="0" rIns="0" bIns="0" anchor="t"/>
+          <a:lstStyle xmlns:a="http://schemas.openxmlformats.org/drawingml/2006/main"/>
+          <a:p xmlns:a="http://schemas.openxmlformats.org/drawingml/2006/main">
+            <a:pPr>
+              <a:buNone/>
+              <a:defRPr sz="2100" b="1">
+                <a:solidFill>
+                  <a:srgbClr val="051C2A"/>
+                </a:solidFill>
+                <a:latin typeface="Calibri"/>
+                <a:ea typeface="Calibri"/>
+                <a:cs typeface="Calibri"/>
+              </a:defRPr>
+            </a:pPr>
+            <a:r>
+              <a:rPr sz="2100" b="1">
+                <a:solidFill>
+                  <a:srgbClr val="051C2A"/>
+                </a:solidFill>
+                <a:latin typeface="Calibri"/>
+                <a:ea typeface="Calibri"/>
+                <a:cs typeface="Calibri"/>
+              </a:rPr>
+              <a:t>At least two evidence citations</a:t>
+            </a:r>
+          </a:p>
+        </p:txBody>
+      </p:sp>
+      <p:sp>
+        <p:nvSpPr>
+          <p:cNvPr id="13" name="">
+            <a:extLst xmlns:a="http://schemas.openxmlformats.org/drawingml/2006/main">
+              <a:ext uri="{FF2B5EF4-FFF2-40B4-BE49-F238E27FC236}">
+                <a16:creationId xmlns:a16="http://schemas.microsoft.com/office/drawing/2014/main" id="{56B92F15-B968-44A2-AC9F-1F44F75B84FF}"/>
+              </a:ext>
+            </a:extLst>
+          </p:cNvPr>
+          <p:cNvSpPr>
+            <a:spLocks xmlns:a="http://schemas.openxmlformats.org/drawingml/2006/main" noGrp="1"/>
+          </p:cNvSpPr>
+          <p:nvPr/>
+        </p:nvSpPr>
+        <p:spPr>
+          <a:xfrm xmlns:a="http://schemas.openxmlformats.org/drawingml/2006/main">
+            <a:off x="8572500" y="4533900"/>
+            <a:ext cx="1047750" cy="323850"/>
+          </a:xfrm>
+          <a:prstGeom xmlns:a="http://schemas.openxmlformats.org/drawingml/2006/main" prst="rect">
+            <a:avLst/>
+          </a:prstGeom>
+          <a:noFill xmlns:a="http://schemas.openxmlformats.org/drawingml/2006/main"/>
+          <a:ln xmlns:a="http://schemas.openxmlformats.org/drawingml/2006/main" w="0">
+            <a:noFill/>
+            <a:prstDash val="solid"/>
+          </a:ln>
+        </p:spPr>
+        <p:txBody>
+          <a:bodyPr xmlns:a="http://schemas.openxmlformats.org/drawingml/2006/main" lIns="0" tIns="0" rIns="0" bIns="0" anchor="t"/>
+          <a:lstStyle xmlns:a="http://schemas.openxmlformats.org/drawingml/2006/main"/>
+          <a:p xmlns:a="http://schemas.openxmlformats.org/drawingml/2006/main">
+            <a:pPr>
+              <a:buNone/>
+              <a:defRPr sz="1350" b="1">
+                <a:solidFill>
+                  <a:srgbClr val="1F40CB"/>
+                </a:solidFill>
+                <a:latin typeface="Calibri"/>
+                <a:ea typeface="Calibri"/>
+                <a:cs typeface="Calibri"/>
+              </a:defRPr>
+            </a:pPr>
+            <a:r>
+              <a:rPr sz="1350" b="1">
+                <a:solidFill>
+                  <a:srgbClr val="1F40CB"/>
+                </a:solidFill>
+                <a:latin typeface="Calibri"/>
+                <a:ea typeface="Calibri"/>
+                <a:cs typeface="Calibri"/>
+              </a:rPr>
+              <a:t>PASS</a:t>
+            </a:r>
+          </a:p>
+        </p:txBody>
+      </p:sp>
+      <p:sp>
+        <p:nvSpPr>
+          <p:cNvPr id="14" name="">
+            <a:extLst xmlns:a="http://schemas.openxmlformats.org/drawingml/2006/main">
+              <a:ext uri="{FF2B5EF4-FFF2-40B4-BE49-F238E27FC236}">
+                <a16:creationId xmlns:a16="http://schemas.microsoft.com/office/drawing/2014/main" id="{AC9FCC08-CC44-427D-9C16-AD71F4A0FE15}"/>
+              </a:ext>
+            </a:extLst>
+          </p:cNvPr>
+          <p:cNvSpPr>
+            <a:spLocks xmlns:a="http://schemas.openxmlformats.org/drawingml/2006/main" noGrp="1"/>
+          </p:cNvSpPr>
+          <p:nvPr/>
+        </p:nvSpPr>
+        <p:spPr>
+          <a:xfrm xmlns:a="http://schemas.openxmlformats.org/drawingml/2006/main">
+            <a:off x="2143125" y="5086350"/>
+            <a:ext cx="7524750" cy="19050"/>
+          </a:xfrm>
+          <a:prstGeom xmlns:a="http://schemas.openxmlformats.org/drawingml/2006/main" prst="rect">
+            <a:avLst/>
+          </a:prstGeom>
+          <a:solidFill xmlns:a="http://schemas.openxmlformats.org/drawingml/2006/main">
+            <a:srgbClr val="E4E6E8"/>
+          </a:solidFill>
+          <a:ln xmlns:a="http://schemas.openxmlformats.org/drawingml/2006/main" w="9525">
+            <a:solidFill>
+              <a:srgbClr val="E4E6E8"/>
+            </a:solidFill>
+            <a:prstDash val="solid"/>
+          </a:ln>
+        </p:spPr>
+      </p:sp>
+      <p:sp>
+        <p:nvSpPr>
+          <p:cNvPr id="15" name="">
+            <a:extLst xmlns:a="http://schemas.openxmlformats.org/drawingml/2006/main">
+              <a:ext uri="{FF2B5EF4-FFF2-40B4-BE49-F238E27FC236}">
+                <a16:creationId xmlns:a16="http://schemas.microsoft.com/office/drawing/2014/main" id="{46219D6C-4B5E-42DF-9DFC-40856CEAE76C}"/>
+              </a:ext>
+            </a:extLst>
+          </p:cNvPr>
+          <p:cNvSpPr>
+            <a:spLocks xmlns:a="http://schemas.openxmlformats.org/drawingml/2006/main" noGrp="1"/>
+          </p:cNvSpPr>
+          <p:nvPr/>
+        </p:nvSpPr>
+        <p:spPr>
+          <a:xfrm xmlns:a="http://schemas.openxmlformats.org/drawingml/2006/main">
+            <a:off x="1162050" y="5372100"/>
+            <a:ext cx="571500" cy="361950"/>
+          </a:xfrm>
+          <a:prstGeom xmlns:a="http://schemas.openxmlformats.org/drawingml/2006/main" prst="rect">
+            <a:avLst/>
+          </a:prstGeom>
+          <a:noFill xmlns:a="http://schemas.openxmlformats.org/drawingml/2006/main"/>
+          <a:ln xmlns:a="http://schemas.openxmlformats.org/drawingml/2006/main" w="0">
+            <a:noFill/>
+            <a:prstDash val="solid"/>
+          </a:ln>
+        </p:spPr>
+        <p:txBody>
+          <a:bodyPr xmlns:a="http://schemas.openxmlformats.org/drawingml/2006/main" lIns="0" tIns="0" rIns="0" bIns="0" anchor="t"/>
+          <a:lstStyle xmlns:a="http://schemas.openxmlformats.org/drawingml/2006/main"/>
+          <a:p xmlns:a="http://schemas.openxmlformats.org/drawingml/2006/main">
+            <a:pPr>
+              <a:buNone/>
+              <a:defRPr sz="1425" b="1">
+                <a:solidFill>
+                  <a:srgbClr val="00A2EB"/>
+                </a:solidFill>
+                <a:latin typeface="Calibri"/>
+                <a:ea typeface="Calibri"/>
+                <a:cs typeface="Calibri"/>
+              </a:defRPr>
+            </a:pPr>
+            <a:r>
+              <a:rPr sz="1425" b="1">
+                <a:solidFill>
+                  <a:srgbClr val="00A2EB"/>
+                </a:solidFill>
+                <a:latin typeface="Calibri"/>
+                <a:ea typeface="Calibri"/>
+                <a:cs typeface="Calibri"/>
+              </a:rPr>
+              <a:t>04</a:t>
+            </a:r>
+          </a:p>
+        </p:txBody>
+      </p:sp>
+      <p:sp>
+        <p:nvSpPr>
+          <p:cNvPr id="16" name="">
+            <a:extLst xmlns:a="http://schemas.openxmlformats.org/drawingml/2006/main">
+              <a:ext uri="{FF2B5EF4-FFF2-40B4-BE49-F238E27FC236}">
+                <a16:creationId xmlns:a16="http://schemas.microsoft.com/office/drawing/2014/main" id="{E2CA7A6E-EE89-4E7C-A0E4-A0D3E684AC6C}"/>
+              </a:ext>
+            </a:extLst>
+          </p:cNvPr>
+          <p:cNvSpPr>
+            <a:spLocks xmlns:a="http://schemas.openxmlformats.org/drawingml/2006/main" noGrp="1"/>
+          </p:cNvSpPr>
+          <p:nvPr/>
+        </p:nvSpPr>
+        <p:spPr>
+          <a:xfrm xmlns:a="http://schemas.openxmlformats.org/drawingml/2006/main">
+            <a:off x="2143125" y="5334000"/>
+            <a:ext cx="5905500" cy="457200"/>
+          </a:xfrm>
+          <a:prstGeom xmlns:a="http://schemas.openxmlformats.org/drawingml/2006/main" prst="rect">
+            <a:avLst/>
+          </a:prstGeom>
+          <a:noFill xmlns:a="http://schemas.openxmlformats.org/drawingml/2006/main"/>
+          <a:ln xmlns:a="http://schemas.openxmlformats.org/drawingml/2006/main" w="0">
+            <a:noFill/>
+            <a:prstDash val="solid"/>
+          </a:ln>
+        </p:spPr>
+        <p:txBody>
+          <a:bodyPr xmlns:a="http://schemas.openxmlformats.org/drawingml/2006/main" lIns="0" tIns="0" rIns="0" bIns="0" anchor="t"/>
+          <a:lstStyle xmlns:a="http://schemas.openxmlformats.org/drawingml/2006/main"/>
+          <a:p xmlns:a="http://schemas.openxmlformats.org/drawingml/2006/main">
+            <a:pPr>
+              <a:buNone/>
+              <a:defRPr sz="2100" b="1">
+                <a:solidFill>
+                  <a:srgbClr val="051C2A"/>
+                </a:solidFill>
+                <a:latin typeface="Calibri"/>
+                <a:ea typeface="Calibri"/>
+                <a:cs typeface="Calibri"/>
+              </a:defRPr>
+            </a:pPr>
+            <a:r>
+              <a:rPr sz="2100" b="1">
+                <a:solidFill>
+                  <a:srgbClr val="051C2A"/>
+                </a:solidFill>
+                <a:latin typeface="Calibri"/>
+                <a:ea typeface="Calibri"/>
+                <a:cs typeface="Calibri"/>
+              </a:rPr>
+              <a:t>One explicit limitation</a:t>
+            </a:r>
+          </a:p>
+        </p:txBody>
+      </p:sp>
+      <p:sp>
+        <p:nvSpPr>
+          <p:cNvPr id="17" name="">
+            <a:extLst xmlns:a="http://schemas.openxmlformats.org/drawingml/2006/main">
+              <a:ext uri="{FF2B5EF4-FFF2-40B4-BE49-F238E27FC236}">
+                <a16:creationId xmlns:a16="http://schemas.microsoft.com/office/drawing/2014/main" id="{EF9232DB-9ADA-4EC0-9488-23F6FAAFFAB6}"/>
+              </a:ext>
+            </a:extLst>
+          </p:cNvPr>
+          <p:cNvSpPr>
+            <a:spLocks xmlns:a="http://schemas.openxmlformats.org/drawingml/2006/main" noGrp="1"/>
+          </p:cNvSpPr>
+          <p:nvPr/>
+        </p:nvSpPr>
+        <p:spPr>
+          <a:xfrm xmlns:a="http://schemas.openxmlformats.org/drawingml/2006/main">
+            <a:off x="8572500" y="5372100"/>
+            <a:ext cx="1047750" cy="323850"/>
+          </a:xfrm>
+          <a:prstGeom xmlns:a="http://schemas.openxmlformats.org/drawingml/2006/main" prst="rect">
+            <a:avLst/>
+          </a:prstGeom>
+          <a:noFill xmlns:a="http://schemas.openxmlformats.org/drawingml/2006/main"/>
+          <a:ln xmlns:a="http://schemas.openxmlformats.org/drawingml/2006/main" w="0">
+            <a:noFill/>
+            <a:prstDash val="solid"/>
+          </a:ln>
+        </p:spPr>
+        <p:txBody>
+          <a:bodyPr xmlns:a="http://schemas.openxmlformats.org/drawingml/2006/main" lIns="0" tIns="0" rIns="0" bIns="0" anchor="t"/>
+          <a:lstStyle xmlns:a="http://schemas.openxmlformats.org/drawingml/2006/main"/>
+          <a:p xmlns:a="http://schemas.openxmlformats.org/drawingml/2006/main">
+            <a:pPr>
+              <a:buNone/>
+              <a:defRPr sz="1350" b="1">
+                <a:solidFill>
+                  <a:srgbClr val="1F40CB"/>
+                </a:solidFill>
+                <a:latin typeface="Calibri"/>
+                <a:ea typeface="Calibri"/>
+                <a:cs typeface="Calibri"/>
+              </a:defRPr>
+            </a:pPr>
+            <a:r>
+              <a:rPr sz="1350" b="1">
+                <a:solidFill>
+                  <a:srgbClr val="1F40CB"/>
+                </a:solidFill>
+                <a:latin typeface="Calibri"/>
+                <a:ea typeface="Calibri"/>
+                <a:cs typeface="Calibri"/>
+              </a:rPr>
+              <a:t>PASS</a:t>
+            </a:r>
+          </a:p>
+        </p:txBody>
+      </p:sp>
+      <p:sp>
+        <p:nvSpPr>
+          <p:cNvPr id="18" name="">
+            <a:extLst xmlns:a="http://schemas.openxmlformats.org/drawingml/2006/main">
+              <a:ext uri="{FF2B5EF4-FFF2-40B4-BE49-F238E27FC236}">
+                <a16:creationId xmlns:a16="http://schemas.microsoft.com/office/drawing/2014/main" id="{48F021EC-EF4B-4696-AC90-EE4C0AB71651}"/>
+              </a:ext>
+            </a:extLst>
+          </p:cNvPr>
+          <p:cNvSpPr>
+            <a:spLocks xmlns:a="http://schemas.openxmlformats.org/drawingml/2006/main" noGrp="1"/>
+          </p:cNvSpPr>
+          <p:nvPr/>
+        </p:nvSpPr>
+        <p:spPr>
+          <a:xfrm xmlns:a="http://schemas.openxmlformats.org/drawingml/2006/main">
+            <a:off x="2143125" y="5924550"/>
+            <a:ext cx="7524750" cy="19050"/>
+          </a:xfrm>
+          <a:prstGeom xmlns:a="http://schemas.openxmlformats.org/drawingml/2006/main" prst="rect">
+            <a:avLst/>
+          </a:prstGeom>
+          <a:solidFill xmlns:a="http://schemas.openxmlformats.org/drawingml/2006/main">
+            <a:srgbClr val="E4E6E8"/>
+          </a:solidFill>
+          <a:ln xmlns:a="http://schemas.openxmlformats.org/drawingml/2006/main" w="9525">
+            <a:solidFill>
+              <a:srgbClr val="E4E6E8"/>
+            </a:solidFill>
+            <a:prstDash val="solid"/>
+          </a:ln>
+        </p:spPr>
+      </p:sp>
+      <p:sp>
+        <p:nvSpPr>
           <p:cNvPr id="19" name="">
             <a:extLst xmlns:a="http://schemas.openxmlformats.org/drawingml/2006/main">
               <a:ext uri="{FF2B5EF4-FFF2-40B4-BE49-F238E27FC236}">
@@ -6873,6 +8301,7 @@
           <a:lstStyle xmlns:a="http://schemas.openxmlformats.org/drawingml/2006/main"/>
           <a:p xmlns:a="http://schemas.openxmlformats.org/drawingml/2006/main">
             <a:pPr algn="ctr">
+              <a:buNone/>
               <a:defRPr sz="1425" b="1">
                 <a:solidFill>
                   <a:srgbClr val="00A2EB"/>
@@ -6891,7 +8320,7 @@
                 <a:ea typeface="Calibri"/>
                 <a:cs typeface="Calibri"/>
               </a:rPr>
-              <a:t>NOW RUN</a:t>
+              <a:t>COURSE PATH</a:t>
             </a:r>
           </a:p>
         </p:txBody>
@@ -6929,6 +8358,7 @@
           <a:lstStyle xmlns:a="http://schemas.openxmlformats.org/drawingml/2006/main"/>
           <a:p xmlns:a="http://schemas.openxmlformats.org/drawingml/2006/main">
             <a:pPr algn="ctr">
+              <a:buNone/>
               <a:defRPr sz="2550" b="1">
                 <a:solidFill>
                   <a:srgbClr val="FFFFFF"/>
@@ -6985,6 +8415,7 @@
           <a:lstStyle xmlns:a="http://schemas.openxmlformats.org/drawingml/2006/main"/>
           <a:p xmlns:a="http://schemas.openxmlformats.org/drawingml/2006/main">
             <a:pPr algn="ctr">
+              <a:buNone/>
               <a:defRPr sz="1650">
                 <a:solidFill>
                   <a:srgbClr val="FFFFFF"/>
@@ -7003,7 +8434,8 @@
                 <a:ea typeface="Calibri"/>
                 <a:cs typeface="Calibri"/>
               </a:rPr>
-              <a:t>Fail → ground → score → switch provider</a:t>
+              <a:t>Measure → ground → verify
+then structured output → RAG</a:t>
             </a:r>
           </a:p>
         </p:txBody>
@@ -7041,6 +8473,7 @@
           <a:lstStyle xmlns:a="http://schemas.openxmlformats.org/drawingml/2006/main"/>
           <a:p xmlns:a="http://schemas.openxmlformats.org/drawingml/2006/main">
             <a:pPr>
+              <a:buNone/>
               <a:defRPr sz="1650">
                 <a:solidFill>
                   <a:srgbClr val="373738"/>
@@ -7059,7 +8492,7 @@
                 <a:ea typeface="Calibri"/>
                 <a:cs typeface="Calibri"/>
               </a:rPr>
-              <a:t>A 4/4 score is a teaching checkpoint—not an investment-quality certification.</a:t>
+              <a:t>Next: structured output → context → RAG → evaluation → agents → MCP.</a:t>
             </a:r>
           </a:p>
         </p:txBody>
@@ -7163,6 +8596,7 @@
           <a:lstStyle xmlns:a="http://schemas.openxmlformats.org/drawingml/2006/main"/>
           <a:p xmlns:a="http://schemas.openxmlformats.org/drawingml/2006/main">
             <a:pPr>
+              <a:buNone/>
               <a:defRPr sz="1275">
                 <a:solidFill>
                   <a:srgbClr val="9E9FA2"/>
@@ -7219,6 +8653,7 @@
           <a:lstStyle xmlns:a="http://schemas.openxmlformats.org/drawingml/2006/main"/>
           <a:p xmlns:a="http://schemas.openxmlformats.org/drawingml/2006/main">
             <a:pPr algn="r">
+              <a:buNone/>
               <a:defRPr sz="1200" b="1">
                 <a:solidFill>
                   <a:srgbClr val="9E9FA2"/>
@@ -7275,6 +8710,7 @@
           <a:lstStyle xmlns:a="http://schemas.openxmlformats.org/drawingml/2006/main"/>
           <a:p xmlns:a="http://schemas.openxmlformats.org/drawingml/2006/main">
             <a:pPr algn="r">
+              <a:buNone/>
               <a:defRPr sz="1200" b="1">
                 <a:solidFill>
                   <a:srgbClr val="9E9FA2"/>
@@ -7293,7 +8729,7 @@
                 <a:ea typeface="Calibri"/>
                 <a:cs typeface="Calibri"/>
               </a:rPr>
-              <a:t>06</a:t>
+              <a:t>07</a:t>
             </a:r>
           </a:p>
         </p:txBody>

--- a/decks/01-model-gateway.pptx
+++ b/decks/01-model-gateway.pptx
@@ -2,19 +2,19 @@
 <file path=ppt/presentation.xml><?xml version="1.0" encoding="utf-8"?>
 <p:presentation xmlns:p="http://schemas.openxmlformats.org/presentationml/2006/main">
   <p:sldMasterIdLst>
-    <p:sldMasterId xmlns:r="http://schemas.openxmlformats.org/officeDocument/2006/relationships" id="2147483648" r:id="R54e34e7b368c488f"/>
+    <p:sldMasterId xmlns:r="http://schemas.openxmlformats.org/officeDocument/2006/relationships" id="2147483648" r:id="R41683231b11e4910"/>
   </p:sldMasterIdLst>
   <p:notesMasterIdLst>
-    <p:notesMasterId xmlns:r="http://schemas.openxmlformats.org/officeDocument/2006/relationships" r:id="Rd6648327a55b4ea5"/>
+    <p:notesMasterId xmlns:r="http://schemas.openxmlformats.org/officeDocument/2006/relationships" r:id="Rde1b12a7805044a1"/>
   </p:notesMasterIdLst>
   <p:sldIdLst>
-    <p:sldId xmlns:r="http://schemas.openxmlformats.org/officeDocument/2006/relationships" id="256" r:id="R2f29c20f8b69456e"/>
-    <p:sldId xmlns:r="http://schemas.openxmlformats.org/officeDocument/2006/relationships" id="257" r:id="R8fd13cd03d4d4af8"/>
-    <p:sldId xmlns:r="http://schemas.openxmlformats.org/officeDocument/2006/relationships" id="258" r:id="Rb53e804ead6f4b1e"/>
-    <p:sldId xmlns:r="http://schemas.openxmlformats.org/officeDocument/2006/relationships" id="259" r:id="Rc786dfdc97184574"/>
-    <p:sldId xmlns:r="http://schemas.openxmlformats.org/officeDocument/2006/relationships" id="260" r:id="R0b2adc85bd0340a1"/>
-    <p:sldId xmlns:r="http://schemas.openxmlformats.org/officeDocument/2006/relationships" id="261" r:id="Rf0449dc3f22c43b7"/>
-    <p:sldId xmlns:r="http://schemas.openxmlformats.org/officeDocument/2006/relationships" id="262" r:id="R92251e9c5c304fff"/>
+    <p:sldId xmlns:r="http://schemas.openxmlformats.org/officeDocument/2006/relationships" id="256" r:id="Rce3885c9e95d48f9"/>
+    <p:sldId xmlns:r="http://schemas.openxmlformats.org/officeDocument/2006/relationships" id="257" r:id="R47cdc41766a84a13"/>
+    <p:sldId xmlns:r="http://schemas.openxmlformats.org/officeDocument/2006/relationships" id="258" r:id="R3081b99bd24646c6"/>
+    <p:sldId xmlns:r="http://schemas.openxmlformats.org/officeDocument/2006/relationships" id="259" r:id="R2b0bd4dff12b452b"/>
+    <p:sldId xmlns:r="http://schemas.openxmlformats.org/officeDocument/2006/relationships" id="260" r:id="R3b71dcb289014f65"/>
+    <p:sldId xmlns:r="http://schemas.openxmlformats.org/officeDocument/2006/relationships" id="261" r:id="R8f4c3062c45a4ae4"/>
+    <p:sldId xmlns:r="http://schemas.openxmlformats.org/officeDocument/2006/relationships" id="262" r:id="R0801619bc42041a5"/>
   </p:sldIdLst>
   <p:sldSz cx="15240000" cy="8572500"/>
   <p:notesSz cx="6858000" cy="9144000"/>
@@ -1096,7 +1096,7 @@
   </p:cSld>
   <p:clrMap bg1="lt1" tx1="dk1" bg2="lt2" tx2="dk2" accent1="accent1" accent2="accent2" accent3="accent3" accent4="accent4" accent5="accent5" accent6="accent6" hlink="hlink" folHlink="folHlink"/>
   <p:sldLayoutIdLst>
-    <p:sldLayoutId xmlns:r="http://schemas.openxmlformats.org/officeDocument/2006/relationships" id="2147483649" r:id="R95270bb7b21a4532"/>
+    <p:sldLayoutId xmlns:r="http://schemas.openxmlformats.org/officeDocument/2006/relationships" id="2147483649" r:id="R0efea88707184c93"/>
   </p:sldLayoutIdLst>
   <p:txStyles>
     <p:titleStyle>
@@ -1955,7 +1955,7 @@
                 <a:ea typeface="Calibri"/>
                 <a:cs typeface="Calibri"/>
               </a:rPr>
-              <a:t>Financial Analyst Copilot</a:t>
+              <a:t>First Finance - Arnaud Demes</a:t>
             </a:r>
           </a:p>
         </p:txBody>

--- a/decks/01-model-gateway.pptx
+++ b/decks/01-model-gateway.pptx
@@ -2,19 +2,21 @@
 <file path=ppt/presentation.xml><?xml version="1.0" encoding="utf-8"?>
 <p:presentation xmlns:p="http://schemas.openxmlformats.org/presentationml/2006/main">
   <p:sldMasterIdLst>
-    <p:sldMasterId xmlns:r="http://schemas.openxmlformats.org/officeDocument/2006/relationships" id="2147483648" r:id="R41683231b11e4910"/>
+    <p:sldMasterId xmlns:r="http://schemas.openxmlformats.org/officeDocument/2006/relationships" id="2147483648" r:id="R5e730159e7e04962"/>
   </p:sldMasterIdLst>
   <p:notesMasterIdLst>
-    <p:notesMasterId xmlns:r="http://schemas.openxmlformats.org/officeDocument/2006/relationships" r:id="Rde1b12a7805044a1"/>
+    <p:notesMasterId xmlns:r="http://schemas.openxmlformats.org/officeDocument/2006/relationships" r:id="R436dee3bc4a74dab"/>
   </p:notesMasterIdLst>
   <p:sldIdLst>
-    <p:sldId xmlns:r="http://schemas.openxmlformats.org/officeDocument/2006/relationships" id="256" r:id="Rce3885c9e95d48f9"/>
-    <p:sldId xmlns:r="http://schemas.openxmlformats.org/officeDocument/2006/relationships" id="257" r:id="R47cdc41766a84a13"/>
-    <p:sldId xmlns:r="http://schemas.openxmlformats.org/officeDocument/2006/relationships" id="258" r:id="R3081b99bd24646c6"/>
-    <p:sldId xmlns:r="http://schemas.openxmlformats.org/officeDocument/2006/relationships" id="259" r:id="R2b0bd4dff12b452b"/>
-    <p:sldId xmlns:r="http://schemas.openxmlformats.org/officeDocument/2006/relationships" id="260" r:id="R3b71dcb289014f65"/>
-    <p:sldId xmlns:r="http://schemas.openxmlformats.org/officeDocument/2006/relationships" id="261" r:id="R8f4c3062c45a4ae4"/>
-    <p:sldId xmlns:r="http://schemas.openxmlformats.org/officeDocument/2006/relationships" id="262" r:id="R0801619bc42041a5"/>
+    <p:sldId xmlns:r="http://schemas.openxmlformats.org/officeDocument/2006/relationships" id="256" r:id="Rd3165d101bf84a70"/>
+    <p:sldId xmlns:r="http://schemas.openxmlformats.org/officeDocument/2006/relationships" id="257" r:id="R85d6e5e467224f40"/>
+    <p:sldId xmlns:r="http://schemas.openxmlformats.org/officeDocument/2006/relationships" id="258" r:id="Rda0d5255683a429e"/>
+    <p:sldId xmlns:r="http://schemas.openxmlformats.org/officeDocument/2006/relationships" id="259" r:id="Rf439c962175c493f"/>
+    <p:sldId xmlns:r="http://schemas.openxmlformats.org/officeDocument/2006/relationships" id="260" r:id="R5fce838a1c8a478a"/>
+    <p:sldId xmlns:r="http://schemas.openxmlformats.org/officeDocument/2006/relationships" id="261" r:id="R6fe314478f914e65"/>
+    <p:sldId xmlns:r="http://schemas.openxmlformats.org/officeDocument/2006/relationships" id="262" r:id="R76e80cdc47e346b3"/>
+    <p:sldId xmlns:r="http://schemas.openxmlformats.org/officeDocument/2006/relationships" id="263" r:id="Rd5d34eb10cb043b2"/>
+    <p:sldId xmlns:r="http://schemas.openxmlformats.org/officeDocument/2006/relationships" id="264" r:id="R844f16d6b29749ff"/>
   </p:sldIdLst>
   <p:sldSz cx="15240000" cy="8572500"/>
   <p:notesSz cx="6858000" cy="9144000"/>
@@ -1058,6 +1060,196 @@
 </p:notes>
 </file>
 
+<file path=ppt/notesSlides/notesSlide8.xml><?xml version="1.0" encoding="utf-8"?>
+<p:notes xmlns:p="http://schemas.openxmlformats.org/presentationml/2006/main">
+  <p:cSld>
+    <p:spTree>
+      <p:nvGrpSpPr>
+        <p:cNvPr id="1" name=""/>
+        <p:cNvGrpSpPr/>
+        <p:nvPr/>
+      </p:nvGrpSpPr>
+      <p:grpSpPr>
+        <a:xfrm xmlns:a="http://schemas.openxmlformats.org/drawingml/2006/main"/>
+      </p:grpSpPr>
+      <p:sp>
+        <p:nvSpPr>
+          <p:cNvPr id="2" name="Slide Image Placeholder 1"/>
+          <p:cNvSpPr>
+            <a:spLocks xmlns:a="http://schemas.openxmlformats.org/drawingml/2006/main" noGrp="1"/>
+          </p:cNvSpPr>
+          <p:nvPr>
+            <p:ph type="sldImg" idx="0"/>
+          </p:nvPr>
+        </p:nvSpPr>
+        <p:spPr/>
+      </p:sp>
+      <p:sp>
+        <p:nvSpPr>
+          <p:cNvPr id="3" name="Notes Placeholder 2"/>
+          <p:cNvSpPr>
+            <a:spLocks xmlns:a="http://schemas.openxmlformats.org/drawingml/2006/main" noGrp="1"/>
+          </p:cNvSpPr>
+          <p:nvPr>
+            <p:ph type="body" idx="1"/>
+          </p:nvPr>
+        </p:nvSpPr>
+        <p:spPr/>
+        <p:txBody>
+          <a:bodyPr xmlns:a="http://schemas.openxmlformats.org/drawingml/2006/main"/>
+          <a:lstStyle xmlns:a="http://schemas.openxmlformats.org/drawingml/2006/main"/>
+          <a:p xmlns:a="http://schemas.openxmlformats.org/drawingml/2006/main">
+            <a:r>
+              <a:t>Instructor purpose: Check the three core decisions before the lesson closes.</a:t>
+            </a:r>
+          </a:p>
+          <a:p xmlns:a="http://schemas.openxmlformats.org/drawingml/2006/main">
+            <a:r>
+              <a:t>Planned timing: 3 minutes.</a:t>
+            </a:r>
+          </a:p>
+          <a:p xmlns:a="http://schemas.openxmlformats.org/drawingml/2006/main">
+            <a:r>
+              <a:t>Facilitation: ask for one letter per question.</a:t>
+            </a:r>
+          </a:p>
+          <a:p xmlns:a="http://schemas.openxmlformats.org/drawingml/2006/main">
+            <a:r>
+              <a:t>[Sources]</a:t>
+            </a:r>
+          </a:p>
+          <a:p xmlns:a="http://schemas.openxmlformats.org/drawingml/2006/main">
+            <a:r>
+              <a:t>- chapters/01-model-gateway.md</a:t>
+            </a:r>
+          </a:p>
+          <a:p xmlns:a="http://schemas.openxmlformats.org/drawingml/2006/main">
+            <a:r>
+              <a:t>[/Sources]</a:t>
+            </a:r>
+          </a:p>
+        </p:txBody>
+      </p:sp>
+      <p:sp>
+        <p:nvSpPr>
+          <p:cNvPr id="4" name="Slide Number Placeholder 3"/>
+          <p:cNvSpPr>
+            <a:spLocks xmlns:a="http://schemas.openxmlformats.org/drawingml/2006/main" noGrp="1"/>
+          </p:cNvSpPr>
+          <p:nvPr>
+            <p:ph type="sldNum" idx="5"/>
+          </p:nvPr>
+        </p:nvSpPr>
+        <p:spPr/>
+        <p:txBody>
+          <a:bodyPr xmlns:a="http://schemas.openxmlformats.org/drawingml/2006/main"/>
+          <a:lstStyle xmlns:a="http://schemas.openxmlformats.org/drawingml/2006/main"/>
+          <a:p xmlns:a="http://schemas.openxmlformats.org/drawingml/2006/main"/>
+        </p:txBody>
+      </p:sp>
+    </p:spTree>
+  </p:cSld>
+  <p:clrMapOvr>
+    <a:masterClrMapping xmlns:a="http://schemas.openxmlformats.org/drawingml/2006/main"/>
+  </p:clrMapOvr>
+</p:notes>
+</file>
+
+<file path=ppt/notesSlides/notesSlide9.xml><?xml version="1.0" encoding="utf-8"?>
+<p:notes xmlns:p="http://schemas.openxmlformats.org/presentationml/2006/main">
+  <p:cSld>
+    <p:spTree>
+      <p:nvGrpSpPr>
+        <p:cNvPr id="1" name=""/>
+        <p:cNvGrpSpPr/>
+        <p:nvPr/>
+      </p:nvGrpSpPr>
+      <p:grpSpPr>
+        <a:xfrm xmlns:a="http://schemas.openxmlformats.org/drawingml/2006/main"/>
+      </p:grpSpPr>
+      <p:sp>
+        <p:nvSpPr>
+          <p:cNvPr id="2" name="Slide Image Placeholder 1"/>
+          <p:cNvSpPr>
+            <a:spLocks xmlns:a="http://schemas.openxmlformats.org/drawingml/2006/main" noGrp="1"/>
+          </p:cNvSpPr>
+          <p:nvPr>
+            <p:ph type="sldImg" idx="0"/>
+          </p:nvPr>
+        </p:nvSpPr>
+        <p:spPr/>
+      </p:sp>
+      <p:sp>
+        <p:nvSpPr>
+          <p:cNvPr id="3" name="Notes Placeholder 2"/>
+          <p:cNvSpPr>
+            <a:spLocks xmlns:a="http://schemas.openxmlformats.org/drawingml/2006/main" noGrp="1"/>
+          </p:cNvSpPr>
+          <p:nvPr>
+            <p:ph type="body" idx="1"/>
+          </p:nvPr>
+        </p:nvSpPr>
+        <p:spPr/>
+        <p:txBody>
+          <a:bodyPr xmlns:a="http://schemas.openxmlformats.org/drawingml/2006/main"/>
+          <a:lstStyle xmlns:a="http://schemas.openxmlformats.org/drawingml/2006/main"/>
+          <a:p xmlns:a="http://schemas.openxmlformats.org/drawingml/2006/main">
+            <a:r>
+              <a:t>Instructor purpose: Correct the quiz and restate the practical rule behind each answer.</a:t>
+            </a:r>
+          </a:p>
+          <a:p xmlns:a="http://schemas.openxmlformats.org/drawingml/2006/main">
+            <a:r>
+              <a:t>Planned timing: 3 minutes.</a:t>
+            </a:r>
+          </a:p>
+          <a:p xmlns:a="http://schemas.openxmlformats.org/drawingml/2006/main">
+            <a:r>
+              <a:t>Facilitation: ask learners to explain each rule in their own words.</a:t>
+            </a:r>
+          </a:p>
+          <a:p xmlns:a="http://schemas.openxmlformats.org/drawingml/2006/main">
+            <a:r>
+              <a:t>[Sources]</a:t>
+            </a:r>
+          </a:p>
+          <a:p xmlns:a="http://schemas.openxmlformats.org/drawingml/2006/main">
+            <a:r>
+              <a:t>- chapters/01-model-gateway.md</a:t>
+            </a:r>
+          </a:p>
+          <a:p xmlns:a="http://schemas.openxmlformats.org/drawingml/2006/main">
+            <a:r>
+              <a:t>[/Sources]</a:t>
+            </a:r>
+          </a:p>
+        </p:txBody>
+      </p:sp>
+      <p:sp>
+        <p:nvSpPr>
+          <p:cNvPr id="4" name="Slide Number Placeholder 3"/>
+          <p:cNvSpPr>
+            <a:spLocks xmlns:a="http://schemas.openxmlformats.org/drawingml/2006/main" noGrp="1"/>
+          </p:cNvSpPr>
+          <p:nvPr>
+            <p:ph type="sldNum" idx="5"/>
+          </p:nvPr>
+        </p:nvSpPr>
+        <p:spPr/>
+        <p:txBody>
+          <a:bodyPr xmlns:a="http://schemas.openxmlformats.org/drawingml/2006/main"/>
+          <a:lstStyle xmlns:a="http://schemas.openxmlformats.org/drawingml/2006/main"/>
+          <a:p xmlns:a="http://schemas.openxmlformats.org/drawingml/2006/main"/>
+        </p:txBody>
+      </p:sp>
+    </p:spTree>
+  </p:cSld>
+  <p:clrMapOvr>
+    <a:masterClrMapping xmlns:a="http://schemas.openxmlformats.org/drawingml/2006/main"/>
+  </p:clrMapOvr>
+</p:notes>
+</file>
+
 <file path=ppt/slideLayouts/slideLayout1.xml><?xml version="1.0" encoding="utf-8"?>
 <p:sldLayout xmlns:p="http://schemas.openxmlformats.org/presentationml/2006/main" type="title">
   <p:cSld name="Title Slide">
@@ -1096,7 +1288,7 @@
   </p:cSld>
   <p:clrMap bg1="lt1" tx1="dk1" bg2="lt2" tx2="dk2" accent1="accent1" accent2="accent2" accent3="accent3" accent4="accent4" accent5="accent5" accent6="accent6" hlink="hlink" folHlink="folHlink"/>
   <p:sldLayoutIdLst>
-    <p:sldLayoutId xmlns:r="http://schemas.openxmlformats.org/officeDocument/2006/relationships" id="2147483649" r:id="R0efea88707184c93"/>
+    <p:sldLayoutId xmlns:r="http://schemas.openxmlformats.org/officeDocument/2006/relationships" id="2147483649" r:id="R28fe8e2ba2524cfb"/>
   </p:sldLayoutIdLst>
   <p:txStyles>
     <p:titleStyle>
@@ -8744,6 +8936,1300 @@
 </p:sld>
 </file>
 
+<file path=ppt/slides/slide8.xml><?xml version="1.0" encoding="utf-8"?>
+<p:sld xmlns:p="http://schemas.openxmlformats.org/presentationml/2006/main">
+  <p:cSld>
+    <p:bg>
+      <p:bgPr>
+        <a:solidFill xmlns:a="http://schemas.openxmlformats.org/drawingml/2006/main">
+          <a:srgbClr val="F5F5F5"/>
+        </a:solidFill>
+      </p:bgPr>
+    </p:bg>
+    <p:spTree>
+      <p:nvGrpSpPr>
+        <p:cNvPr id="1" name=""/>
+        <p:cNvGrpSpPr/>
+        <p:nvPr/>
+      </p:nvGrpSpPr>
+      <p:grpSpPr>
+        <a:xfrm xmlns:a="http://schemas.openxmlformats.org/drawingml/2006/main"/>
+      </p:grpSpPr>
+      <p:sp>
+        <p:nvSpPr>
+          <p:cNvPr id="7" name="">
+            <a:extLst xmlns:a="http://schemas.openxmlformats.org/drawingml/2006/main">
+              <a:ext uri="{FF2B5EF4-FFF2-40B4-BE49-F238E27FC236}">
+                <a16:creationId xmlns:a16="http://schemas.microsoft.com/office/drawing/2014/main" id="{1291AC7A-C390-4918-960F-B031B7C93A63}"/>
+              </a:ext>
+            </a:extLst>
+          </p:cNvPr>
+          <p:cNvSpPr>
+            <a:spLocks xmlns:a="http://schemas.openxmlformats.org/drawingml/2006/main" noGrp="1"/>
+          </p:cNvSpPr>
+          <p:nvPr/>
+        </p:nvSpPr>
+        <p:spPr>
+          <a:xfrm xmlns:a="http://schemas.openxmlformats.org/drawingml/2006/main">
+            <a:off x="971550" y="781050"/>
+            <a:ext cx="1257300" cy="76200"/>
+          </a:xfrm>
+          <a:prstGeom xmlns:a="http://schemas.openxmlformats.org/drawingml/2006/main" prst="rect">
+            <a:avLst/>
+          </a:prstGeom>
+          <a:solidFill xmlns:a="http://schemas.openxmlformats.org/drawingml/2006/main">
+            <a:srgbClr val="00A2EB"/>
+          </a:solidFill>
+          <a:ln xmlns:a="http://schemas.openxmlformats.org/drawingml/2006/main" w="9525">
+            <a:solidFill>
+              <a:srgbClr val="00A2EB"/>
+            </a:solidFill>
+            <a:prstDash val="solid"/>
+          </a:ln>
+        </p:spPr>
+      </p:sp>
+      <p:sp>
+        <p:nvSpPr>
+          <p:cNvPr id="2" name="">
+            <a:extLst xmlns:a="http://schemas.openxmlformats.org/drawingml/2006/main">
+              <a:ext uri="{FF2B5EF4-FFF2-40B4-BE49-F238E27FC236}">
+                <a16:creationId xmlns:a16="http://schemas.microsoft.com/office/drawing/2014/main" id="{64682EC5-19B2-4E56-87B3-7ADF11BC6291}"/>
+              </a:ext>
+            </a:extLst>
+          </p:cNvPr>
+          <p:cNvSpPr>
+            <a:spLocks xmlns:a="http://schemas.openxmlformats.org/drawingml/2006/main" noGrp="1"/>
+          </p:cNvSpPr>
+          <p:nvPr/>
+        </p:nvSpPr>
+        <p:spPr>
+          <a:xfrm xmlns:a="http://schemas.openxmlformats.org/drawingml/2006/main">
+            <a:off x="971550" y="1104900"/>
+            <a:ext cx="3048000" cy="304800"/>
+          </a:xfrm>
+          <a:prstGeom xmlns:a="http://schemas.openxmlformats.org/drawingml/2006/main" prst="rect">
+            <a:avLst/>
+          </a:prstGeom>
+          <a:noFill xmlns:a="http://schemas.openxmlformats.org/drawingml/2006/main"/>
+          <a:ln xmlns:a="http://schemas.openxmlformats.org/drawingml/2006/main" w="0">
+            <a:noFill/>
+            <a:prstDash val="solid"/>
+          </a:ln>
+        </p:spPr>
+        <p:txBody>
+          <a:bodyPr xmlns:a="http://schemas.openxmlformats.org/drawingml/2006/main" lIns="0" tIns="0" rIns="0" bIns="0" anchor="t"/>
+          <a:lstStyle xmlns:a="http://schemas.openxmlformats.org/drawingml/2006/main"/>
+          <a:p xmlns:a="http://schemas.openxmlformats.org/drawingml/2006/main">
+            <a:pPr>
+              <a:buNone/>
+              <a:defRPr sz="1500" b="1">
+                <a:solidFill>
+                  <a:srgbClr val="1F40CB"/>
+                </a:solidFill>
+                <a:latin typeface="Calibri"/>
+                <a:ea typeface="Calibri"/>
+                <a:cs typeface="Calibri"/>
+              </a:defRPr>
+            </a:pPr>
+            <a:r>
+              <a:rPr sz="1500" b="1">
+                <a:solidFill>
+                  <a:srgbClr val="1F40CB"/>
+                </a:solidFill>
+                <a:latin typeface="Calibri"/>
+                <a:ea typeface="Calibri"/>
+                <a:cs typeface="Calibri"/>
+              </a:rPr>
+              <a:t>FIRST FINANCE</a:t>
+            </a:r>
+          </a:p>
+        </p:txBody>
+      </p:sp>
+      <p:sp>
+        <p:nvSpPr>
+          <p:cNvPr id="3" name="">
+            <a:extLst xmlns:a="http://schemas.openxmlformats.org/drawingml/2006/main">
+              <a:ext uri="{FF2B5EF4-FFF2-40B4-BE49-F238E27FC236}">
+                <a16:creationId xmlns:a16="http://schemas.microsoft.com/office/drawing/2014/main" id="{728B1E4B-A80D-4DD8-B9C5-6F19ACF9BC87}"/>
+              </a:ext>
+            </a:extLst>
+          </p:cNvPr>
+          <p:cNvSpPr>
+            <a:spLocks xmlns:a="http://schemas.openxmlformats.org/drawingml/2006/main" noGrp="1"/>
+          </p:cNvSpPr>
+          <p:nvPr/>
+        </p:nvSpPr>
+        <p:spPr>
+          <a:xfrm xmlns:a="http://schemas.openxmlformats.org/drawingml/2006/main">
+            <a:off x="971550" y="2400300"/>
+            <a:ext cx="9334500" cy="1000125"/>
+          </a:xfrm>
+          <a:prstGeom xmlns:a="http://schemas.openxmlformats.org/drawingml/2006/main" prst="rect">
+            <a:avLst/>
+          </a:prstGeom>
+          <a:noFill xmlns:a="http://schemas.openxmlformats.org/drawingml/2006/main"/>
+          <a:ln xmlns:a="http://schemas.openxmlformats.org/drawingml/2006/main" w="0">
+            <a:noFill/>
+            <a:prstDash val="solid"/>
+          </a:ln>
+        </p:spPr>
+        <p:txBody>
+          <a:bodyPr xmlns:a="http://schemas.openxmlformats.org/drawingml/2006/main" lIns="0" tIns="0" rIns="0" bIns="0" anchor="t"/>
+          <a:lstStyle xmlns:a="http://schemas.openxmlformats.org/drawingml/2006/main"/>
+          <a:p xmlns:a="http://schemas.openxmlformats.org/drawingml/2006/main">
+            <a:pPr>
+              <a:buNone/>
+              <a:defRPr sz="4950" b="1">
+                <a:solidFill>
+                  <a:srgbClr val="051C2A"/>
+                </a:solidFill>
+                <a:latin typeface="Calibri"/>
+                <a:ea typeface="Calibri"/>
+                <a:cs typeface="Calibri"/>
+              </a:defRPr>
+            </a:pPr>
+            <a:r>
+              <a:rPr sz="4950" b="1">
+                <a:solidFill>
+                  <a:srgbClr val="051C2A"/>
+                </a:solidFill>
+                <a:latin typeface="Calibri"/>
+                <a:ea typeface="Calibri"/>
+                <a:cs typeface="Calibri"/>
+              </a:rPr>
+              <a:t>Quick quiz</a:t>
+            </a:r>
+          </a:p>
+        </p:txBody>
+      </p:sp>
+      <p:sp>
+        <p:nvSpPr>
+          <p:cNvPr id="4" name="">
+            <a:extLst xmlns:a="http://schemas.openxmlformats.org/drawingml/2006/main">
+              <a:ext uri="{FF2B5EF4-FFF2-40B4-BE49-F238E27FC236}">
+                <a16:creationId xmlns:a16="http://schemas.microsoft.com/office/drawing/2014/main" id="{EE83E63A-968D-469D-97F9-C2D3B82A7E4D}"/>
+              </a:ext>
+            </a:extLst>
+          </p:cNvPr>
+          <p:cNvSpPr>
+            <a:spLocks xmlns:a="http://schemas.openxmlformats.org/drawingml/2006/main" noGrp="1"/>
+          </p:cNvSpPr>
+          <p:nvPr/>
+        </p:nvSpPr>
+        <p:spPr>
+          <a:xfrm xmlns:a="http://schemas.openxmlformats.org/drawingml/2006/main">
+            <a:off x="971550" y="3638550"/>
+            <a:ext cx="10668000" cy="552450"/>
+          </a:xfrm>
+          <a:prstGeom xmlns:a="http://schemas.openxmlformats.org/drawingml/2006/main" prst="rect">
+            <a:avLst/>
+          </a:prstGeom>
+          <a:noFill xmlns:a="http://schemas.openxmlformats.org/drawingml/2006/main"/>
+          <a:ln xmlns:a="http://schemas.openxmlformats.org/drawingml/2006/main" w="0">
+            <a:noFill/>
+            <a:prstDash val="solid"/>
+          </a:ln>
+        </p:spPr>
+        <p:txBody>
+          <a:bodyPr xmlns:a="http://schemas.openxmlformats.org/drawingml/2006/main" lIns="0" tIns="0" rIns="0" bIns="0" anchor="t"/>
+          <a:lstStyle xmlns:a="http://schemas.openxmlformats.org/drawingml/2006/main"/>
+          <a:p xmlns:a="http://schemas.openxmlformats.org/drawingml/2006/main">
+            <a:pPr>
+              <a:buNone/>
+              <a:defRPr sz="2400">
+                <a:solidFill>
+                  <a:srgbClr val="373738"/>
+                </a:solidFill>
+                <a:latin typeface="Calibri"/>
+                <a:ea typeface="Calibri"/>
+                <a:cs typeface="Calibri"/>
+              </a:defRPr>
+            </a:pPr>
+            <a:r>
+              <a:rPr sz="2400">
+                <a:solidFill>
+                  <a:srgbClr val="373738"/>
+                </a:solidFill>
+                <a:latin typeface="Calibri"/>
+                <a:ea typeface="Calibri"/>
+                <a:cs typeface="Calibri"/>
+              </a:rPr>
+              <a:t>Choose one answer for each question.</a:t>
+            </a:r>
+          </a:p>
+        </p:txBody>
+      </p:sp>
+      <p:sp>
+        <p:nvSpPr>
+          <p:cNvPr id="5" name="">
+            <a:extLst xmlns:a="http://schemas.openxmlformats.org/drawingml/2006/main">
+              <a:ext uri="{FF2B5EF4-FFF2-40B4-BE49-F238E27FC236}">
+                <a16:creationId xmlns:a16="http://schemas.microsoft.com/office/drawing/2014/main" id="{001333EC-2C9C-4877-BD13-41F8B87FC676}"/>
+              </a:ext>
+            </a:extLst>
+          </p:cNvPr>
+          <p:cNvSpPr>
+            <a:spLocks xmlns:a="http://schemas.openxmlformats.org/drawingml/2006/main" noGrp="1"/>
+          </p:cNvSpPr>
+          <p:nvPr/>
+        </p:nvSpPr>
+        <p:spPr>
+          <a:xfrm xmlns:a="http://schemas.openxmlformats.org/drawingml/2006/main">
+            <a:off x="971550" y="6610350"/>
+            <a:ext cx="9525000" cy="323850"/>
+          </a:xfrm>
+          <a:prstGeom xmlns:a="http://schemas.openxmlformats.org/drawingml/2006/main" prst="rect">
+            <a:avLst/>
+          </a:prstGeom>
+          <a:noFill xmlns:a="http://schemas.openxmlformats.org/drawingml/2006/main"/>
+          <a:ln xmlns:a="http://schemas.openxmlformats.org/drawingml/2006/main" w="0">
+            <a:noFill/>
+            <a:prstDash val="solid"/>
+          </a:ln>
+        </p:spPr>
+        <p:txBody>
+          <a:bodyPr xmlns:a="http://schemas.openxmlformats.org/drawingml/2006/main" lIns="0" tIns="0" rIns="0" bIns="0" anchor="t"/>
+          <a:lstStyle xmlns:a="http://schemas.openxmlformats.org/drawingml/2006/main"/>
+          <a:p xmlns:a="http://schemas.openxmlformats.org/drawingml/2006/main">
+            <a:pPr>
+              <a:buNone/>
+              <a:defRPr sz="1425" b="1">
+                <a:solidFill>
+                  <a:srgbClr val="1F40CB"/>
+                </a:solidFill>
+                <a:latin typeface="Calibri"/>
+                <a:ea typeface="Calibri"/>
+                <a:cs typeface="Calibri"/>
+              </a:defRPr>
+            </a:pPr>
+            <a:r>
+              <a:rPr sz="1425" b="1">
+                <a:solidFill>
+                  <a:srgbClr val="1F40CB"/>
+                </a:solidFill>
+                <a:latin typeface="Calibri"/>
+                <a:ea typeface="Calibri"/>
+                <a:cs typeface="Calibri"/>
+              </a:rPr>
+              <a:t>LESSON 01  ·  3 QUESTIONS  ·  3 MINUTES</a:t>
+            </a:r>
+          </a:p>
+        </p:txBody>
+      </p:sp>
+      <p:sp>
+        <p:nvSpPr>
+          <p:cNvPr id="6" name="">
+            <a:extLst xmlns:a="http://schemas.openxmlformats.org/drawingml/2006/main">
+              <a:ext uri="{FF2B5EF4-FFF2-40B4-BE49-F238E27FC236}">
+                <a16:creationId xmlns:a16="http://schemas.microsoft.com/office/drawing/2014/main" id="{C1C3877F-F854-40AF-9C55-8A4B72F80AEA}"/>
+              </a:ext>
+            </a:extLst>
+          </p:cNvPr>
+          <p:cNvSpPr>
+            <a:spLocks xmlns:a="http://schemas.openxmlformats.org/drawingml/2006/main" noGrp="1"/>
+          </p:cNvSpPr>
+          <p:nvPr/>
+        </p:nvSpPr>
+        <p:spPr>
+          <a:xfrm xmlns:a="http://schemas.openxmlformats.org/drawingml/2006/main">
+            <a:off x="971550" y="7162800"/>
+            <a:ext cx="5143500" cy="361950"/>
+          </a:xfrm>
+          <a:prstGeom xmlns:a="http://schemas.openxmlformats.org/drawingml/2006/main" prst="rect">
+            <a:avLst/>
+          </a:prstGeom>
+          <a:noFill xmlns:a="http://schemas.openxmlformats.org/drawingml/2006/main"/>
+          <a:ln xmlns:a="http://schemas.openxmlformats.org/drawingml/2006/main" w="0">
+            <a:noFill/>
+            <a:prstDash val="solid"/>
+          </a:ln>
+        </p:spPr>
+        <p:txBody>
+          <a:bodyPr xmlns:a="http://schemas.openxmlformats.org/drawingml/2006/main" lIns="0" tIns="0" rIns="0" bIns="0" anchor="t"/>
+          <a:lstStyle xmlns:a="http://schemas.openxmlformats.org/drawingml/2006/main"/>
+          <a:p xmlns:a="http://schemas.openxmlformats.org/drawingml/2006/main">
+            <a:pPr>
+              <a:buNone/>
+              <a:defRPr sz="1800">
+                <a:solidFill>
+                  <a:srgbClr val="051C2A"/>
+                </a:solidFill>
+                <a:latin typeface="Calibri"/>
+                <a:ea typeface="Calibri"/>
+                <a:cs typeface="Calibri"/>
+              </a:defRPr>
+            </a:pPr>
+            <a:r>
+              <a:rPr sz="1800">
+                <a:solidFill>
+                  <a:srgbClr val="051C2A"/>
+                </a:solidFill>
+                <a:latin typeface="Calibri"/>
+                <a:ea typeface="Calibri"/>
+                <a:cs typeface="Calibri"/>
+              </a:rPr>
+              <a:t>First Finance - Arnaud Demes</a:t>
+            </a:r>
+          </a:p>
+        </p:txBody>
+      </p:sp>
+      <p:sp>
+        <p:nvSpPr>
+          <p:cNvPr id="8" name="quiz-question-1">
+            <a:extLst xmlns:a="http://schemas.openxmlformats.org/drawingml/2006/main">
+              <a:ext uri="{FF2B5EF4-FFF2-40B4-BE49-F238E27FC236}">
+                <a16:creationId xmlns:a16="http://schemas.microsoft.com/office/drawing/2014/main" id="{978B3153-5795-42DC-8F43-92017E252E01}"/>
+              </a:ext>
+            </a:extLst>
+          </p:cNvPr>
+          <p:cNvSpPr>
+            <a:spLocks xmlns:a="http://schemas.openxmlformats.org/drawingml/2006/main" noGrp="1"/>
+          </p:cNvSpPr>
+          <p:nvPr/>
+        </p:nvSpPr>
+        <p:spPr>
+          <a:xfrm xmlns:a="http://schemas.openxmlformats.org/drawingml/2006/main">
+            <a:off x="971550" y="4400550"/>
+            <a:ext cx="13296900" cy="285750"/>
+          </a:xfrm>
+          <a:prstGeom xmlns:a="http://schemas.openxmlformats.org/drawingml/2006/main" prst="rect">
+            <a:avLst/>
+          </a:prstGeom>
+          <a:noFill xmlns:a="http://schemas.openxmlformats.org/drawingml/2006/main"/>
+          <a:ln xmlns:a="http://schemas.openxmlformats.org/drawingml/2006/main" w="0">
+            <a:noFill/>
+            <a:prstDash val="solid"/>
+          </a:ln>
+        </p:spPr>
+        <p:txBody>
+          <a:bodyPr xmlns:a="http://schemas.openxmlformats.org/drawingml/2006/main"/>
+          <a:lstStyle xmlns:a="http://schemas.openxmlformats.org/drawingml/2006/main"/>
+          <a:p xmlns:a="http://schemas.openxmlformats.org/drawingml/2006/main">
+            <a:pPr>
+              <a:defRPr sz="1500" b="1">
+                <a:solidFill>
+                  <a:srgbClr val="001B2E"/>
+                </a:solidFill>
+              </a:defRPr>
+            </a:pPr>
+            <a:r>
+              <a:rPr sz="1500" b="1">
+                <a:solidFill>
+                  <a:srgbClr val="001B2E"/>
+                </a:solidFill>
+              </a:rPr>
+              <a:t>1. Which component hides provider-specific details?</a:t>
+            </a:r>
+          </a:p>
+        </p:txBody>
+      </p:sp>
+      <p:sp>
+        <p:nvSpPr>
+          <p:cNvPr id="9" name="quiz-options-1">
+            <a:extLst xmlns:a="http://schemas.openxmlformats.org/drawingml/2006/main">
+              <a:ext uri="{FF2B5EF4-FFF2-40B4-BE49-F238E27FC236}">
+                <a16:creationId xmlns:a16="http://schemas.microsoft.com/office/drawing/2014/main" id="{8C82FFED-AAD5-46E1-B8A1-DE96978D9347}"/>
+              </a:ext>
+            </a:extLst>
+          </p:cNvPr>
+          <p:cNvSpPr>
+            <a:spLocks xmlns:a="http://schemas.openxmlformats.org/drawingml/2006/main" noGrp="1"/>
+          </p:cNvSpPr>
+          <p:nvPr/>
+        </p:nvSpPr>
+        <p:spPr>
+          <a:xfrm xmlns:a="http://schemas.openxmlformats.org/drawingml/2006/main">
+            <a:off x="1257300" y="4705350"/>
+            <a:ext cx="13011150" cy="247650"/>
+          </a:xfrm>
+          <a:prstGeom xmlns:a="http://schemas.openxmlformats.org/drawingml/2006/main" prst="rect">
+            <a:avLst/>
+          </a:prstGeom>
+          <a:noFill xmlns:a="http://schemas.openxmlformats.org/drawingml/2006/main"/>
+          <a:ln xmlns:a="http://schemas.openxmlformats.org/drawingml/2006/main" w="0">
+            <a:noFill/>
+            <a:prstDash val="solid"/>
+          </a:ln>
+        </p:spPr>
+        <p:txBody>
+          <a:bodyPr xmlns:a="http://schemas.openxmlformats.org/drawingml/2006/main"/>
+          <a:lstStyle xmlns:a="http://schemas.openxmlformats.org/drawingml/2006/main"/>
+          <a:p xmlns:a="http://schemas.openxmlformats.org/drawingml/2006/main">
+            <a:pPr>
+              <a:defRPr sz="1200" b="0">
+                <a:solidFill>
+                  <a:srgbClr val="334155"/>
+                </a:solidFill>
+              </a:defRPr>
+            </a:pPr>
+            <a:r>
+              <a:rPr sz="1200" b="0">
+                <a:solidFill>
+                  <a:srgbClr val="334155"/>
+                </a:solidFill>
+              </a:rPr>
+              <a:t>A  Prompt     |     B  Model gateway     |     C  Vector database</a:t>
+            </a:r>
+          </a:p>
+        </p:txBody>
+      </p:sp>
+      <p:sp>
+        <p:nvSpPr>
+          <p:cNvPr id="10" name="quiz-question-2">
+            <a:extLst xmlns:a="http://schemas.openxmlformats.org/drawingml/2006/main">
+              <a:ext uri="{FF2B5EF4-FFF2-40B4-BE49-F238E27FC236}">
+                <a16:creationId xmlns:a16="http://schemas.microsoft.com/office/drawing/2014/main" id="{04A6BCD9-146A-498F-8ABA-21C97E34DDF2}"/>
+              </a:ext>
+            </a:extLst>
+          </p:cNvPr>
+          <p:cNvSpPr>
+            <a:spLocks xmlns:a="http://schemas.openxmlformats.org/drawingml/2006/main" noGrp="1"/>
+          </p:cNvSpPr>
+          <p:nvPr/>
+        </p:nvSpPr>
+        <p:spPr>
+          <a:xfrm xmlns:a="http://schemas.openxmlformats.org/drawingml/2006/main">
+            <a:off x="971550" y="5086350"/>
+            <a:ext cx="13296900" cy="285750"/>
+          </a:xfrm>
+          <a:prstGeom xmlns:a="http://schemas.openxmlformats.org/drawingml/2006/main" prst="rect">
+            <a:avLst/>
+          </a:prstGeom>
+          <a:noFill xmlns:a="http://schemas.openxmlformats.org/drawingml/2006/main"/>
+          <a:ln xmlns:a="http://schemas.openxmlformats.org/drawingml/2006/main" w="0">
+            <a:noFill/>
+            <a:prstDash val="solid"/>
+          </a:ln>
+        </p:spPr>
+        <p:txBody>
+          <a:bodyPr xmlns:a="http://schemas.openxmlformats.org/drawingml/2006/main"/>
+          <a:lstStyle xmlns:a="http://schemas.openxmlformats.org/drawingml/2006/main"/>
+          <a:p xmlns:a="http://schemas.openxmlformats.org/drawingml/2006/main">
+            <a:pPr>
+              <a:defRPr sz="1500" b="1">
+                <a:solidFill>
+                  <a:srgbClr val="001B2E"/>
+                </a:solidFill>
+              </a:defRPr>
+            </a:pPr>
+            <a:r>
+              <a:rPr sz="1500" b="1">
+                <a:solidFill>
+                  <a:srgbClr val="001B2E"/>
+                </a:solidFill>
+              </a:rPr>
+              <a:t>2. What does streaming mainly change?</a:t>
+            </a:r>
+          </a:p>
+        </p:txBody>
+      </p:sp>
+      <p:sp>
+        <p:nvSpPr>
+          <p:cNvPr id="11" name="quiz-options-2">
+            <a:extLst xmlns:a="http://schemas.openxmlformats.org/drawingml/2006/main">
+              <a:ext uri="{FF2B5EF4-FFF2-40B4-BE49-F238E27FC236}">
+                <a16:creationId xmlns:a16="http://schemas.microsoft.com/office/drawing/2014/main" id="{3FE8F5DC-6EBC-49A4-87F8-1BB09EAC1C79}"/>
+              </a:ext>
+            </a:extLst>
+          </p:cNvPr>
+          <p:cNvSpPr>
+            <a:spLocks xmlns:a="http://schemas.openxmlformats.org/drawingml/2006/main" noGrp="1"/>
+          </p:cNvSpPr>
+          <p:nvPr/>
+        </p:nvSpPr>
+        <p:spPr>
+          <a:xfrm xmlns:a="http://schemas.openxmlformats.org/drawingml/2006/main">
+            <a:off x="1257300" y="5391150"/>
+            <a:ext cx="13011150" cy="247650"/>
+          </a:xfrm>
+          <a:prstGeom xmlns:a="http://schemas.openxmlformats.org/drawingml/2006/main" prst="rect">
+            <a:avLst/>
+          </a:prstGeom>
+          <a:noFill xmlns:a="http://schemas.openxmlformats.org/drawingml/2006/main"/>
+          <a:ln xmlns:a="http://schemas.openxmlformats.org/drawingml/2006/main" w="0">
+            <a:noFill/>
+            <a:prstDash val="solid"/>
+          </a:ln>
+        </p:spPr>
+        <p:txBody>
+          <a:bodyPr xmlns:a="http://schemas.openxmlformats.org/drawingml/2006/main"/>
+          <a:lstStyle xmlns:a="http://schemas.openxmlformats.org/drawingml/2006/main"/>
+          <a:p xmlns:a="http://schemas.openxmlformats.org/drawingml/2006/main">
+            <a:pPr>
+              <a:defRPr sz="1200" b="0">
+                <a:solidFill>
+                  <a:srgbClr val="334155"/>
+                </a:solidFill>
+              </a:defRPr>
+            </a:pPr>
+            <a:r>
+              <a:rPr sz="1200" b="0">
+                <a:solidFill>
+                  <a:srgbClr val="334155"/>
+                </a:solidFill>
+              </a:rPr>
+              <a:t>A  Delivery     |     B  Grounding     |     C  Factual quality</a:t>
+            </a:r>
+          </a:p>
+        </p:txBody>
+      </p:sp>
+      <p:sp>
+        <p:nvSpPr>
+          <p:cNvPr id="12" name="quiz-question-3">
+            <a:extLst xmlns:a="http://schemas.openxmlformats.org/drawingml/2006/main">
+              <a:ext uri="{FF2B5EF4-FFF2-40B4-BE49-F238E27FC236}">
+                <a16:creationId xmlns:a16="http://schemas.microsoft.com/office/drawing/2014/main" id="{01A332D2-FD44-44AA-8DB4-875ACE1E6B0C}"/>
+              </a:ext>
+            </a:extLst>
+          </p:cNvPr>
+          <p:cNvSpPr>
+            <a:spLocks xmlns:a="http://schemas.openxmlformats.org/drawingml/2006/main" noGrp="1"/>
+          </p:cNvSpPr>
+          <p:nvPr/>
+        </p:nvSpPr>
+        <p:spPr>
+          <a:xfrm xmlns:a="http://schemas.openxmlformats.org/drawingml/2006/main">
+            <a:off x="971550" y="5772150"/>
+            <a:ext cx="13296900" cy="285750"/>
+          </a:xfrm>
+          <a:prstGeom xmlns:a="http://schemas.openxmlformats.org/drawingml/2006/main" prst="rect">
+            <a:avLst/>
+          </a:prstGeom>
+          <a:noFill xmlns:a="http://schemas.openxmlformats.org/drawingml/2006/main"/>
+          <a:ln xmlns:a="http://schemas.openxmlformats.org/drawingml/2006/main" w="0">
+            <a:noFill/>
+            <a:prstDash val="solid"/>
+          </a:ln>
+        </p:spPr>
+        <p:txBody>
+          <a:bodyPr xmlns:a="http://schemas.openxmlformats.org/drawingml/2006/main"/>
+          <a:lstStyle xmlns:a="http://schemas.openxmlformats.org/drawingml/2006/main"/>
+          <a:p xmlns:a="http://schemas.openxmlformats.org/drawingml/2006/main">
+            <a:pPr>
+              <a:defRPr sz="1500" b="1">
+                <a:solidFill>
+                  <a:srgbClr val="001B2E"/>
+                </a:solidFill>
+              </a:defRPr>
+            </a:pPr>
+            <a:r>
+              <a:rPr sz="1500" b="1">
+                <a:solidFill>
+                  <a:srgbClr val="001B2E"/>
+                </a:solidFill>
+              </a:rPr>
+              <a:t>3. What should the gateway record when token metadata is missing?</a:t>
+            </a:r>
+          </a:p>
+        </p:txBody>
+      </p:sp>
+      <p:sp>
+        <p:nvSpPr>
+          <p:cNvPr id="13" name="quiz-options-3">
+            <a:extLst xmlns:a="http://schemas.openxmlformats.org/drawingml/2006/main">
+              <a:ext uri="{FF2B5EF4-FFF2-40B4-BE49-F238E27FC236}">
+                <a16:creationId xmlns:a16="http://schemas.microsoft.com/office/drawing/2014/main" id="{C270705C-CBF2-49FA-A949-07B07719CAFA}"/>
+              </a:ext>
+            </a:extLst>
+          </p:cNvPr>
+          <p:cNvSpPr>
+            <a:spLocks xmlns:a="http://schemas.openxmlformats.org/drawingml/2006/main" noGrp="1"/>
+          </p:cNvSpPr>
+          <p:nvPr/>
+        </p:nvSpPr>
+        <p:spPr>
+          <a:xfrm xmlns:a="http://schemas.openxmlformats.org/drawingml/2006/main">
+            <a:off x="1257300" y="6076950"/>
+            <a:ext cx="13011150" cy="247650"/>
+          </a:xfrm>
+          <a:prstGeom xmlns:a="http://schemas.openxmlformats.org/drawingml/2006/main" prst="rect">
+            <a:avLst/>
+          </a:prstGeom>
+          <a:noFill xmlns:a="http://schemas.openxmlformats.org/drawingml/2006/main"/>
+          <a:ln xmlns:a="http://schemas.openxmlformats.org/drawingml/2006/main" w="0">
+            <a:noFill/>
+            <a:prstDash val="solid"/>
+          </a:ln>
+        </p:spPr>
+        <p:txBody>
+          <a:bodyPr xmlns:a="http://schemas.openxmlformats.org/drawingml/2006/main"/>
+          <a:lstStyle xmlns:a="http://schemas.openxmlformats.org/drawingml/2006/main"/>
+          <a:p xmlns:a="http://schemas.openxmlformats.org/drawingml/2006/main">
+            <a:pPr>
+              <a:defRPr sz="1200" b="0">
+                <a:solidFill>
+                  <a:srgbClr val="334155"/>
+                </a:solidFill>
+              </a:defRPr>
+            </a:pPr>
+            <a:r>
+              <a:rPr sz="1200" b="0">
+                <a:solidFill>
+                  <a:srgbClr val="334155"/>
+                </a:solidFill>
+              </a:rPr>
+              <a:t>A  Zero     |     B  None     |     C  An estimate</a:t>
+            </a:r>
+          </a:p>
+        </p:txBody>
+      </p:sp>
+    </p:spTree>
+    <p:extLst>
+      <p:ext uri="{BB962C8B-B14F-4D97-AF65-F5344CB8AC3E}">
+        <p14:creationId xmlns:p14="http://schemas.microsoft.com/office/powerpoint/2010/main" val="767502565"/>
+      </p:ext>
+    </p:extLst>
+  </p:cSld>
+</p:sld>
+</file>
+
+<file path=ppt/slides/slide9.xml><?xml version="1.0" encoding="utf-8"?>
+<p:sld xmlns:p="http://schemas.openxmlformats.org/presentationml/2006/main">
+  <p:cSld>
+    <p:bg>
+      <p:bgPr>
+        <a:solidFill xmlns:a="http://schemas.openxmlformats.org/drawingml/2006/main">
+          <a:srgbClr val="F5F5F5"/>
+        </a:solidFill>
+      </p:bgPr>
+    </p:bg>
+    <p:spTree>
+      <p:nvGrpSpPr>
+        <p:cNvPr id="1" name=""/>
+        <p:cNvGrpSpPr/>
+        <p:nvPr/>
+      </p:nvGrpSpPr>
+      <p:grpSpPr>
+        <a:xfrm xmlns:a="http://schemas.openxmlformats.org/drawingml/2006/main"/>
+      </p:grpSpPr>
+      <p:sp>
+        <p:nvSpPr>
+          <p:cNvPr id="7" name="">
+            <a:extLst xmlns:a="http://schemas.openxmlformats.org/drawingml/2006/main">
+              <a:ext uri="{FF2B5EF4-FFF2-40B4-BE49-F238E27FC236}">
+                <a16:creationId xmlns:a16="http://schemas.microsoft.com/office/drawing/2014/main" id="{1291AC7A-C390-4918-960F-B031B7C93A63}"/>
+              </a:ext>
+            </a:extLst>
+          </p:cNvPr>
+          <p:cNvSpPr>
+            <a:spLocks xmlns:a="http://schemas.openxmlformats.org/drawingml/2006/main" noGrp="1"/>
+          </p:cNvSpPr>
+          <p:nvPr/>
+        </p:nvSpPr>
+        <p:spPr>
+          <a:xfrm xmlns:a="http://schemas.openxmlformats.org/drawingml/2006/main">
+            <a:off x="971550" y="781050"/>
+            <a:ext cx="1257300" cy="76200"/>
+          </a:xfrm>
+          <a:prstGeom xmlns:a="http://schemas.openxmlformats.org/drawingml/2006/main" prst="rect">
+            <a:avLst/>
+          </a:prstGeom>
+          <a:solidFill xmlns:a="http://schemas.openxmlformats.org/drawingml/2006/main">
+            <a:srgbClr val="00A2EB"/>
+          </a:solidFill>
+          <a:ln xmlns:a="http://schemas.openxmlformats.org/drawingml/2006/main" w="9525">
+            <a:solidFill>
+              <a:srgbClr val="00A2EB"/>
+            </a:solidFill>
+            <a:prstDash val="solid"/>
+          </a:ln>
+        </p:spPr>
+      </p:sp>
+      <p:sp>
+        <p:nvSpPr>
+          <p:cNvPr id="2" name="">
+            <a:extLst xmlns:a="http://schemas.openxmlformats.org/drawingml/2006/main">
+              <a:ext uri="{FF2B5EF4-FFF2-40B4-BE49-F238E27FC236}">
+                <a16:creationId xmlns:a16="http://schemas.microsoft.com/office/drawing/2014/main" id="{64682EC5-19B2-4E56-87B3-7ADF11BC6291}"/>
+              </a:ext>
+            </a:extLst>
+          </p:cNvPr>
+          <p:cNvSpPr>
+            <a:spLocks xmlns:a="http://schemas.openxmlformats.org/drawingml/2006/main" noGrp="1"/>
+          </p:cNvSpPr>
+          <p:nvPr/>
+        </p:nvSpPr>
+        <p:spPr>
+          <a:xfrm xmlns:a="http://schemas.openxmlformats.org/drawingml/2006/main">
+            <a:off x="971550" y="1104900"/>
+            <a:ext cx="3048000" cy="304800"/>
+          </a:xfrm>
+          <a:prstGeom xmlns:a="http://schemas.openxmlformats.org/drawingml/2006/main" prst="rect">
+            <a:avLst/>
+          </a:prstGeom>
+          <a:noFill xmlns:a="http://schemas.openxmlformats.org/drawingml/2006/main"/>
+          <a:ln xmlns:a="http://schemas.openxmlformats.org/drawingml/2006/main" w="0">
+            <a:noFill/>
+            <a:prstDash val="solid"/>
+          </a:ln>
+        </p:spPr>
+        <p:txBody>
+          <a:bodyPr xmlns:a="http://schemas.openxmlformats.org/drawingml/2006/main" lIns="0" tIns="0" rIns="0" bIns="0" anchor="t"/>
+          <a:lstStyle xmlns:a="http://schemas.openxmlformats.org/drawingml/2006/main"/>
+          <a:p xmlns:a="http://schemas.openxmlformats.org/drawingml/2006/main">
+            <a:pPr>
+              <a:buNone/>
+              <a:defRPr sz="1500" b="1">
+                <a:solidFill>
+                  <a:srgbClr val="1F40CB"/>
+                </a:solidFill>
+                <a:latin typeface="Calibri"/>
+                <a:ea typeface="Calibri"/>
+                <a:cs typeface="Calibri"/>
+              </a:defRPr>
+            </a:pPr>
+            <a:r>
+              <a:rPr sz="1500" b="1">
+                <a:solidFill>
+                  <a:srgbClr val="1F40CB"/>
+                </a:solidFill>
+                <a:latin typeface="Calibri"/>
+                <a:ea typeface="Calibri"/>
+                <a:cs typeface="Calibri"/>
+              </a:rPr>
+              <a:t>FIRST FINANCE</a:t>
+            </a:r>
+          </a:p>
+        </p:txBody>
+      </p:sp>
+      <p:sp>
+        <p:nvSpPr>
+          <p:cNvPr id="3" name="">
+            <a:extLst xmlns:a="http://schemas.openxmlformats.org/drawingml/2006/main">
+              <a:ext uri="{FF2B5EF4-FFF2-40B4-BE49-F238E27FC236}">
+                <a16:creationId xmlns:a16="http://schemas.microsoft.com/office/drawing/2014/main" id="{728B1E4B-A80D-4DD8-B9C5-6F19ACF9BC87}"/>
+              </a:ext>
+            </a:extLst>
+          </p:cNvPr>
+          <p:cNvSpPr>
+            <a:spLocks xmlns:a="http://schemas.openxmlformats.org/drawingml/2006/main" noGrp="1"/>
+          </p:cNvSpPr>
+          <p:nvPr/>
+        </p:nvSpPr>
+        <p:spPr>
+          <a:xfrm xmlns:a="http://schemas.openxmlformats.org/drawingml/2006/main">
+            <a:off x="971550" y="2400300"/>
+            <a:ext cx="9334500" cy="1000125"/>
+          </a:xfrm>
+          <a:prstGeom xmlns:a="http://schemas.openxmlformats.org/drawingml/2006/main" prst="rect">
+            <a:avLst/>
+          </a:prstGeom>
+          <a:noFill xmlns:a="http://schemas.openxmlformats.org/drawingml/2006/main"/>
+          <a:ln xmlns:a="http://schemas.openxmlformats.org/drawingml/2006/main" w="0">
+            <a:noFill/>
+            <a:prstDash val="solid"/>
+          </a:ln>
+        </p:spPr>
+        <p:txBody>
+          <a:bodyPr xmlns:a="http://schemas.openxmlformats.org/drawingml/2006/main" lIns="0" tIns="0" rIns="0" bIns="0" anchor="t"/>
+          <a:lstStyle xmlns:a="http://schemas.openxmlformats.org/drawingml/2006/main"/>
+          <a:p xmlns:a="http://schemas.openxmlformats.org/drawingml/2006/main">
+            <a:pPr>
+              <a:buNone/>
+              <a:defRPr sz="4950" b="1">
+                <a:solidFill>
+                  <a:srgbClr val="051C2A"/>
+                </a:solidFill>
+                <a:latin typeface="Calibri"/>
+                <a:ea typeface="Calibri"/>
+                <a:cs typeface="Calibri"/>
+              </a:defRPr>
+            </a:pPr>
+            <a:r>
+              <a:rPr sz="4950" b="1">
+                <a:solidFill>
+                  <a:srgbClr val="051C2A"/>
+                </a:solidFill>
+                <a:latin typeface="Calibri"/>
+                <a:ea typeface="Calibri"/>
+                <a:cs typeface="Calibri"/>
+              </a:rPr>
+              <a:t>Answers</a:t>
+            </a:r>
+          </a:p>
+        </p:txBody>
+      </p:sp>
+      <p:sp>
+        <p:nvSpPr>
+          <p:cNvPr id="4" name="">
+            <a:extLst xmlns:a="http://schemas.openxmlformats.org/drawingml/2006/main">
+              <a:ext uri="{FF2B5EF4-FFF2-40B4-BE49-F238E27FC236}">
+                <a16:creationId xmlns:a16="http://schemas.microsoft.com/office/drawing/2014/main" id="{EE83E63A-968D-469D-97F9-C2D3B82A7E4D}"/>
+              </a:ext>
+            </a:extLst>
+          </p:cNvPr>
+          <p:cNvSpPr>
+            <a:spLocks xmlns:a="http://schemas.openxmlformats.org/drawingml/2006/main" noGrp="1"/>
+          </p:cNvSpPr>
+          <p:nvPr/>
+        </p:nvSpPr>
+        <p:spPr>
+          <a:xfrm xmlns:a="http://schemas.openxmlformats.org/drawingml/2006/main">
+            <a:off x="971550" y="3638550"/>
+            <a:ext cx="10668000" cy="552450"/>
+          </a:xfrm>
+          <a:prstGeom xmlns:a="http://schemas.openxmlformats.org/drawingml/2006/main" prst="rect">
+            <a:avLst/>
+          </a:prstGeom>
+          <a:noFill xmlns:a="http://schemas.openxmlformats.org/drawingml/2006/main"/>
+          <a:ln xmlns:a="http://schemas.openxmlformats.org/drawingml/2006/main" w="0">
+            <a:noFill/>
+            <a:prstDash val="solid"/>
+          </a:ln>
+        </p:spPr>
+        <p:txBody>
+          <a:bodyPr xmlns:a="http://schemas.openxmlformats.org/drawingml/2006/main" lIns="0" tIns="0" rIns="0" bIns="0" anchor="t"/>
+          <a:lstStyle xmlns:a="http://schemas.openxmlformats.org/drawingml/2006/main"/>
+          <a:p xmlns:a="http://schemas.openxmlformats.org/drawingml/2006/main">
+            <a:pPr>
+              <a:buNone/>
+              <a:defRPr sz="2400">
+                <a:solidFill>
+                  <a:srgbClr val="373738"/>
+                </a:solidFill>
+                <a:latin typeface="Calibri"/>
+                <a:ea typeface="Calibri"/>
+                <a:cs typeface="Calibri"/>
+              </a:defRPr>
+            </a:pPr>
+            <a:r>
+              <a:rPr sz="2400">
+                <a:solidFill>
+                  <a:srgbClr val="373738"/>
+                </a:solidFill>
+                <a:latin typeface="Calibri"/>
+                <a:ea typeface="Calibri"/>
+                <a:cs typeface="Calibri"/>
+              </a:rPr>
+              <a:t>Check the idea, not only the letter.</a:t>
+            </a:r>
+          </a:p>
+        </p:txBody>
+      </p:sp>
+      <p:sp>
+        <p:nvSpPr>
+          <p:cNvPr id="5" name="">
+            <a:extLst xmlns:a="http://schemas.openxmlformats.org/drawingml/2006/main">
+              <a:ext uri="{FF2B5EF4-FFF2-40B4-BE49-F238E27FC236}">
+                <a16:creationId xmlns:a16="http://schemas.microsoft.com/office/drawing/2014/main" id="{001333EC-2C9C-4877-BD13-41F8B87FC676}"/>
+              </a:ext>
+            </a:extLst>
+          </p:cNvPr>
+          <p:cNvSpPr>
+            <a:spLocks xmlns:a="http://schemas.openxmlformats.org/drawingml/2006/main" noGrp="1"/>
+          </p:cNvSpPr>
+          <p:nvPr/>
+        </p:nvSpPr>
+        <p:spPr>
+          <a:xfrm xmlns:a="http://schemas.openxmlformats.org/drawingml/2006/main">
+            <a:off x="971550" y="6610350"/>
+            <a:ext cx="9525000" cy="323850"/>
+          </a:xfrm>
+          <a:prstGeom xmlns:a="http://schemas.openxmlformats.org/drawingml/2006/main" prst="rect">
+            <a:avLst/>
+          </a:prstGeom>
+          <a:noFill xmlns:a="http://schemas.openxmlformats.org/drawingml/2006/main"/>
+          <a:ln xmlns:a="http://schemas.openxmlformats.org/drawingml/2006/main" w="0">
+            <a:noFill/>
+            <a:prstDash val="solid"/>
+          </a:ln>
+        </p:spPr>
+        <p:txBody>
+          <a:bodyPr xmlns:a="http://schemas.openxmlformats.org/drawingml/2006/main" lIns="0" tIns="0" rIns="0" bIns="0" anchor="t"/>
+          <a:lstStyle xmlns:a="http://schemas.openxmlformats.org/drawingml/2006/main"/>
+          <a:p xmlns:a="http://schemas.openxmlformats.org/drawingml/2006/main">
+            <a:pPr>
+              <a:buNone/>
+              <a:defRPr sz="1425" b="1">
+                <a:solidFill>
+                  <a:srgbClr val="1F40CB"/>
+                </a:solidFill>
+                <a:latin typeface="Calibri"/>
+                <a:ea typeface="Calibri"/>
+                <a:cs typeface="Calibri"/>
+              </a:defRPr>
+            </a:pPr>
+            <a:r>
+              <a:rPr sz="1425" b="1">
+                <a:solidFill>
+                  <a:srgbClr val="1F40CB"/>
+                </a:solidFill>
+                <a:latin typeface="Calibri"/>
+                <a:ea typeface="Calibri"/>
+                <a:cs typeface="Calibri"/>
+              </a:rPr>
+              <a:t>LESSON 01  ·  CORRECTION</a:t>
+            </a:r>
+          </a:p>
+        </p:txBody>
+      </p:sp>
+      <p:sp>
+        <p:nvSpPr>
+          <p:cNvPr id="6" name="">
+            <a:extLst xmlns:a="http://schemas.openxmlformats.org/drawingml/2006/main">
+              <a:ext uri="{FF2B5EF4-FFF2-40B4-BE49-F238E27FC236}">
+                <a16:creationId xmlns:a16="http://schemas.microsoft.com/office/drawing/2014/main" id="{C1C3877F-F854-40AF-9C55-8A4B72F80AEA}"/>
+              </a:ext>
+            </a:extLst>
+          </p:cNvPr>
+          <p:cNvSpPr>
+            <a:spLocks xmlns:a="http://schemas.openxmlformats.org/drawingml/2006/main" noGrp="1"/>
+          </p:cNvSpPr>
+          <p:nvPr/>
+        </p:nvSpPr>
+        <p:spPr>
+          <a:xfrm xmlns:a="http://schemas.openxmlformats.org/drawingml/2006/main">
+            <a:off x="971550" y="7162800"/>
+            <a:ext cx="5143500" cy="361950"/>
+          </a:xfrm>
+          <a:prstGeom xmlns:a="http://schemas.openxmlformats.org/drawingml/2006/main" prst="rect">
+            <a:avLst/>
+          </a:prstGeom>
+          <a:noFill xmlns:a="http://schemas.openxmlformats.org/drawingml/2006/main"/>
+          <a:ln xmlns:a="http://schemas.openxmlformats.org/drawingml/2006/main" w="0">
+            <a:noFill/>
+            <a:prstDash val="solid"/>
+          </a:ln>
+        </p:spPr>
+        <p:txBody>
+          <a:bodyPr xmlns:a="http://schemas.openxmlformats.org/drawingml/2006/main" lIns="0" tIns="0" rIns="0" bIns="0" anchor="t"/>
+          <a:lstStyle xmlns:a="http://schemas.openxmlformats.org/drawingml/2006/main"/>
+          <a:p xmlns:a="http://schemas.openxmlformats.org/drawingml/2006/main">
+            <a:pPr>
+              <a:buNone/>
+              <a:defRPr sz="1800">
+                <a:solidFill>
+                  <a:srgbClr val="051C2A"/>
+                </a:solidFill>
+                <a:latin typeface="Calibri"/>
+                <a:ea typeface="Calibri"/>
+                <a:cs typeface="Calibri"/>
+              </a:defRPr>
+            </a:pPr>
+            <a:r>
+              <a:rPr sz="1800">
+                <a:solidFill>
+                  <a:srgbClr val="051C2A"/>
+                </a:solidFill>
+                <a:latin typeface="Calibri"/>
+                <a:ea typeface="Calibri"/>
+                <a:cs typeface="Calibri"/>
+              </a:rPr>
+              <a:t>First Finance - Arnaud Demes</a:t>
+            </a:r>
+          </a:p>
+        </p:txBody>
+      </p:sp>
+      <p:sp>
+        <p:nvSpPr>
+          <p:cNvPr id="8" name="quiz-answer-1">
+            <a:extLst xmlns:a="http://schemas.openxmlformats.org/drawingml/2006/main">
+              <a:ext uri="{FF2B5EF4-FFF2-40B4-BE49-F238E27FC236}">
+                <a16:creationId xmlns:a16="http://schemas.microsoft.com/office/drawing/2014/main" id="{3204DA93-A6A4-440A-8B66-1D43E0675402}"/>
+              </a:ext>
+            </a:extLst>
+          </p:cNvPr>
+          <p:cNvSpPr>
+            <a:spLocks xmlns:a="http://schemas.openxmlformats.org/drawingml/2006/main" noGrp="1"/>
+          </p:cNvSpPr>
+          <p:nvPr/>
+        </p:nvSpPr>
+        <p:spPr>
+          <a:xfrm xmlns:a="http://schemas.openxmlformats.org/drawingml/2006/main">
+            <a:off x="971550" y="4400550"/>
+            <a:ext cx="13296900" cy="285750"/>
+          </a:xfrm>
+          <a:prstGeom xmlns:a="http://schemas.openxmlformats.org/drawingml/2006/main" prst="rect">
+            <a:avLst/>
+          </a:prstGeom>
+          <a:noFill xmlns:a="http://schemas.openxmlformats.org/drawingml/2006/main"/>
+          <a:ln xmlns:a="http://schemas.openxmlformats.org/drawingml/2006/main" w="0">
+            <a:noFill/>
+            <a:prstDash val="solid"/>
+          </a:ln>
+        </p:spPr>
+        <p:txBody>
+          <a:bodyPr xmlns:a="http://schemas.openxmlformats.org/drawingml/2006/main"/>
+          <a:lstStyle xmlns:a="http://schemas.openxmlformats.org/drawingml/2006/main"/>
+          <a:p xmlns:a="http://schemas.openxmlformats.org/drawingml/2006/main">
+            <a:pPr>
+              <a:defRPr sz="1500" b="1">
+                <a:solidFill>
+                  <a:srgbClr val="1F40CB"/>
+                </a:solidFill>
+              </a:defRPr>
+            </a:pPr>
+            <a:r>
+              <a:rPr sz="1500" b="1">
+                <a:solidFill>
+                  <a:srgbClr val="1F40CB"/>
+                </a:solidFill>
+              </a:rPr>
+              <a:t>1. B. Model gateway</a:t>
+            </a:r>
+          </a:p>
+        </p:txBody>
+      </p:sp>
+      <p:sp>
+        <p:nvSpPr>
+          <p:cNvPr id="9" name="quiz-explanation-1">
+            <a:extLst xmlns:a="http://schemas.openxmlformats.org/drawingml/2006/main">
+              <a:ext uri="{FF2B5EF4-FFF2-40B4-BE49-F238E27FC236}">
+                <a16:creationId xmlns:a16="http://schemas.microsoft.com/office/drawing/2014/main" id="{1AE726AF-4E9A-4C19-BF3B-6A6049C8590C}"/>
+              </a:ext>
+            </a:extLst>
+          </p:cNvPr>
+          <p:cNvSpPr>
+            <a:spLocks xmlns:a="http://schemas.openxmlformats.org/drawingml/2006/main" noGrp="1"/>
+          </p:cNvSpPr>
+          <p:nvPr/>
+        </p:nvSpPr>
+        <p:spPr>
+          <a:xfrm xmlns:a="http://schemas.openxmlformats.org/drawingml/2006/main">
+            <a:off x="1257300" y="4705350"/>
+            <a:ext cx="13011150" cy="247650"/>
+          </a:xfrm>
+          <a:prstGeom xmlns:a="http://schemas.openxmlformats.org/drawingml/2006/main" prst="rect">
+            <a:avLst/>
+          </a:prstGeom>
+          <a:noFill xmlns:a="http://schemas.openxmlformats.org/drawingml/2006/main"/>
+          <a:ln xmlns:a="http://schemas.openxmlformats.org/drawingml/2006/main" w="0">
+            <a:noFill/>
+            <a:prstDash val="solid"/>
+          </a:ln>
+        </p:spPr>
+        <p:txBody>
+          <a:bodyPr xmlns:a="http://schemas.openxmlformats.org/drawingml/2006/main"/>
+          <a:lstStyle xmlns:a="http://schemas.openxmlformats.org/drawingml/2006/main"/>
+          <a:p xmlns:a="http://schemas.openxmlformats.org/drawingml/2006/main">
+            <a:pPr>
+              <a:defRPr sz="1200" b="0">
+                <a:solidFill>
+                  <a:srgbClr val="334155"/>
+                </a:solidFill>
+              </a:defRPr>
+            </a:pPr>
+            <a:r>
+              <a:rPr sz="1200" b="0">
+                <a:solidFill>
+                  <a:srgbClr val="334155"/>
+                </a:solidFill>
+              </a:rPr>
+              <a:t>It keeps provider changes behind one stable application interface.</a:t>
+            </a:r>
+          </a:p>
+        </p:txBody>
+      </p:sp>
+      <p:sp>
+        <p:nvSpPr>
+          <p:cNvPr id="10" name="quiz-answer-2">
+            <a:extLst xmlns:a="http://schemas.openxmlformats.org/drawingml/2006/main">
+              <a:ext uri="{FF2B5EF4-FFF2-40B4-BE49-F238E27FC236}">
+                <a16:creationId xmlns:a16="http://schemas.microsoft.com/office/drawing/2014/main" id="{5CF84115-5676-4FDB-8457-A8680B20AE16}"/>
+              </a:ext>
+            </a:extLst>
+          </p:cNvPr>
+          <p:cNvSpPr>
+            <a:spLocks xmlns:a="http://schemas.openxmlformats.org/drawingml/2006/main" noGrp="1"/>
+          </p:cNvSpPr>
+          <p:nvPr/>
+        </p:nvSpPr>
+        <p:spPr>
+          <a:xfrm xmlns:a="http://schemas.openxmlformats.org/drawingml/2006/main">
+            <a:off x="971550" y="5086350"/>
+            <a:ext cx="13296900" cy="285750"/>
+          </a:xfrm>
+          <a:prstGeom xmlns:a="http://schemas.openxmlformats.org/drawingml/2006/main" prst="rect">
+            <a:avLst/>
+          </a:prstGeom>
+          <a:noFill xmlns:a="http://schemas.openxmlformats.org/drawingml/2006/main"/>
+          <a:ln xmlns:a="http://schemas.openxmlformats.org/drawingml/2006/main" w="0">
+            <a:noFill/>
+            <a:prstDash val="solid"/>
+          </a:ln>
+        </p:spPr>
+        <p:txBody>
+          <a:bodyPr xmlns:a="http://schemas.openxmlformats.org/drawingml/2006/main"/>
+          <a:lstStyle xmlns:a="http://schemas.openxmlformats.org/drawingml/2006/main"/>
+          <a:p xmlns:a="http://schemas.openxmlformats.org/drawingml/2006/main">
+            <a:pPr>
+              <a:defRPr sz="1500" b="1">
+                <a:solidFill>
+                  <a:srgbClr val="1F40CB"/>
+                </a:solidFill>
+              </a:defRPr>
+            </a:pPr>
+            <a:r>
+              <a:rPr sz="1500" b="1">
+                <a:solidFill>
+                  <a:srgbClr val="1F40CB"/>
+                </a:solidFill>
+              </a:rPr>
+              <a:t>2. A. Delivery</a:t>
+            </a:r>
+          </a:p>
+        </p:txBody>
+      </p:sp>
+      <p:sp>
+        <p:nvSpPr>
+          <p:cNvPr id="11" name="quiz-explanation-2">
+            <a:extLst xmlns:a="http://schemas.openxmlformats.org/drawingml/2006/main">
+              <a:ext uri="{FF2B5EF4-FFF2-40B4-BE49-F238E27FC236}">
+                <a16:creationId xmlns:a16="http://schemas.microsoft.com/office/drawing/2014/main" id="{C0A11BD1-E2FB-4B9E-9E45-B60ED36E0EFD}"/>
+              </a:ext>
+            </a:extLst>
+          </p:cNvPr>
+          <p:cNvSpPr>
+            <a:spLocks xmlns:a="http://schemas.openxmlformats.org/drawingml/2006/main" noGrp="1"/>
+          </p:cNvSpPr>
+          <p:nvPr/>
+        </p:nvSpPr>
+        <p:spPr>
+          <a:xfrm xmlns:a="http://schemas.openxmlformats.org/drawingml/2006/main">
+            <a:off x="1257300" y="5391150"/>
+            <a:ext cx="13011150" cy="247650"/>
+          </a:xfrm>
+          <a:prstGeom xmlns:a="http://schemas.openxmlformats.org/drawingml/2006/main" prst="rect">
+            <a:avLst/>
+          </a:prstGeom>
+          <a:noFill xmlns:a="http://schemas.openxmlformats.org/drawingml/2006/main"/>
+          <a:ln xmlns:a="http://schemas.openxmlformats.org/drawingml/2006/main" w="0">
+            <a:noFill/>
+            <a:prstDash val="solid"/>
+          </a:ln>
+        </p:spPr>
+        <p:txBody>
+          <a:bodyPr xmlns:a="http://schemas.openxmlformats.org/drawingml/2006/main"/>
+          <a:lstStyle xmlns:a="http://schemas.openxmlformats.org/drawingml/2006/main"/>
+          <a:p xmlns:a="http://schemas.openxmlformats.org/drawingml/2006/main">
+            <a:pPr>
+              <a:defRPr sz="1200" b="0">
+                <a:solidFill>
+                  <a:srgbClr val="334155"/>
+                </a:solidFill>
+              </a:defRPr>
+            </a:pPr>
+            <a:r>
+              <a:rPr sz="1200" b="0">
+                <a:solidFill>
+                  <a:srgbClr val="334155"/>
+                </a:solidFill>
+              </a:rPr>
+              <a:t>Streaming changes when output appears, not whether the answer is grounded.</a:t>
+            </a:r>
+          </a:p>
+        </p:txBody>
+      </p:sp>
+      <p:sp>
+        <p:nvSpPr>
+          <p:cNvPr id="12" name="quiz-answer-3">
+            <a:extLst xmlns:a="http://schemas.openxmlformats.org/drawingml/2006/main">
+              <a:ext uri="{FF2B5EF4-FFF2-40B4-BE49-F238E27FC236}">
+                <a16:creationId xmlns:a16="http://schemas.microsoft.com/office/drawing/2014/main" id="{555D52B7-D7E5-4BB9-8818-7ED7557C5636}"/>
+              </a:ext>
+            </a:extLst>
+          </p:cNvPr>
+          <p:cNvSpPr>
+            <a:spLocks xmlns:a="http://schemas.openxmlformats.org/drawingml/2006/main" noGrp="1"/>
+          </p:cNvSpPr>
+          <p:nvPr/>
+        </p:nvSpPr>
+        <p:spPr>
+          <a:xfrm xmlns:a="http://schemas.openxmlformats.org/drawingml/2006/main">
+            <a:off x="971550" y="5772150"/>
+            <a:ext cx="13296900" cy="285750"/>
+          </a:xfrm>
+          <a:prstGeom xmlns:a="http://schemas.openxmlformats.org/drawingml/2006/main" prst="rect">
+            <a:avLst/>
+          </a:prstGeom>
+          <a:noFill xmlns:a="http://schemas.openxmlformats.org/drawingml/2006/main"/>
+          <a:ln xmlns:a="http://schemas.openxmlformats.org/drawingml/2006/main" w="0">
+            <a:noFill/>
+            <a:prstDash val="solid"/>
+          </a:ln>
+        </p:spPr>
+        <p:txBody>
+          <a:bodyPr xmlns:a="http://schemas.openxmlformats.org/drawingml/2006/main"/>
+          <a:lstStyle xmlns:a="http://schemas.openxmlformats.org/drawingml/2006/main"/>
+          <a:p xmlns:a="http://schemas.openxmlformats.org/drawingml/2006/main">
+            <a:pPr>
+              <a:defRPr sz="1500" b="1">
+                <a:solidFill>
+                  <a:srgbClr val="1F40CB"/>
+                </a:solidFill>
+              </a:defRPr>
+            </a:pPr>
+            <a:r>
+              <a:rPr sz="1500" b="1">
+                <a:solidFill>
+                  <a:srgbClr val="1F40CB"/>
+                </a:solidFill>
+              </a:rPr>
+              <a:t>3. B. None</a:t>
+            </a:r>
+          </a:p>
+        </p:txBody>
+      </p:sp>
+      <p:sp>
+        <p:nvSpPr>
+          <p:cNvPr id="13" name="quiz-explanation-3">
+            <a:extLst xmlns:a="http://schemas.openxmlformats.org/drawingml/2006/main">
+              <a:ext uri="{FF2B5EF4-FFF2-40B4-BE49-F238E27FC236}">
+                <a16:creationId xmlns:a16="http://schemas.microsoft.com/office/drawing/2014/main" id="{0196E178-EF1C-4FC5-852F-64D157DA77E5}"/>
+              </a:ext>
+            </a:extLst>
+          </p:cNvPr>
+          <p:cNvSpPr>
+            <a:spLocks xmlns:a="http://schemas.openxmlformats.org/drawingml/2006/main" noGrp="1"/>
+          </p:cNvSpPr>
+          <p:nvPr/>
+        </p:nvSpPr>
+        <p:spPr>
+          <a:xfrm xmlns:a="http://schemas.openxmlformats.org/drawingml/2006/main">
+            <a:off x="1257300" y="6076950"/>
+            <a:ext cx="13011150" cy="247650"/>
+          </a:xfrm>
+          <a:prstGeom xmlns:a="http://schemas.openxmlformats.org/drawingml/2006/main" prst="rect">
+            <a:avLst/>
+          </a:prstGeom>
+          <a:noFill xmlns:a="http://schemas.openxmlformats.org/drawingml/2006/main"/>
+          <a:ln xmlns:a="http://schemas.openxmlformats.org/drawingml/2006/main" w="0">
+            <a:noFill/>
+            <a:prstDash val="solid"/>
+          </a:ln>
+        </p:spPr>
+        <p:txBody>
+          <a:bodyPr xmlns:a="http://schemas.openxmlformats.org/drawingml/2006/main"/>
+          <a:lstStyle xmlns:a="http://schemas.openxmlformats.org/drawingml/2006/main"/>
+          <a:p xmlns:a="http://schemas.openxmlformats.org/drawingml/2006/main">
+            <a:pPr>
+              <a:defRPr sz="1200" b="0">
+                <a:solidFill>
+                  <a:srgbClr val="334155"/>
+                </a:solidFill>
+              </a:defRPr>
+            </a:pPr>
+            <a:r>
+              <a:rPr sz="1200" b="0">
+                <a:solidFill>
+                  <a:srgbClr val="334155"/>
+                </a:solidFill>
+              </a:rPr>
+              <a:t>Missing metadata stays unknown instead of becoming an invented number.</a:t>
+            </a:r>
+          </a:p>
+        </p:txBody>
+      </p:sp>
+    </p:spTree>
+    <p:extLst>
+      <p:ext uri="{BB962C8B-B14F-4D97-AF65-F5344CB8AC3E}">
+        <p14:creationId xmlns:p14="http://schemas.microsoft.com/office/powerpoint/2010/main" val="767502565"/>
+      </p:ext>
+    </p:extLst>
+  </p:cSld>
+</p:sld>
+</file>
+
 <file path=ppt/theme/theme1.xml><?xml version="1.0" encoding="utf-8"?>
 <a:theme xmlns:a="http://schemas.openxmlformats.org/drawingml/2006/main" name="ChatGPT">
   <a:themeElements>
